--- a/slide/pratica/07/Aula07 - Algebra Booleana Parte 2.pptx
+++ b/slide/pratica/07/Aula07 - Algebra Booleana Parte 2.pptx
@@ -4,6 +4,9 @@
   <p:sldMasterIdLst>
     <p:sldMasterId id="2147483648" r:id="rId1"/>
   </p:sldMasterIdLst>
+  <p:notesMasterIdLst>
+    <p:notesMasterId r:id="rId32"/>
+  </p:notesMasterIdLst>
   <p:sldIdLst>
     <p:sldId id="256" r:id="rId2"/>
     <p:sldId id="257" r:id="rId3"/>
@@ -36,9 +39,6 @@
     <p:sldId id="284" r:id="rId30"/>
     <p:sldId id="285" r:id="rId31"/>
   </p:sldIdLst>
-  <p:notesMasterIdLst>
-    <p:notesMasterId r:id="rId32"/>
-  </p:notesMasterIdLst>
   <p:sldSz cx="12192000" cy="6858000"/>
   <p:notesSz cx="6858000" cy="12192000"/>
   <p:defaultTextStyle>
@@ -133,6 +133,11 @@
       </a:defRPr>
     </a:lvl9pPr>
   </p:defaultTextStyle>
+  <p:extLst>
+    <p:ext uri="{EFAFB233-063F-42B5-8137-9DF3F51BA10A}">
+      <p15:sldGuideLst xmlns:p15="http://schemas.microsoft.com/office/powerpoint/2012/main"/>
+    </p:ext>
+  </p:extLst>
 </p:presentation>
 </file>
 
@@ -158,234 +163,10 @@
           <a:chExt cx="0" cy="0"/>
         </a:xfrm>
       </p:grpSpPr>
-      <p:sp>
-        <p:nvSpPr>
-          <p:cNvPr id="2" name="Header Placeholder 1"/>
-          <p:cNvSpPr>
-            <a:spLocks noGrp="1"/>
-          </p:cNvSpPr>
-          <p:nvPr>
-            <p:ph type="hdr" sz="quarter"/>
-          </p:nvPr>
-        </p:nvSpPr>
-        <p:spPr>
-          <a:xfrm>
-            <a:off x="0" y="0"/>
-            <a:ext cx="2971800" cy="458788"/>
-          </a:xfrm>
-          <a:prstGeom prst="rect">
-            <a:avLst/>
-          </a:prstGeom>
-        </p:spPr>
-        <p:txBody>
-          <a:bodyPr vert="horz" lIns="91440" tIns="45720" rIns="91440" bIns="45720" rtlCol="0"/>
-          <a:lstStyle>
-            <a:lvl1pPr algn="l">
-              <a:defRPr sz="1200"/>
-            </a:lvl1pPr>
-          </a:lstStyle>
-          <a:p>
-            <a:endParaRPr lang="en-US"/>
-          </a:p>
-        </p:txBody>
-      </p:sp>
-      <p:sp>
-        <p:nvSpPr>
-          <p:cNvPr id="3" name="Date Placeholder 2"/>
-          <p:cNvSpPr>
-            <a:spLocks noGrp="1"/>
-          </p:cNvSpPr>
-          <p:nvPr>
-            <p:ph type="dt" idx="1"/>
-          </p:nvPr>
-        </p:nvSpPr>
-        <p:spPr>
-          <a:xfrm>
-            <a:off x="3884613" y="0"/>
-            <a:ext cx="2971800" cy="458788"/>
-          </a:xfrm>
-          <a:prstGeom prst="rect">
-            <a:avLst/>
-          </a:prstGeom>
-        </p:spPr>
-        <p:txBody>
-          <a:bodyPr vert="horz" lIns="91440" tIns="45720" rIns="91440" bIns="45720" rtlCol="0"/>
-          <a:lstStyle>
-            <a:lvl1pPr algn="r">
-              <a:defRPr sz="1200"/>
-            </a:lvl1pPr>
-          </a:lstStyle>
-          <a:p>
-            <a:fld id="{5282F153-3F37-0F45-9E97-73ACFA13230C}" type="datetimeFigureOut">
-              <a:rPr lang="en-US"/>
-              <a:t>7/23/19</a:t>
-            </a:fld>
-            <a:endParaRPr lang="en-US"/>
-          </a:p>
-        </p:txBody>
-      </p:sp>
-      <p:sp>
-        <p:nvSpPr>
-          <p:cNvPr id="4" name="Slide Image Placeholder 3"/>
-          <p:cNvSpPr>
-            <a:spLocks noGrp="1" noRot="1" noChangeAspect="1"/>
-          </p:cNvSpPr>
-          <p:nvPr>
-            <p:ph type="sldImg" idx="2"/>
-          </p:nvPr>
-        </p:nvSpPr>
-        <p:spPr>
-          <a:xfrm>
-            <a:off x="685800" y="1143000"/>
-            <a:ext cx="5486400" cy="3086100"/>
-          </a:xfrm>
-          <a:prstGeom prst="rect">
-            <a:avLst/>
-          </a:prstGeom>
-          <a:noFill/>
-          <a:ln w="12700">
-            <a:solidFill>
-              <a:prstClr val="black"/>
-            </a:solidFill>
-          </a:ln>
-        </p:spPr>
-        <p:txBody>
-          <a:bodyPr vert="horz" lIns="91440" tIns="45720" rIns="91440" bIns="45720" rtlCol="0" anchor="ctr"/>
-          <a:lstStyle/>
-          <a:p>
-            <a:endParaRPr lang="en-US"/>
-          </a:p>
-        </p:txBody>
-      </p:sp>
-      <p:sp>
-        <p:nvSpPr>
-          <p:cNvPr id="5" name="Notes Placeholder 4"/>
-          <p:cNvSpPr>
-            <a:spLocks noGrp="1"/>
-          </p:cNvSpPr>
-          <p:nvPr>
-            <p:ph type="body" sz="quarter" idx="3"/>
-          </p:nvPr>
-        </p:nvSpPr>
-        <p:spPr>
-          <a:xfrm>
-            <a:off x="685800" y="4400550"/>
-            <a:ext cx="5486400" cy="3600450"/>
-          </a:xfrm>
-          <a:prstGeom prst="rect">
-            <a:avLst/>
-          </a:prstGeom>
-        </p:spPr>
-        <p:txBody>
-          <a:bodyPr vert="horz" lIns="91440" tIns="45720" rIns="91440" bIns="45720" rtlCol="0"/>
-          <a:lstStyle/>
-          <a:p>
-            <a:pPr lvl="0"/>
-            <a:r>
-              <a:rPr lang="en-US"/>
-              <a:t>Click to edit Master text styles</a:t>
-            </a:r>
-          </a:p>
-          <a:p>
-            <a:pPr lvl="1"/>
-            <a:r>
-              <a:rPr lang="en-US"/>
-              <a:t>Second level</a:t>
-            </a:r>
-          </a:p>
-          <a:p>
-            <a:pPr lvl="2"/>
-            <a:r>
-              <a:rPr lang="en-US"/>
-              <a:t>Third level</a:t>
-            </a:r>
-          </a:p>
-          <a:p>
-            <a:pPr lvl="3"/>
-            <a:r>
-              <a:rPr lang="en-US"/>
-              <a:t>Fourth level</a:t>
-            </a:r>
-          </a:p>
-          <a:p>
-            <a:pPr lvl="4"/>
-            <a:r>
-              <a:rPr lang="en-US"/>
-              <a:t>Fifth level</a:t>
-            </a:r>
-          </a:p>
-        </p:txBody>
-      </p:sp>
-      <p:sp>
-        <p:nvSpPr>
-          <p:cNvPr id="6" name="Footer Placeholder 5"/>
-          <p:cNvSpPr>
-            <a:spLocks noGrp="1"/>
-          </p:cNvSpPr>
-          <p:nvPr>
-            <p:ph type="ftr" sz="quarter" idx="4"/>
-          </p:nvPr>
-        </p:nvSpPr>
-        <p:spPr>
-          <a:xfrm>
-            <a:off x="0" y="8685213"/>
-            <a:ext cx="2971800" cy="458787"/>
-          </a:xfrm>
-          <a:prstGeom prst="rect">
-            <a:avLst/>
-          </a:prstGeom>
-        </p:spPr>
-        <p:txBody>
-          <a:bodyPr vert="horz" lIns="91440" tIns="45720" rIns="91440" bIns="45720" rtlCol="0" anchor="b"/>
-          <a:lstStyle>
-            <a:lvl1pPr algn="l">
-              <a:defRPr sz="1200"/>
-            </a:lvl1pPr>
-          </a:lstStyle>
-          <a:p>
-            <a:endParaRPr lang="en-US"/>
-          </a:p>
-        </p:txBody>
-      </p:sp>
-      <p:sp>
-        <p:nvSpPr>
-          <p:cNvPr id="7" name="Slide Number Placeholder 6"/>
-          <p:cNvSpPr>
-            <a:spLocks noGrp="1"/>
-          </p:cNvSpPr>
-          <p:nvPr>
-            <p:ph type="sldNum" sz="quarter" idx="5"/>
-          </p:nvPr>
-        </p:nvSpPr>
-        <p:spPr>
-          <a:xfrm>
-            <a:off x="3884613" y="8685213"/>
-            <a:ext cx="2971800" cy="458787"/>
-          </a:xfrm>
-          <a:prstGeom prst="rect">
-            <a:avLst/>
-          </a:prstGeom>
-        </p:spPr>
-        <p:txBody>
-          <a:bodyPr vert="horz" lIns="91440" tIns="45720" rIns="91440" bIns="45720" rtlCol="0" anchor="b"/>
-          <a:lstStyle>
-            <a:lvl1pPr algn="r">
-              <a:defRPr sz="1200"/>
-            </a:lvl1pPr>
-          </a:lstStyle>
-          <a:p>
-            <a:fld id="{CE5E9CC1-C706-0F49-92D6-E571CC5EEA8F}" type="slidenum">
-              <a:rPr lang="en-US"/>
-              <a:t>‹#›</a:t>
-            </a:fld>
-            <a:endParaRPr lang="en-US"/>
-          </a:p>
-        </p:txBody>
-      </p:sp>
     </p:spTree>
     <p:extLst>
       <p:ext uri="{BB962C8B-B14F-4D97-AF65-F5344CB8AC3E}">
-        <p14:creationId xmlns:p14="http://schemas.microsoft.com/office/powerpoint/2010/main" val="1024086991"/>
+        <p14:creationId xmlns:p14="http://schemas.microsoft.com/office/powerpoint/2010/main" val="2779930257"/>
       </p:ext>
     </p:extLst>
   </p:cSld>
@@ -533,7 +314,6 @@
               <a:rPr lang="en-US" dirty="0"/>
               <a:t>Recapitular rápido: na Aula 06 vimos axiomas e simplificação algébrica passo a passo. Hoje ganhamos um atalho visual.</a:t>
             </a:r>
-            <a:endParaRPr lang="en-US" dirty="0"/>
           </a:p>
         </p:txBody>
       </p:sp>
@@ -621,7 +401,6 @@
               <a:rPr lang="en-US" dirty="0"/>
               <a:t>Com 4+ variáveis a topologia vira um torus — linhas também se tocam nas bordas, além das colunas.</a:t>
             </a:r>
-            <a:endParaRPr lang="en-US" dirty="0"/>
           </a:p>
         </p:txBody>
       </p:sp>
@@ -709,7 +488,6 @@
               <a:rPr lang="en-US" dirty="0"/>
               <a:t>Este é o checklist que a turma pode usar em qualquer K-map, de 2 a 5 variáveis.</a:t>
             </a:r>
-            <a:endParaRPr lang="en-US" dirty="0"/>
           </a:p>
         </p:txBody>
       </p:sp>
@@ -797,7 +575,6 @@
               <a:rPr lang="en-US" dirty="0"/>
               <a:t>Exemplo extremo de propósito — deixa claro o efeito de tratar um X como 1 sem precisar de um mapa maior.</a:t>
             </a:r>
-            <a:endParaRPr lang="en-US" dirty="0"/>
           </a:p>
         </p:txBody>
       </p:sp>
@@ -885,7 +662,6 @@
               <a:rPr lang="en-US" dirty="0"/>
               <a:t>Não é preciso desenhar um K-map de 5 variáveis na aula — só deixar claro onde o método humano para de escalar.</a:t>
             </a:r>
-            <a:endParaRPr lang="en-US" dirty="0"/>
           </a:p>
         </p:txBody>
       </p:sp>
@@ -973,7 +749,6 @@
               <a:rPr lang="en-US" dirty="0"/>
               <a:t>A frase final é literal: a próxima aula de conteúdo mostra o circuito de verdade.</a:t>
             </a:r>
-            <a:endParaRPr lang="en-US" dirty="0"/>
           </a:p>
         </p:txBody>
       </p:sp>
@@ -1061,7 +836,6 @@
               <a:rPr lang="en-US" dirty="0"/>
               <a:t>Este slide funciona como checklist mental: qual ferramenta puxar primeiro, dependendo da situação.</a:t>
             </a:r>
-            <a:endParaRPr lang="en-US" dirty="0"/>
           </a:p>
         </p:txBody>
       </p:sp>
@@ -1149,7 +923,6 @@
               <a:rPr lang="en-US" dirty="0"/>
               <a:t>Diferente das aulas anteriores, aqui não há uma versão C# tão estabelecida quanto o SymPy em Python — vale mencionar isso com transparência.</a:t>
             </a:r>
-            <a:endParaRPr lang="en-US" dirty="0"/>
           </a:p>
         </p:txBody>
       </p:sp>
@@ -1237,7 +1010,6 @@
               <a:rPr lang="en-US" dirty="0"/>
               <a:t>Rodar de verdade: o resultado é x̄y + xz — uma boa checagem cruzada para quem quiser praticar mais K-maps em casa.</a:t>
             </a:r>
-            <a:endParaRPr lang="en-US" dirty="0"/>
           </a:p>
         </p:txBody>
       </p:sp>
@@ -1325,7 +1097,6 @@
               <a:rPr lang="en-US" dirty="0"/>
               <a:t>Cada exercício tem gabarito no slide seguinte — resolver antes de virar a página.</a:t>
             </a:r>
-            <a:endParaRPr lang="en-US" dirty="0"/>
           </a:p>
         </p:txBody>
       </p:sp>
@@ -1413,7 +1184,6 @@
               <a:rPr lang="en-US" dirty="0"/>
               <a:t>As condições descrevem exatamente a tabela do slide 5 — a resposta deve soar familiar.</a:t>
             </a:r>
-            <a:endParaRPr lang="en-US" dirty="0"/>
           </a:p>
         </p:txBody>
       </p:sp>
@@ -1501,7 +1271,6 @@
               <a:rPr lang="en-US" dirty="0"/>
               <a:t>O K-map é o coração visual da aula — reservar bastante tempo para a turma desenhar junto.</a:t>
             </a:r>
-            <a:endParaRPr lang="en-US" dirty="0"/>
           </a:p>
         </p:txBody>
       </p:sp>
@@ -1589,7 +1358,6 @@
               <a:rPr lang="en-US" dirty="0"/>
               <a:t>Mesma fórmula do exemplo do Slide 5 — o XOR é a operação que só é verdadeira quando as entradas diferem.</a:t>
             </a:r>
-            <a:endParaRPr lang="en-US" dirty="0"/>
           </a:p>
         </p:txBody>
       </p:sp>
@@ -1677,7 +1445,6 @@
               <a:rPr lang="en-US" dirty="0"/>
               <a:t>Dica se travar: NAND(x,y) = 1 - AND(x,y) — só há um zero no mapa inteiro.</a:t>
             </a:r>
-            <a:endParaRPr lang="en-US" dirty="0"/>
           </a:p>
         </p:txBody>
       </p:sp>
@@ -1765,7 +1532,6 @@
               <a:rPr lang="en-US" dirty="0"/>
               <a:t>Mesmo resultado que a De Morgan da Aula 06 — o K-map só chega lá visualmente, sem os passos algébricos.</a:t>
             </a:r>
-            <a:endParaRPr lang="en-US" dirty="0"/>
           </a:p>
         </p:txBody>
       </p:sp>
@@ -1853,7 +1619,6 @@
               <a:rPr lang="en-US" dirty="0"/>
               <a:t>m_i é o mintermo cujo índice, em binário, é (x,y,z) — m4=100, m5=101, m6=110, m7=111, m3=011.</a:t>
             </a:r>
-            <a:endParaRPr lang="en-US" dirty="0"/>
           </a:p>
         </p:txBody>
       </p:sp>
@@ -1941,7 +1706,6 @@
               <a:rPr lang="en-US" dirty="0"/>
               <a:t>A célula x=0,yz=11 (m3) só se agrupa com x=1,yz=11 — não há outro grupo de tamanho 2 disponível para ela.</a:t>
             </a:r>
-            <a:endParaRPr lang="en-US" dirty="0"/>
           </a:p>
         </p:txBody>
       </p:sp>
@@ -2029,7 +1793,6 @@
               <a:rPr lang="en-US" dirty="0"/>
               <a:t>O gabarito está no próximo slide — deixar a turma tentar desenhar antes de revelar.</a:t>
             </a:r>
-            <a:endParaRPr lang="en-US" dirty="0"/>
           </a:p>
         </p:txBody>
       </p:sp>
@@ -2117,7 +1880,6 @@
               <a:rPr lang="en-US" dirty="0"/>
               <a:t>O XOR é o exemplo clássico de função que o K-map não consegue reduzir — cada mintermo fica "sozinho".</a:t>
             </a:r>
-            <a:endParaRPr lang="en-US" dirty="0"/>
           </a:p>
         </p:txBody>
       </p:sp>
@@ -2205,7 +1967,6 @@
               <a:rPr lang="en-US" dirty="0"/>
               <a:t>Título da Aula 08 vem da própria frase de encerramento desta aula ('virar fios e portas de verdade na próxima aula de conteúdo') — não é inventado.</a:t>
             </a:r>
-            <a:endParaRPr lang="en-US" dirty="0"/>
           </a:p>
         </p:txBody>
       </p:sp>
@@ -2293,7 +2054,6 @@
               <a:rPr lang="en-US" dirty="0"/>
               <a:t>Tocci, Widmer e Moss entra pela primeira vez — referência clássica de sistemas digitais, muito focada em K-map com exemplos de circuito.</a:t>
             </a:r>
-            <a:endParaRPr lang="en-US" dirty="0"/>
           </a:p>
         </p:txBody>
       </p:sp>
@@ -2381,7 +2141,6 @@
               <a:rPr lang="en-US" dirty="0"/>
               <a:t>Links exatamente como fornecidos pelo professor — nenhuma URL foi inventada.</a:t>
             </a:r>
-            <a:endParaRPr lang="en-US" dirty="0"/>
           </a:p>
         </p:txBody>
       </p:sp>
@@ -2469,7 +2228,6 @@
               <a:rPr lang="en-US" dirty="0"/>
               <a:t>Provocar: e se a gente pudesse ver essa simplificação sem fazer conta nenhuma?</a:t>
             </a:r>
-            <a:endParaRPr lang="en-US" dirty="0"/>
           </a:p>
         </p:txBody>
       </p:sp>
@@ -2557,7 +2315,6 @@
               <a:rPr lang="en-US" dirty="0"/>
               <a:t>Fechar reforçando: cada grupo do K-map já é, literalmente, o desenho de uma porta lógica.</a:t>
             </a:r>
-            <a:endParaRPr lang="en-US" dirty="0"/>
           </a:p>
         </p:txBody>
       </p:sp>
@@ -2645,7 +2402,6 @@
               <a:rPr lang="en-US" dirty="0"/>
               <a:t>Uma vez que se entende mintermo, montar o SOP de qualquer tabela-verdade vira mecânico.</a:t>
             </a:r>
-            <a:endParaRPr lang="en-US" dirty="0"/>
           </a:p>
         </p:txBody>
       </p:sp>
@@ -2733,7 +2489,6 @@
               <a:rPr lang="en-US" dirty="0"/>
               <a:t>x̄y vem da linha (0,1): x é 0 → x̄; y é 1 → y. xȳ vem da linha (1,0): x é 1 → x; y é 0 → ȳ.</a:t>
             </a:r>
-            <a:endParaRPr lang="en-US" dirty="0"/>
           </a:p>
         </p:txBody>
       </p:sp>
@@ -2821,7 +2576,6 @@
               <a:rPr lang="en-US" dirty="0"/>
               <a:t>O nome oficial é K-map — abreviação que vamos usar no resto da aula.</a:t>
             </a:r>
-            <a:endParaRPr lang="en-US" dirty="0"/>
           </a:p>
         </p:txBody>
       </p:sp>
@@ -2909,7 +2663,6 @@
               <a:rPr lang="en-US" dirty="0"/>
               <a:t>Cada grupo cobre uma variável que 'sai' porque ela muda de valor dentro do grupo — só sobra a que fica fixa.</a:t>
             </a:r>
-            <a:endParaRPr lang="en-US" dirty="0"/>
           </a:p>
         </p:txBody>
       </p:sp>
@@ -2997,7 +2750,6 @@
               <a:rPr lang="en-US" dirty="0"/>
               <a:t>O código Gray troca a ordem das duas colunas do meio — é a única mudança necessária.</a:t>
             </a:r>
-            <a:endParaRPr lang="en-US" dirty="0"/>
           </a:p>
         </p:txBody>
       </p:sp>
@@ -3085,7 +2837,6 @@
               <a:rPr lang="en-US" dirty="0"/>
               <a:t>x e y desaparecem porque os dois variam dentro do grupo — só z fica fixo em 1 em toda a região coberta.</a:t>
             </a:r>
-            <a:endParaRPr lang="en-US" dirty="0"/>
           </a:p>
         </p:txBody>
       </p:sp>
@@ -3158,6 +2909,11 @@
 <file path=ppt/slideMasters/slideMaster1.xml><?xml version="1.0" encoding="utf-8"?>
 <p:sldMaster xmlns:a="http://schemas.openxmlformats.org/drawingml/2006/main" xmlns:r="http://schemas.openxmlformats.org/officeDocument/2006/relationships" xmlns:p="http://schemas.openxmlformats.org/presentationml/2006/main">
   <p:cSld>
+    <p:bg>
+      <p:bgRef idx="1001">
+        <a:schemeClr val="bg1"/>
+      </p:bgRef>
+    </p:bg>
     <p:spTree>
       <p:nvGrpSpPr>
         <p:cNvPr id="1" name=""/>
@@ -3440,6 +3196,7 @@
         <a:solidFill>
           <a:srgbClr val="141B41"/>
         </a:solidFill>
+        <a:effectLst/>
       </p:bgPr>
     </p:bg>
     <p:spTree>
@@ -3506,14 +3263,14 @@
       </p:sp>
       <p:pic>
         <p:nvPicPr>
-          <p:cNvPr id="4" name="Image 0" descr="preencoded.png">    </p:cNvPr>
+          <p:cNvPr id="4" name="Image 0" descr="preencoded.png"/>
           <p:cNvPicPr>
             <a:picLocks noChangeAspect="1"/>
           </p:cNvPicPr>
           <p:nvPr/>
         </p:nvPicPr>
         <p:blipFill>
-          <a:blip r:embed="rId1">
+          <a:blip r:embed="rId3">
             <a:alphaModFix amt="22000"/>
           </a:blip>
           <a:stretch>
@@ -3551,11 +3308,11 @@
           <a:bodyPr wrap="square" lIns="0" tIns="0" rIns="0" bIns="0" rtlCol="0" anchor="ctr"/>
           <a:lstStyle/>
           <a:p>
-            <a:pPr indent="0" marL="0">
+            <a:pPr marL="0" indent="0">
               <a:buNone/>
             </a:pPr>
             <a:r>
-              <a:rPr lang="en-US" sz="1400" b="1" spc="300" kern="0" dirty="0">
+              <a:rPr lang="en-US" sz="1400" b="1" kern="0" spc="300" dirty="0">
                 <a:solidFill>
                   <a:srgbClr val="2FE6C7"/>
                 </a:solidFill>
@@ -3590,7 +3347,7 @@
           <a:bodyPr wrap="square" lIns="0" tIns="0" rIns="0" bIns="0" rtlCol="0" anchor="ctr"/>
           <a:lstStyle/>
           <a:p>
-            <a:pPr indent="0" marL="0">
+            <a:pPr marL="0" indent="0">
               <a:buNone/>
             </a:pPr>
             <a:r>
@@ -3629,7 +3386,7 @@
           <a:bodyPr wrap="square" lIns="0" tIns="0" rIns="0" bIns="0" rtlCol="0" anchor="ctr"/>
           <a:lstStyle/>
           <a:p>
-            <a:pPr indent="0" marL="0">
+            <a:pPr marL="0" indent="0">
               <a:buNone/>
             </a:pPr>
             <a:r>
@@ -3668,7 +3425,7 @@
           <a:bodyPr wrap="square" lIns="0" tIns="0" rIns="0" bIns="0" rtlCol="0" anchor="ctr"/>
           <a:lstStyle/>
           <a:p>
-            <a:pPr indent="0" marL="0">
+            <a:pPr marL="0" indent="0">
               <a:lnSpc>
                 <a:spcPts val="1800"/>
               </a:lnSpc>
@@ -3710,7 +3467,7 @@
           <a:bodyPr wrap="square" lIns="0" tIns="0" rIns="0" bIns="0" rtlCol="0" anchor="ctr"/>
           <a:lstStyle/>
           <a:p>
-            <a:pPr indent="0" marL="0">
+            <a:pPr marL="0" indent="0">
               <a:buNone/>
             </a:pPr>
             <a:r>
@@ -3744,6 +3501,7 @@
         <a:solidFill>
           <a:srgbClr val="FFFFFF"/>
         </a:solidFill>
+        <a:effectLst/>
       </p:bgPr>
     </p:bg>
     <p:spTree>
@@ -3781,11 +3539,11 @@
           <a:bodyPr wrap="square" lIns="0" tIns="0" rIns="0" bIns="0" rtlCol="0" anchor="ctr"/>
           <a:lstStyle/>
           <a:p>
-            <a:pPr algn="l" indent="0" marL="0">
+            <a:pPr marL="0" indent="0" algn="l">
               <a:buNone/>
             </a:pPr>
             <a:r>
-              <a:rPr lang="en-US" sz="1200" b="1" spc="200" kern="0" dirty="0">
+              <a:rPr lang="en-US" sz="1200" b="1" kern="0" spc="200" dirty="0">
                 <a:solidFill>
                   <a:srgbClr val="6C4BC1"/>
                 </a:solidFill>
@@ -3820,7 +3578,7 @@
           <a:bodyPr wrap="square" lIns="0" tIns="0" rIns="0" bIns="0" rtlCol="0" anchor="ctr"/>
           <a:lstStyle/>
           <a:p>
-            <a:pPr indent="0" marL="0">
+            <a:pPr marL="0" indent="0">
               <a:buNone/>
             </a:pPr>
             <a:r>
@@ -3859,7 +3617,7 @@
           <a:bodyPr wrap="square" lIns="0" tIns="0" rIns="0" bIns="0" rtlCol="0" anchor="ctr"/>
           <a:lstStyle/>
           <a:p>
-            <a:pPr indent="0" marL="0">
+            <a:pPr marL="0" indent="0">
               <a:buNone/>
             </a:pPr>
             <a:r>
@@ -3900,11 +3658,41 @@
             <a:tbl>
               <a:tblPr/>
               <a:tblGrid>
-                <a:gridCol w="1188720"/>
-                <a:gridCol w="1371600"/>
-                <a:gridCol w="1371600"/>
-                <a:gridCol w="1371600"/>
-                <a:gridCol w="1371600"/>
+                <a:gridCol w="1188720">
+                  <a:extLst>
+                    <a:ext uri="{9D8B030D-6E8A-4147-A177-3AD203B41FA5}">
+                      <a16:colId xmlns:a16="http://schemas.microsoft.com/office/drawing/2014/main" val="20000"/>
+                    </a:ext>
+                  </a:extLst>
+                </a:gridCol>
+                <a:gridCol w="1371600">
+                  <a:extLst>
+                    <a:ext uri="{9D8B030D-6E8A-4147-A177-3AD203B41FA5}">
+                      <a16:colId xmlns:a16="http://schemas.microsoft.com/office/drawing/2014/main" val="20001"/>
+                    </a:ext>
+                  </a:extLst>
+                </a:gridCol>
+                <a:gridCol w="1371600">
+                  <a:extLst>
+                    <a:ext uri="{9D8B030D-6E8A-4147-A177-3AD203B41FA5}">
+                      <a16:colId xmlns:a16="http://schemas.microsoft.com/office/drawing/2014/main" val="20002"/>
+                    </a:ext>
+                  </a:extLst>
+                </a:gridCol>
+                <a:gridCol w="1371600">
+                  <a:extLst>
+                    <a:ext uri="{9D8B030D-6E8A-4147-A177-3AD203B41FA5}">
+                      <a16:colId xmlns:a16="http://schemas.microsoft.com/office/drawing/2014/main" val="20003"/>
+                    </a:ext>
+                  </a:extLst>
+                </a:gridCol>
+                <a:gridCol w="1371600">
+                  <a:extLst>
+                    <a:ext uri="{9D8B030D-6E8A-4147-A177-3AD203B41FA5}">
+                      <a16:colId xmlns:a16="http://schemas.microsoft.com/office/drawing/2014/main" val="20004"/>
+                    </a:ext>
+                  </a:extLst>
+                </a:gridCol>
               </a:tblGrid>
               <a:tr h="457200">
                 <a:tc>
@@ -3912,7 +3700,7 @@
                     <a:bodyPr/>
                     <a:lstStyle/>
                     <a:p>
-                      <a:pPr algn="ctr" indent="0" marL="0">
+                      <a:pPr marL="0" indent="0" algn="ctr">
                         <a:buNone/>
                       </a:pPr>
                       <a:r>
@@ -3933,7 +3721,7 @@
                       </a:endParaRPr>
                     </a:p>
                   </a:txBody>
-                  <a:tcPr marL="91440" marR="91440" marT="45720" marB="45720" anchor="ctr">
+                  <a:tcPr anchor="ctr">
                     <a:lnL w="38100" cap="flat" cmpd="sng" algn="ctr">
                       <a:solidFill>
                         <a:srgbClr val="FFFFFF"/>
@@ -3980,7 +3768,7 @@
                     <a:bodyPr/>
                     <a:lstStyle/>
                     <a:p>
-                      <a:pPr algn="ctr" indent="0" marL="0">
+                      <a:pPr marL="0" indent="0" algn="ctr">
                         <a:buNone/>
                       </a:pPr>
                       <a:r>
@@ -4001,7 +3789,7 @@
                       </a:endParaRPr>
                     </a:p>
                   </a:txBody>
-                  <a:tcPr marL="91440" marR="91440" marT="45720" marB="45720" anchor="ctr">
+                  <a:tcPr anchor="ctr">
                     <a:lnL w="38100" cap="flat" cmpd="sng" algn="ctr">
                       <a:solidFill>
                         <a:srgbClr val="FFFFFF"/>
@@ -4048,7 +3836,7 @@
                     <a:bodyPr/>
                     <a:lstStyle/>
                     <a:p>
-                      <a:pPr algn="ctr" indent="0" marL="0">
+                      <a:pPr marL="0" indent="0" algn="ctr">
                         <a:buNone/>
                       </a:pPr>
                       <a:r>
@@ -4069,7 +3857,7 @@
                       </a:endParaRPr>
                     </a:p>
                   </a:txBody>
-                  <a:tcPr marL="91440" marR="91440" marT="45720" marB="45720" anchor="ctr">
+                  <a:tcPr anchor="ctr">
                     <a:lnL w="38100" cap="flat" cmpd="sng" algn="ctr">
                       <a:solidFill>
                         <a:srgbClr val="FFFFFF"/>
@@ -4116,7 +3904,7 @@
                     <a:bodyPr/>
                     <a:lstStyle/>
                     <a:p>
-                      <a:pPr algn="ctr" indent="0" marL="0">
+                      <a:pPr marL="0" indent="0" algn="ctr">
                         <a:buNone/>
                       </a:pPr>
                       <a:r>
@@ -4137,7 +3925,7 @@
                       </a:endParaRPr>
                     </a:p>
                   </a:txBody>
-                  <a:tcPr marL="91440" marR="91440" marT="45720" marB="45720" anchor="ctr">
+                  <a:tcPr anchor="ctr">
                     <a:lnL w="38100" cap="flat" cmpd="sng" algn="ctr">
                       <a:solidFill>
                         <a:srgbClr val="FFFFFF"/>
@@ -4184,7 +3972,7 @@
                     <a:bodyPr/>
                     <a:lstStyle/>
                     <a:p>
-                      <a:pPr algn="ctr" indent="0" marL="0">
+                      <a:pPr marL="0" indent="0" algn="ctr">
                         <a:buNone/>
                       </a:pPr>
                       <a:r>
@@ -4205,7 +3993,7 @@
                       </a:endParaRPr>
                     </a:p>
                   </a:txBody>
-                  <a:tcPr marL="91440" marR="91440" marT="45720" marB="45720" anchor="ctr">
+                  <a:tcPr anchor="ctr">
                     <a:lnL w="38100" cap="flat" cmpd="sng" algn="ctr">
                       <a:solidFill>
                         <a:srgbClr val="FFFFFF"/>
@@ -4247,6 +4035,11 @@
                     </a:solidFill>
                   </a:tcPr>
                 </a:tc>
+                <a:extLst>
+                  <a:ext uri="{0D108BD9-81ED-4DB2-BD59-A6C34878D82A}">
+                    <a16:rowId xmlns:a16="http://schemas.microsoft.com/office/drawing/2014/main" val="10000"/>
+                  </a:ext>
+                </a:extLst>
               </a:tr>
               <a:tr h="960120">
                 <a:tc>
@@ -4254,7 +4047,7 @@
                     <a:bodyPr/>
                     <a:lstStyle/>
                     <a:p>
-                      <a:pPr algn="ctr" indent="0" marL="0">
+                      <a:pPr marL="0" indent="0" algn="ctr">
                         <a:buNone/>
                       </a:pPr>
                       <a:r>
@@ -4275,7 +4068,7 @@
                       </a:endParaRPr>
                     </a:p>
                   </a:txBody>
-                  <a:tcPr marL="91440" marR="91440" marT="45720" marB="45720" anchor="ctr">
+                  <a:tcPr anchor="ctr">
                     <a:lnL w="38100" cap="flat" cmpd="sng" algn="ctr">
                       <a:solidFill>
                         <a:srgbClr val="FFFFFF"/>
@@ -4322,7 +4115,7 @@
                     <a:bodyPr/>
                     <a:lstStyle/>
                     <a:p>
-                      <a:pPr algn="ctr" indent="0" marL="0">
+                      <a:pPr marL="0" indent="0" algn="ctr">
                         <a:buNone/>
                       </a:pPr>
                       <a:r>
@@ -4343,7 +4136,7 @@
                       </a:endParaRPr>
                     </a:p>
                   </a:txBody>
-                  <a:tcPr marL="91440" marR="91440" marT="45720" marB="45720" anchor="ctr">
+                  <a:tcPr anchor="ctr">
                     <a:lnL w="38100" cap="flat" cmpd="sng" algn="ctr">
                       <a:solidFill>
                         <a:srgbClr val="FFFFFF"/>
@@ -4390,7 +4183,7 @@
                     <a:bodyPr/>
                     <a:lstStyle/>
                     <a:p>
-                      <a:pPr algn="ctr" indent="0" marL="0">
+                      <a:pPr marL="0" indent="0" algn="ctr">
                         <a:buNone/>
                       </a:pPr>
                       <a:r>
@@ -4411,7 +4204,7 @@
                       </a:endParaRPr>
                     </a:p>
                   </a:txBody>
-                  <a:tcPr marL="91440" marR="91440" marT="45720" marB="45720" anchor="ctr">
+                  <a:tcPr anchor="ctr">
                     <a:lnL w="38100" cap="flat" cmpd="sng" algn="ctr">
                       <a:solidFill>
                         <a:srgbClr val="FFFFFF"/>
@@ -4458,7 +4251,7 @@
                     <a:bodyPr/>
                     <a:lstStyle/>
                     <a:p>
-                      <a:pPr algn="ctr" indent="0" marL="0">
+                      <a:pPr marL="0" indent="0" algn="ctr">
                         <a:buNone/>
                       </a:pPr>
                       <a:r>
@@ -4479,7 +4272,7 @@
                       </a:endParaRPr>
                     </a:p>
                   </a:txBody>
-                  <a:tcPr marL="91440" marR="91440" marT="45720" marB="45720" anchor="ctr">
+                  <a:tcPr anchor="ctr">
                     <a:lnL w="38100" cap="flat" cmpd="sng" algn="ctr">
                       <a:solidFill>
                         <a:srgbClr val="FFFFFF"/>
@@ -4526,7 +4319,7 @@
                     <a:bodyPr/>
                     <a:lstStyle/>
                     <a:p>
-                      <a:pPr algn="ctr" indent="0" marL="0">
+                      <a:pPr marL="0" indent="0" algn="ctr">
                         <a:buNone/>
                       </a:pPr>
                       <a:r>
@@ -4547,7 +4340,7 @@
                       </a:endParaRPr>
                     </a:p>
                   </a:txBody>
-                  <a:tcPr marL="91440" marR="91440" marT="45720" marB="45720" anchor="ctr">
+                  <a:tcPr anchor="ctr">
                     <a:lnL w="38100" cap="flat" cmpd="sng" algn="ctr">
                       <a:solidFill>
                         <a:srgbClr val="FFFFFF"/>
@@ -4589,6 +4382,11 @@
                     </a:solidFill>
                   </a:tcPr>
                 </a:tc>
+                <a:extLst>
+                  <a:ext uri="{0D108BD9-81ED-4DB2-BD59-A6C34878D82A}">
+                    <a16:rowId xmlns:a16="http://schemas.microsoft.com/office/drawing/2014/main" val="10001"/>
+                  </a:ext>
+                </a:extLst>
               </a:tr>
               <a:tr h="960120">
                 <a:tc>
@@ -4596,7 +4394,7 @@
                     <a:bodyPr/>
                     <a:lstStyle/>
                     <a:p>
-                      <a:pPr algn="ctr" indent="0" marL="0">
+                      <a:pPr marL="0" indent="0" algn="ctr">
                         <a:buNone/>
                       </a:pPr>
                       <a:r>
@@ -4617,7 +4415,7 @@
                       </a:endParaRPr>
                     </a:p>
                   </a:txBody>
-                  <a:tcPr marL="91440" marR="91440" marT="45720" marB="45720" anchor="ctr">
+                  <a:tcPr anchor="ctr">
                     <a:lnL w="38100" cap="flat" cmpd="sng" algn="ctr">
                       <a:solidFill>
                         <a:srgbClr val="FFFFFF"/>
@@ -4664,7 +4462,7 @@
                     <a:bodyPr/>
                     <a:lstStyle/>
                     <a:p>
-                      <a:pPr algn="ctr" indent="0" marL="0">
+                      <a:pPr marL="0" indent="0" algn="ctr">
                         <a:buNone/>
                       </a:pPr>
                       <a:r>
@@ -4685,7 +4483,7 @@
                       </a:endParaRPr>
                     </a:p>
                   </a:txBody>
-                  <a:tcPr marL="91440" marR="91440" marT="45720" marB="45720" anchor="ctr">
+                  <a:tcPr anchor="ctr">
                     <a:lnL w="38100" cap="flat" cmpd="sng" algn="ctr">
                       <a:solidFill>
                         <a:srgbClr val="FFFFFF"/>
@@ -4732,7 +4530,7 @@
                     <a:bodyPr/>
                     <a:lstStyle/>
                     <a:p>
-                      <a:pPr algn="ctr" indent="0" marL="0">
+                      <a:pPr marL="0" indent="0" algn="ctr">
                         <a:buNone/>
                       </a:pPr>
                       <a:r>
@@ -4753,7 +4551,7 @@
                       </a:endParaRPr>
                     </a:p>
                   </a:txBody>
-                  <a:tcPr marL="91440" marR="91440" marT="45720" marB="45720" anchor="ctr">
+                  <a:tcPr anchor="ctr">
                     <a:lnL w="38100" cap="flat" cmpd="sng" algn="ctr">
                       <a:solidFill>
                         <a:srgbClr val="FFFFFF"/>
@@ -4800,7 +4598,7 @@
                     <a:bodyPr/>
                     <a:lstStyle/>
                     <a:p>
-                      <a:pPr algn="ctr" indent="0" marL="0">
+                      <a:pPr marL="0" indent="0" algn="ctr">
                         <a:buNone/>
                       </a:pPr>
                       <a:r>
@@ -4821,7 +4619,7 @@
                       </a:endParaRPr>
                     </a:p>
                   </a:txBody>
-                  <a:tcPr marL="91440" marR="91440" marT="45720" marB="45720" anchor="ctr">
+                  <a:tcPr anchor="ctr">
                     <a:lnL w="38100" cap="flat" cmpd="sng" algn="ctr">
                       <a:solidFill>
                         <a:srgbClr val="FFFFFF"/>
@@ -4868,7 +4666,7 @@
                     <a:bodyPr/>
                     <a:lstStyle/>
                     <a:p>
-                      <a:pPr algn="ctr" indent="0" marL="0">
+                      <a:pPr marL="0" indent="0" algn="ctr">
                         <a:buNone/>
                       </a:pPr>
                       <a:r>
@@ -4889,7 +4687,7 @@
                       </a:endParaRPr>
                     </a:p>
                   </a:txBody>
-                  <a:tcPr marL="91440" marR="91440" marT="45720" marB="45720" anchor="ctr">
+                  <a:tcPr anchor="ctr">
                     <a:lnL w="38100" cap="flat" cmpd="sng" algn="ctr">
                       <a:solidFill>
                         <a:srgbClr val="FFFFFF"/>
@@ -4931,6 +4729,11 @@
                     </a:solidFill>
                   </a:tcPr>
                 </a:tc>
+                <a:extLst>
+                  <a:ext uri="{0D108BD9-81ED-4DB2-BD59-A6C34878D82A}">
+                    <a16:rowId xmlns:a16="http://schemas.microsoft.com/office/drawing/2014/main" val="10002"/>
+                  </a:ext>
+                </a:extLst>
               </a:tr>
             </a:tbl>
           </a:graphicData>
@@ -5006,14 +4809,14 @@
       </p:sp>
       <p:pic>
         <p:nvPicPr>
-          <p:cNvPr id="9" name="Image 0" descr="preencoded.png">    </p:cNvPr>
+          <p:cNvPr id="9" name="Image 0" descr="preencoded.png"/>
           <p:cNvPicPr>
             <a:picLocks noChangeAspect="1"/>
           </p:cNvPicPr>
           <p:nvPr/>
         </p:nvPicPr>
         <p:blipFill>
-          <a:blip r:embed="rId1"/>
+          <a:blip r:embed="rId3"/>
           <a:stretch>
             <a:fillRect/>
           </a:stretch>
@@ -5049,7 +4852,7 @@
           <a:bodyPr wrap="square" lIns="0" tIns="0" rIns="0" bIns="0" rtlCol="0" anchor="ctr"/>
           <a:lstStyle/>
           <a:p>
-            <a:pPr indent="0" marL="0">
+            <a:pPr marL="0" indent="0">
               <a:lnSpc>
                 <a:spcPts val="1900"/>
               </a:lnSpc>
@@ -5072,7 +4875,7 @@
       </p:sp>
       <p:sp>
         <p:nvSpPr>
-          <p:cNvPr id="11" name="Text 7"/>
+          <p:cNvPr id="5" name="Text 7"/>
           <p:cNvSpPr/>
           <p:nvPr/>
         </p:nvSpPr>
@@ -5091,7 +4894,7 @@
           <a:bodyPr wrap="square" lIns="0" tIns="0" rIns="0" bIns="0" rtlCol="0" anchor="ctr"/>
           <a:lstStyle/>
           <a:p>
-            <a:pPr algn="r" indent="0" marL="0">
+            <a:pPr marL="0" indent="0" algn="r">
               <a:buNone/>
             </a:pPr>
             <a:r>
@@ -5125,6 +4928,7 @@
         <a:solidFill>
           <a:srgbClr val="FFFFFF"/>
         </a:solidFill>
+        <a:effectLst/>
       </p:bgPr>
     </p:bg>
     <p:spTree>
@@ -5162,11 +4966,11 @@
           <a:bodyPr wrap="square" lIns="0" tIns="0" rIns="0" bIns="0" rtlCol="0" anchor="ctr"/>
           <a:lstStyle/>
           <a:p>
-            <a:pPr algn="l" indent="0" marL="0">
+            <a:pPr marL="0" indent="0" algn="l">
               <a:buNone/>
             </a:pPr>
             <a:r>
-              <a:rPr lang="en-US" sz="1200" b="1" spc="200" kern="0" dirty="0">
+              <a:rPr lang="en-US" sz="1200" b="1" kern="0" spc="200" dirty="0">
                 <a:solidFill>
                   <a:srgbClr val="6C4BC1"/>
                 </a:solidFill>
@@ -5201,7 +5005,7 @@
           <a:bodyPr wrap="square" lIns="0" tIns="0" rIns="0" bIns="0" rtlCol="0" anchor="ctr"/>
           <a:lstStyle/>
           <a:p>
-            <a:pPr indent="0" marL="0">
+            <a:pPr marL="0" indent="0">
               <a:buNone/>
             </a:pPr>
             <a:r>
@@ -5282,7 +5086,7 @@
           <a:bodyPr wrap="square" lIns="0" tIns="0" rIns="0" bIns="0" rtlCol="0" anchor="ctr"/>
           <a:lstStyle/>
           <a:p>
-            <a:pPr algn="ctr" indent="0" marL="0">
+            <a:pPr marL="0" indent="0" algn="ctr">
               <a:buNone/>
             </a:pPr>
             <a:r>
@@ -5321,7 +5125,7 @@
           <a:bodyPr wrap="square" lIns="0" tIns="0" rIns="0" bIns="0" rtlCol="0" anchor="ctr"/>
           <a:lstStyle/>
           <a:p>
-            <a:pPr indent="0" marL="0">
+            <a:pPr marL="0" indent="0">
               <a:lnSpc>
                 <a:spcPts val="1800"/>
               </a:lnSpc>
@@ -5405,7 +5209,7 @@
           <a:bodyPr wrap="square" lIns="0" tIns="0" rIns="0" bIns="0" rtlCol="0" anchor="ctr"/>
           <a:lstStyle/>
           <a:p>
-            <a:pPr algn="ctr" indent="0" marL="0">
+            <a:pPr marL="0" indent="0" algn="ctr">
               <a:buNone/>
             </a:pPr>
             <a:r>
@@ -5444,7 +5248,7 @@
           <a:bodyPr wrap="square" lIns="0" tIns="0" rIns="0" bIns="0" rtlCol="0" anchor="ctr"/>
           <a:lstStyle/>
           <a:p>
-            <a:pPr indent="0" marL="0">
+            <a:pPr marL="0" indent="0">
               <a:lnSpc>
                 <a:spcPts val="1800"/>
               </a:lnSpc>
@@ -5528,7 +5332,7 @@
           <a:bodyPr wrap="square" lIns="0" tIns="0" rIns="0" bIns="0" rtlCol="0" anchor="ctr"/>
           <a:lstStyle/>
           <a:p>
-            <a:pPr algn="ctr" indent="0" marL="0">
+            <a:pPr marL="0" indent="0" algn="ctr">
               <a:buNone/>
             </a:pPr>
             <a:r>
@@ -5567,7 +5371,7 @@
           <a:bodyPr wrap="square" lIns="0" tIns="0" rIns="0" bIns="0" rtlCol="0" anchor="ctr"/>
           <a:lstStyle/>
           <a:p>
-            <a:pPr indent="0" marL="0">
+            <a:pPr marL="0" indent="0">
               <a:lnSpc>
                 <a:spcPts val="1800"/>
               </a:lnSpc>
@@ -5651,7 +5455,7 @@
           <a:bodyPr wrap="square" lIns="0" tIns="0" rIns="0" bIns="0" rtlCol="0" anchor="ctr"/>
           <a:lstStyle/>
           <a:p>
-            <a:pPr algn="ctr" indent="0" marL="0">
+            <a:pPr marL="0" indent="0" algn="ctr">
               <a:buNone/>
             </a:pPr>
             <a:r>
@@ -5690,7 +5494,7 @@
           <a:bodyPr wrap="square" lIns="0" tIns="0" rIns="0" bIns="0" rtlCol="0" anchor="ctr"/>
           <a:lstStyle/>
           <a:p>
-            <a:pPr indent="0" marL="0">
+            <a:pPr marL="0" indent="0">
               <a:lnSpc>
                 <a:spcPts val="1800"/>
               </a:lnSpc>
@@ -5732,7 +5536,7 @@
           <a:bodyPr wrap="square" lIns="0" tIns="0" rIns="0" bIns="0" rtlCol="0" anchor="ctr"/>
           <a:lstStyle/>
           <a:p>
-            <a:pPr algn="r" indent="0" marL="0">
+            <a:pPr marL="0" indent="0" algn="r">
               <a:buNone/>
             </a:pPr>
             <a:r>
@@ -5766,6 +5570,7 @@
         <a:solidFill>
           <a:srgbClr val="FFFFFF"/>
         </a:solidFill>
+        <a:effectLst/>
       </p:bgPr>
     </p:bg>
     <p:spTree>
@@ -5803,11 +5608,11 @@
           <a:bodyPr wrap="square" lIns="0" tIns="0" rIns="0" bIns="0" rtlCol="0" anchor="ctr"/>
           <a:lstStyle/>
           <a:p>
-            <a:pPr algn="l" indent="0" marL="0">
+            <a:pPr marL="0" indent="0" algn="l">
               <a:buNone/>
             </a:pPr>
             <a:r>
-              <a:rPr lang="en-US" sz="1200" b="1" spc="200" kern="0" dirty="0">
+              <a:rPr lang="en-US" sz="1200" b="1" kern="0" spc="200" dirty="0">
                 <a:solidFill>
                   <a:srgbClr val="6C4BC1"/>
                 </a:solidFill>
@@ -5843,14 +5648,14 @@
       </p:sp>
       <p:pic>
         <p:nvPicPr>
-          <p:cNvPr id="4" name="Image 0" descr="preencoded.png">    </p:cNvPr>
+          <p:cNvPr id="4" name="Image 0" descr="preencoded.png"/>
           <p:cNvPicPr>
             <a:picLocks noChangeAspect="1"/>
           </p:cNvPicPr>
           <p:nvPr/>
         </p:nvPicPr>
         <p:blipFill>
-          <a:blip r:embed="rId1"/>
+          <a:blip r:embed="rId3"/>
           <a:stretch>
             <a:fillRect/>
           </a:stretch>
@@ -5886,7 +5691,7 @@
           <a:bodyPr wrap="square" lIns="0" tIns="0" rIns="0" bIns="0" rtlCol="0" anchor="ctr"/>
           <a:lstStyle/>
           <a:p>
-            <a:pPr indent="0" marL="0">
+            <a:pPr marL="0" indent="0">
               <a:buNone/>
             </a:pPr>
             <a:r>
@@ -5925,7 +5730,7 @@
           <a:bodyPr wrap="square" lIns="0" tIns="0" rIns="0" bIns="0" rtlCol="0" anchor="ctr"/>
           <a:lstStyle/>
           <a:p>
-            <a:pPr indent="0" marL="0">
+            <a:pPr marL="0" indent="0">
               <a:lnSpc>
                 <a:spcPts val="2000"/>
               </a:lnSpc>
@@ -5969,9 +5774,27 @@
             <a:tbl>
               <a:tblPr/>
               <a:tblGrid>
-                <a:gridCol w="1280160"/>
-                <a:gridCol w="1645920"/>
-                <a:gridCol w="1645920"/>
+                <a:gridCol w="1280160">
+                  <a:extLst>
+                    <a:ext uri="{9D8B030D-6E8A-4147-A177-3AD203B41FA5}">
+                      <a16:colId xmlns:a16="http://schemas.microsoft.com/office/drawing/2014/main" val="20000"/>
+                    </a:ext>
+                  </a:extLst>
+                </a:gridCol>
+                <a:gridCol w="1645920">
+                  <a:extLst>
+                    <a:ext uri="{9D8B030D-6E8A-4147-A177-3AD203B41FA5}">
+                      <a16:colId xmlns:a16="http://schemas.microsoft.com/office/drawing/2014/main" val="20001"/>
+                    </a:ext>
+                  </a:extLst>
+                </a:gridCol>
+                <a:gridCol w="1645920">
+                  <a:extLst>
+                    <a:ext uri="{9D8B030D-6E8A-4147-A177-3AD203B41FA5}">
+                      <a16:colId xmlns:a16="http://schemas.microsoft.com/office/drawing/2014/main" val="20002"/>
+                    </a:ext>
+                  </a:extLst>
+                </a:gridCol>
               </a:tblGrid>
               <a:tr h="457200">
                 <a:tc>
@@ -5979,7 +5802,7 @@
                     <a:bodyPr/>
                     <a:lstStyle/>
                     <a:p>
-                      <a:pPr algn="ctr" indent="0" marL="0">
+                      <a:pPr marL="0" indent="0" algn="ctr">
                         <a:buNone/>
                       </a:pPr>
                       <a:r>
@@ -6000,7 +5823,7 @@
                       </a:endParaRPr>
                     </a:p>
                   </a:txBody>
-                  <a:tcPr marL="91440" marR="91440" marT="45720" marB="45720" anchor="ctr">
+                  <a:tcPr anchor="ctr">
                     <a:lnL w="38100" cap="flat" cmpd="sng" algn="ctr">
                       <a:solidFill>
                         <a:srgbClr val="FFFFFF"/>
@@ -6047,7 +5870,7 @@
                     <a:bodyPr/>
                     <a:lstStyle/>
                     <a:p>
-                      <a:pPr algn="ctr" indent="0" marL="0">
+                      <a:pPr marL="0" indent="0" algn="ctr">
                         <a:buNone/>
                       </a:pPr>
                       <a:r>
@@ -6068,7 +5891,7 @@
                       </a:endParaRPr>
                     </a:p>
                   </a:txBody>
-                  <a:tcPr marL="91440" marR="91440" marT="45720" marB="45720" anchor="ctr">
+                  <a:tcPr anchor="ctr">
                     <a:lnL w="38100" cap="flat" cmpd="sng" algn="ctr">
                       <a:solidFill>
                         <a:srgbClr val="FFFFFF"/>
@@ -6115,7 +5938,7 @@
                     <a:bodyPr/>
                     <a:lstStyle/>
                     <a:p>
-                      <a:pPr algn="ctr" indent="0" marL="0">
+                      <a:pPr marL="0" indent="0" algn="ctr">
                         <a:buNone/>
                       </a:pPr>
                       <a:r>
@@ -6136,7 +5959,7 @@
                       </a:endParaRPr>
                     </a:p>
                   </a:txBody>
-                  <a:tcPr marL="91440" marR="91440" marT="45720" marB="45720" anchor="ctr">
+                  <a:tcPr anchor="ctr">
                     <a:lnL w="38100" cap="flat" cmpd="sng" algn="ctr">
                       <a:solidFill>
                         <a:srgbClr val="FFFFFF"/>
@@ -6178,6 +6001,11 @@
                     </a:solidFill>
                   </a:tcPr>
                 </a:tc>
+                <a:extLst>
+                  <a:ext uri="{0D108BD9-81ED-4DB2-BD59-A6C34878D82A}">
+                    <a16:rowId xmlns:a16="http://schemas.microsoft.com/office/drawing/2014/main" val="10000"/>
+                  </a:ext>
+                </a:extLst>
               </a:tr>
               <a:tr h="1051560">
                 <a:tc>
@@ -6185,7 +6013,7 @@
                     <a:bodyPr/>
                     <a:lstStyle/>
                     <a:p>
-                      <a:pPr algn="ctr" indent="0" marL="0">
+                      <a:pPr marL="0" indent="0" algn="ctr">
                         <a:buNone/>
                       </a:pPr>
                       <a:r>
@@ -6206,7 +6034,7 @@
                       </a:endParaRPr>
                     </a:p>
                   </a:txBody>
-                  <a:tcPr marL="91440" marR="91440" marT="45720" marB="45720" anchor="ctr">
+                  <a:tcPr anchor="ctr">
                     <a:lnL w="38100" cap="flat" cmpd="sng" algn="ctr">
                       <a:solidFill>
                         <a:srgbClr val="FFFFFF"/>
@@ -6253,7 +6081,7 @@
                     <a:bodyPr/>
                     <a:lstStyle/>
                     <a:p>
-                      <a:pPr algn="ctr" indent="0" marL="0">
+                      <a:pPr marL="0" indent="0" algn="ctr">
                         <a:buNone/>
                       </a:pPr>
                       <a:r>
@@ -6274,7 +6102,7 @@
                       </a:endParaRPr>
                     </a:p>
                   </a:txBody>
-                  <a:tcPr marL="91440" marR="91440" marT="45720" marB="45720" anchor="ctr">
+                  <a:tcPr anchor="ctr">
                     <a:lnL w="38100" cap="flat" cmpd="sng" algn="ctr">
                       <a:solidFill>
                         <a:srgbClr val="FFFFFF"/>
@@ -6321,7 +6149,7 @@
                     <a:bodyPr/>
                     <a:lstStyle/>
                     <a:p>
-                      <a:pPr algn="ctr" indent="0" marL="0">
+                      <a:pPr marL="0" indent="0" algn="ctr">
                         <a:buNone/>
                       </a:pPr>
                       <a:r>
@@ -6342,7 +6170,7 @@
                       </a:endParaRPr>
                     </a:p>
                   </a:txBody>
-                  <a:tcPr marL="91440" marR="91440" marT="45720" marB="45720" anchor="ctr">
+                  <a:tcPr anchor="ctr">
                     <a:lnL w="38100" cap="flat" cmpd="sng" algn="ctr">
                       <a:solidFill>
                         <a:srgbClr val="FFFFFF"/>
@@ -6384,6 +6212,11 @@
                     </a:solidFill>
                   </a:tcPr>
                 </a:tc>
+                <a:extLst>
+                  <a:ext uri="{0D108BD9-81ED-4DB2-BD59-A6C34878D82A}">
+                    <a16:rowId xmlns:a16="http://schemas.microsoft.com/office/drawing/2014/main" val="10001"/>
+                  </a:ext>
+                </a:extLst>
               </a:tr>
               <a:tr h="1051560">
                 <a:tc>
@@ -6391,7 +6224,7 @@
                     <a:bodyPr/>
                     <a:lstStyle/>
                     <a:p>
-                      <a:pPr algn="ctr" indent="0" marL="0">
+                      <a:pPr marL="0" indent="0" algn="ctr">
                         <a:buNone/>
                       </a:pPr>
                       <a:r>
@@ -6412,7 +6245,7 @@
                       </a:endParaRPr>
                     </a:p>
                   </a:txBody>
-                  <a:tcPr marL="91440" marR="91440" marT="45720" marB="45720" anchor="ctr">
+                  <a:tcPr anchor="ctr">
                     <a:lnL w="38100" cap="flat" cmpd="sng" algn="ctr">
                       <a:solidFill>
                         <a:srgbClr val="FFFFFF"/>
@@ -6459,7 +6292,7 @@
                     <a:bodyPr/>
                     <a:lstStyle/>
                     <a:p>
-                      <a:pPr algn="ctr" indent="0" marL="0">
+                      <a:pPr marL="0" indent="0" algn="ctr">
                         <a:buNone/>
                       </a:pPr>
                       <a:r>
@@ -6480,7 +6313,7 @@
                       </a:endParaRPr>
                     </a:p>
                   </a:txBody>
-                  <a:tcPr marL="91440" marR="91440" marT="45720" marB="45720" anchor="ctr">
+                  <a:tcPr anchor="ctr">
                     <a:lnL w="38100" cap="flat" cmpd="sng" algn="ctr">
                       <a:solidFill>
                         <a:srgbClr val="FFFFFF"/>
@@ -6527,7 +6360,7 @@
                     <a:bodyPr/>
                     <a:lstStyle/>
                     <a:p>
-                      <a:pPr algn="ctr" indent="0" marL="0">
+                      <a:pPr marL="0" indent="0" algn="ctr">
                         <a:buNone/>
                       </a:pPr>
                       <a:r>
@@ -6548,7 +6381,7 @@
                       </a:endParaRPr>
                     </a:p>
                   </a:txBody>
-                  <a:tcPr marL="91440" marR="91440" marT="45720" marB="45720" anchor="ctr">
+                  <a:tcPr anchor="ctr">
                     <a:lnL w="38100" cap="flat" cmpd="sng" algn="ctr">
                       <a:solidFill>
                         <a:srgbClr val="FFFFFF"/>
@@ -6590,6 +6423,11 @@
                     </a:solidFill>
                   </a:tcPr>
                 </a:tc>
+                <a:extLst>
+                  <a:ext uri="{0D108BD9-81ED-4DB2-BD59-A6C34878D82A}">
+                    <a16:rowId xmlns:a16="http://schemas.microsoft.com/office/drawing/2014/main" val="10002"/>
+                  </a:ext>
+                </a:extLst>
               </a:tr>
             </a:tbl>
           </a:graphicData>
@@ -6640,7 +6478,7 @@
           <a:bodyPr wrap="square" lIns="0" tIns="0" rIns="0" bIns="0" rtlCol="0" anchor="ctr"/>
           <a:lstStyle/>
           <a:p>
-            <a:pPr algn="ctr" indent="0" marL="0">
+            <a:pPr marL="0" indent="0" algn="ctr">
               <a:lnSpc>
                 <a:spcPts val="1700"/>
               </a:lnSpc>
@@ -6682,7 +6520,7 @@
           <a:bodyPr wrap="square" lIns="0" tIns="0" rIns="0" bIns="0" rtlCol="0" anchor="ctr"/>
           <a:lstStyle/>
           <a:p>
-            <a:pPr algn="ctr" indent="0" marL="0">
+            <a:pPr marL="0" indent="0" algn="ctr">
               <a:buNone/>
             </a:pPr>
             <a:r>
@@ -6721,7 +6559,7 @@
           <a:bodyPr wrap="square" lIns="0" tIns="0" rIns="0" bIns="0" rtlCol="0" anchor="ctr"/>
           <a:lstStyle/>
           <a:p>
-            <a:pPr algn="r" indent="0" marL="0">
+            <a:pPr marL="0" indent="0" algn="r">
               <a:buNone/>
             </a:pPr>
             <a:r>
@@ -6755,6 +6593,7 @@
         <a:solidFill>
           <a:srgbClr val="141B41"/>
         </a:solidFill>
+        <a:effectLst/>
       </p:bgPr>
     </p:bg>
     <p:spTree>
@@ -6792,11 +6631,11 @@
           <a:bodyPr wrap="square" lIns="0" tIns="0" rIns="0" bIns="0" rtlCol="0" anchor="ctr"/>
           <a:lstStyle/>
           <a:p>
-            <a:pPr algn="l" indent="0" marL="0">
+            <a:pPr marL="0" indent="0" algn="l">
               <a:buNone/>
             </a:pPr>
             <a:r>
-              <a:rPr lang="en-US" sz="1200" b="1" spc="200" kern="0" dirty="0">
+              <a:rPr lang="en-US" sz="1200" b="1" kern="0" spc="200" dirty="0">
                 <a:solidFill>
                   <a:srgbClr val="2FE6C7"/>
                 </a:solidFill>
@@ -6832,14 +6671,14 @@
       </p:sp>
       <p:pic>
         <p:nvPicPr>
-          <p:cNvPr id="4" name="Image 0" descr="preencoded.png">    </p:cNvPr>
+          <p:cNvPr id="4" name="Image 0" descr="preencoded.png"/>
           <p:cNvPicPr>
             <a:picLocks noChangeAspect="1"/>
           </p:cNvPicPr>
           <p:nvPr/>
         </p:nvPicPr>
         <p:blipFill>
-          <a:blip r:embed="rId1"/>
+          <a:blip r:embed="rId3"/>
           <a:stretch>
             <a:fillRect/>
           </a:stretch>
@@ -6875,7 +6714,7 @@
           <a:bodyPr wrap="square" lIns="0" tIns="0" rIns="0" bIns="0" rtlCol="0" anchor="ctr"/>
           <a:lstStyle/>
           <a:p>
-            <a:pPr indent="0" marL="0">
+            <a:pPr marL="0" indent="0">
               <a:buNone/>
             </a:pPr>
             <a:r>
@@ -6914,7 +6753,7 @@
           <a:bodyPr wrap="square" lIns="0" tIns="0" rIns="0" bIns="0" rtlCol="0" anchor="ctr"/>
           <a:lstStyle/>
           <a:p>
-            <a:pPr indent="0" marL="0">
+            <a:pPr marL="0" indent="0">
               <a:lnSpc>
                 <a:spcPts val="2100"/>
               </a:lnSpc>
@@ -6983,7 +6822,7 @@
           <a:bodyPr wrap="square" lIns="0" tIns="0" rIns="0" bIns="0" rtlCol="0" anchor="ctr"/>
           <a:lstStyle/>
           <a:p>
-            <a:pPr algn="ctr" indent="0" marL="0">
+            <a:pPr marL="0" indent="0" algn="ctr">
               <a:buNone/>
             </a:pPr>
             <a:r>
@@ -7022,7 +6861,7 @@
           <a:bodyPr wrap="square" lIns="0" tIns="0" rIns="0" bIns="0" rtlCol="0" anchor="ctr"/>
           <a:lstStyle/>
           <a:p>
-            <a:pPr indent="0" marL="0">
+            <a:pPr marL="0" indent="0">
               <a:lnSpc>
                 <a:spcPts val="1900"/>
               </a:lnSpc>
@@ -7064,7 +6903,7 @@
           <a:bodyPr wrap="square" lIns="0" tIns="0" rIns="0" bIns="0" rtlCol="0" anchor="ctr"/>
           <a:lstStyle/>
           <a:p>
-            <a:pPr algn="r" indent="0" marL="0">
+            <a:pPr marL="0" indent="0" algn="r">
               <a:buNone/>
             </a:pPr>
             <a:r>
@@ -7098,6 +6937,7 @@
         <a:solidFill>
           <a:srgbClr val="FFFFFF"/>
         </a:solidFill>
+        <a:effectLst/>
       </p:bgPr>
     </p:bg>
     <p:spTree>
@@ -7135,11 +6975,11 @@
           <a:bodyPr wrap="square" lIns="0" tIns="0" rIns="0" bIns="0" rtlCol="0" anchor="ctr"/>
           <a:lstStyle/>
           <a:p>
-            <a:pPr algn="l" indent="0" marL="0">
+            <a:pPr marL="0" indent="0" algn="l">
               <a:buNone/>
             </a:pPr>
             <a:r>
-              <a:rPr lang="en-US" sz="1200" b="1" spc="200" kern="0" dirty="0">
+              <a:rPr lang="en-US" sz="1200" b="1" kern="0" spc="200" dirty="0">
                 <a:solidFill>
                   <a:srgbClr val="6C4BC1"/>
                 </a:solidFill>
@@ -7174,7 +7014,7 @@
           <a:bodyPr wrap="square" lIns="0" tIns="0" rIns="0" bIns="0" rtlCol="0" anchor="ctr"/>
           <a:lstStyle/>
           <a:p>
-            <a:pPr indent="0" marL="0">
+            <a:pPr marL="0" indent="0">
               <a:buNone/>
             </a:pPr>
             <a:r>
@@ -7214,14 +7054,14 @@
       </p:sp>
       <p:pic>
         <p:nvPicPr>
-          <p:cNvPr id="5" name="Image 0" descr="preencoded.png">    </p:cNvPr>
+          <p:cNvPr id="5" name="Image 0" descr="preencoded.png"/>
           <p:cNvPicPr>
             <a:picLocks noChangeAspect="1"/>
           </p:cNvPicPr>
           <p:nvPr/>
         </p:nvPicPr>
         <p:blipFill>
-          <a:blip r:embed="rId1"/>
+          <a:blip r:embed="rId3"/>
           <a:stretch>
             <a:fillRect/>
           </a:stretch>
@@ -7257,7 +7097,7 @@
           <a:bodyPr wrap="square" lIns="0" tIns="0" rIns="0" bIns="0" rtlCol="0" anchor="ctr"/>
           <a:lstStyle/>
           <a:p>
-            <a:pPr indent="0" marL="0">
+            <a:pPr marL="0" indent="0">
               <a:buNone/>
             </a:pPr>
             <a:r>
@@ -7296,7 +7136,7 @@
           <a:bodyPr wrap="square" lIns="0" tIns="0" rIns="0" bIns="0" rtlCol="0" anchor="ctr"/>
           <a:lstStyle/>
           <a:p>
-            <a:pPr indent="0" marL="0">
+            <a:pPr marL="0" indent="0">
               <a:lnSpc>
                 <a:spcPts val="1600"/>
               </a:lnSpc>
@@ -7339,14 +7179,14 @@
       </p:sp>
       <p:pic>
         <p:nvPicPr>
-          <p:cNvPr id="9" name="Image 1" descr="preencoded.png">    </p:cNvPr>
+          <p:cNvPr id="9" name="Image 1" descr="preencoded.png"/>
           <p:cNvPicPr>
             <a:picLocks noChangeAspect="1"/>
           </p:cNvPicPr>
           <p:nvPr/>
         </p:nvPicPr>
         <p:blipFill>
-          <a:blip r:embed="rId2"/>
+          <a:blip r:embed="rId4"/>
           <a:stretch>
             <a:fillRect/>
           </a:stretch>
@@ -7382,7 +7222,7 @@
           <a:bodyPr wrap="square" lIns="0" tIns="0" rIns="0" bIns="0" rtlCol="0" anchor="ctr"/>
           <a:lstStyle/>
           <a:p>
-            <a:pPr indent="0" marL="0">
+            <a:pPr marL="0" indent="0">
               <a:buNone/>
             </a:pPr>
             <a:r>
@@ -7421,7 +7261,7 @@
           <a:bodyPr wrap="square" lIns="0" tIns="0" rIns="0" bIns="0" rtlCol="0" anchor="ctr"/>
           <a:lstStyle/>
           <a:p>
-            <a:pPr indent="0" marL="0">
+            <a:pPr marL="0" indent="0">
               <a:lnSpc>
                 <a:spcPts val="1600"/>
               </a:lnSpc>
@@ -7464,14 +7304,14 @@
       </p:sp>
       <p:pic>
         <p:nvPicPr>
-          <p:cNvPr id="13" name="Image 2" descr="preencoded.png">    </p:cNvPr>
+          <p:cNvPr id="13" name="Image 2" descr="preencoded.png"/>
           <p:cNvPicPr>
             <a:picLocks noChangeAspect="1"/>
           </p:cNvPicPr>
           <p:nvPr/>
         </p:nvPicPr>
         <p:blipFill>
-          <a:blip r:embed="rId3"/>
+          <a:blip r:embed="rId5"/>
           <a:stretch>
             <a:fillRect/>
           </a:stretch>
@@ -7507,7 +7347,7 @@
           <a:bodyPr wrap="square" lIns="0" tIns="0" rIns="0" bIns="0" rtlCol="0" anchor="ctr"/>
           <a:lstStyle/>
           <a:p>
-            <a:pPr indent="0" marL="0">
+            <a:pPr marL="0" indent="0">
               <a:buNone/>
             </a:pPr>
             <a:r>
@@ -7546,7 +7386,7 @@
           <a:bodyPr wrap="square" lIns="0" tIns="0" rIns="0" bIns="0" rtlCol="0" anchor="ctr"/>
           <a:lstStyle/>
           <a:p>
-            <a:pPr indent="0" marL="0">
+            <a:pPr marL="0" indent="0">
               <a:lnSpc>
                 <a:spcPts val="1600"/>
               </a:lnSpc>
@@ -7588,7 +7428,7 @@
           <a:bodyPr wrap="square" lIns="0" tIns="0" rIns="0" bIns="0" rtlCol="0" anchor="ctr"/>
           <a:lstStyle/>
           <a:p>
-            <a:pPr algn="r" indent="0" marL="0">
+            <a:pPr marL="0" indent="0" algn="r">
               <a:buNone/>
             </a:pPr>
             <a:r>
@@ -7622,6 +7462,7 @@
         <a:solidFill>
           <a:srgbClr val="FFFFFF"/>
         </a:solidFill>
+        <a:effectLst/>
       </p:bgPr>
     </p:bg>
     <p:spTree>
@@ -7659,11 +7500,11 @@
           <a:bodyPr wrap="square" lIns="0" tIns="0" rIns="0" bIns="0" rtlCol="0" anchor="ctr"/>
           <a:lstStyle/>
           <a:p>
-            <a:pPr algn="l" indent="0" marL="0">
+            <a:pPr marL="0" indent="0" algn="l">
               <a:buNone/>
             </a:pPr>
             <a:r>
-              <a:rPr lang="en-US" sz="1200" b="1" spc="200" kern="0" dirty="0">
+              <a:rPr lang="en-US" sz="1200" b="1" kern="0" spc="200" dirty="0">
                 <a:solidFill>
                   <a:srgbClr val="6C4BC1"/>
                 </a:solidFill>
@@ -7698,7 +7539,7 @@
           <a:bodyPr wrap="square" lIns="0" tIns="0" rIns="0" bIns="0" rtlCol="0" anchor="ctr"/>
           <a:lstStyle/>
           <a:p>
-            <a:pPr indent="0" marL="0">
+            <a:pPr marL="0" indent="0">
               <a:buNone/>
             </a:pPr>
             <a:r>
@@ -7739,9 +7580,27 @@
             <a:tbl>
               <a:tblPr/>
               <a:tblGrid>
-                <a:gridCol w="2194560"/>
-                <a:gridCol w="4343400"/>
-                <a:gridCol w="4343400"/>
+                <a:gridCol w="2194560">
+                  <a:extLst>
+                    <a:ext uri="{9D8B030D-6E8A-4147-A177-3AD203B41FA5}">
+                      <a16:colId xmlns:a16="http://schemas.microsoft.com/office/drawing/2014/main" val="20000"/>
+                    </a:ext>
+                  </a:extLst>
+                </a:gridCol>
+                <a:gridCol w="4343400">
+                  <a:extLst>
+                    <a:ext uri="{9D8B030D-6E8A-4147-A177-3AD203B41FA5}">
+                      <a16:colId xmlns:a16="http://schemas.microsoft.com/office/drawing/2014/main" val="20001"/>
+                    </a:ext>
+                  </a:extLst>
+                </a:gridCol>
+                <a:gridCol w="4343400">
+                  <a:extLst>
+                    <a:ext uri="{9D8B030D-6E8A-4147-A177-3AD203B41FA5}">
+                      <a16:colId xmlns:a16="http://schemas.microsoft.com/office/drawing/2014/main" val="20002"/>
+                    </a:ext>
+                  </a:extLst>
+                </a:gridCol>
               </a:tblGrid>
               <a:tr h="502920">
                 <a:tc>
@@ -7749,7 +7608,7 @@
                     <a:bodyPr/>
                     <a:lstStyle/>
                     <a:p>
-                      <a:pPr algn="l" indent="0" marL="0">
+                      <a:pPr marL="0" indent="0" algn="l">
                         <a:buNone/>
                       </a:pPr>
                       <a:endParaRPr lang="en-US" sz="1300" dirty="0">
@@ -7806,7 +7665,7 @@
                     <a:bodyPr/>
                     <a:lstStyle/>
                     <a:p>
-                      <a:pPr algn="ctr" indent="0" marL="0">
+                      <a:pPr marL="0" indent="0" algn="ctr">
                         <a:buNone/>
                       </a:pPr>
                       <a:r>
@@ -7874,7 +7733,7 @@
                     <a:bodyPr/>
                     <a:lstStyle/>
                     <a:p>
-                      <a:pPr algn="ctr" indent="0" marL="0">
+                      <a:pPr marL="0" indent="0" algn="ctr">
                         <a:buNone/>
                       </a:pPr>
                       <a:r>
@@ -7937,6 +7796,11 @@
                     </a:solidFill>
                   </a:tcPr>
                 </a:tc>
+                <a:extLst>
+                  <a:ext uri="{0D108BD9-81ED-4DB2-BD59-A6C34878D82A}">
+                    <a16:rowId xmlns:a16="http://schemas.microsoft.com/office/drawing/2014/main" val="10000"/>
+                  </a:ext>
+                </a:extLst>
               </a:tr>
               <a:tr h="777240">
                 <a:tc>
@@ -7944,7 +7808,7 @@
                     <a:bodyPr/>
                     <a:lstStyle/>
                     <a:p>
-                      <a:pPr algn="l" indent="0" marL="0">
+                      <a:pPr marL="0" indent="0" algn="l">
                         <a:buNone/>
                       </a:pPr>
                       <a:r>
@@ -8012,7 +7876,7 @@
                     <a:bodyPr/>
                     <a:lstStyle/>
                     <a:p>
-                      <a:pPr algn="l" indent="0" marL="0">
+                      <a:pPr marL="0" indent="0" algn="l">
                         <a:buNone/>
                       </a:pPr>
                       <a:r>
@@ -8080,7 +7944,7 @@
                     <a:bodyPr/>
                     <a:lstStyle/>
                     <a:p>
-                      <a:pPr algn="l" indent="0" marL="0">
+                      <a:pPr marL="0" indent="0" algn="l">
                         <a:buNone/>
                       </a:pPr>
                       <a:r>
@@ -8143,6 +8007,11 @@
                     </a:solidFill>
                   </a:tcPr>
                 </a:tc>
+                <a:extLst>
+                  <a:ext uri="{0D108BD9-81ED-4DB2-BD59-A6C34878D82A}">
+                    <a16:rowId xmlns:a16="http://schemas.microsoft.com/office/drawing/2014/main" val="10001"/>
+                  </a:ext>
+                </a:extLst>
               </a:tr>
               <a:tr h="777240">
                 <a:tc>
@@ -8150,7 +8019,7 @@
                     <a:bodyPr/>
                     <a:lstStyle/>
                     <a:p>
-                      <a:pPr algn="l" indent="0" marL="0">
+                      <a:pPr marL="0" indent="0" algn="l">
                         <a:buNone/>
                       </a:pPr>
                       <a:r>
@@ -8218,7 +8087,7 @@
                     <a:bodyPr/>
                     <a:lstStyle/>
                     <a:p>
-                      <a:pPr algn="l" indent="0" marL="0">
+                      <a:pPr marL="0" indent="0" algn="l">
                         <a:buNone/>
                       </a:pPr>
                       <a:r>
@@ -8286,7 +8155,7 @@
                     <a:bodyPr/>
                     <a:lstStyle/>
                     <a:p>
-                      <a:pPr algn="l" indent="0" marL="0">
+                      <a:pPr marL="0" indent="0" algn="l">
                         <a:buNone/>
                       </a:pPr>
                       <a:r>
@@ -8349,6 +8218,11 @@
                     </a:solidFill>
                   </a:tcPr>
                 </a:tc>
+                <a:extLst>
+                  <a:ext uri="{0D108BD9-81ED-4DB2-BD59-A6C34878D82A}">
+                    <a16:rowId xmlns:a16="http://schemas.microsoft.com/office/drawing/2014/main" val="10002"/>
+                  </a:ext>
+                </a:extLst>
               </a:tr>
               <a:tr h="777240">
                 <a:tc>
@@ -8356,7 +8230,7 @@
                     <a:bodyPr/>
                     <a:lstStyle/>
                     <a:p>
-                      <a:pPr algn="l" indent="0" marL="0">
+                      <a:pPr marL="0" indent="0" algn="l">
                         <a:buNone/>
                       </a:pPr>
                       <a:r>
@@ -8424,7 +8298,7 @@
                     <a:bodyPr/>
                     <a:lstStyle/>
                     <a:p>
-                      <a:pPr algn="l" indent="0" marL="0">
+                      <a:pPr marL="0" indent="0" algn="l">
                         <a:buNone/>
                       </a:pPr>
                       <a:r>
@@ -8492,7 +8366,7 @@
                     <a:bodyPr/>
                     <a:lstStyle/>
                     <a:p>
-                      <a:pPr algn="l" indent="0" marL="0">
+                      <a:pPr marL="0" indent="0" algn="l">
                         <a:buNone/>
                       </a:pPr>
                       <a:r>
@@ -8555,6 +8429,11 @@
                     </a:solidFill>
                   </a:tcPr>
                 </a:tc>
+                <a:extLst>
+                  <a:ext uri="{0D108BD9-81ED-4DB2-BD59-A6C34878D82A}">
+                    <a16:rowId xmlns:a16="http://schemas.microsoft.com/office/drawing/2014/main" val="10003"/>
+                  </a:ext>
+                </a:extLst>
               </a:tr>
               <a:tr h="777240">
                 <a:tc>
@@ -8562,7 +8441,7 @@
                     <a:bodyPr/>
                     <a:lstStyle/>
                     <a:p>
-                      <a:pPr algn="l" indent="0" marL="0">
+                      <a:pPr marL="0" indent="0" algn="l">
                         <a:buNone/>
                       </a:pPr>
                       <a:r>
@@ -8630,7 +8509,7 @@
                     <a:bodyPr/>
                     <a:lstStyle/>
                     <a:p>
-                      <a:pPr algn="l" indent="0" marL="0">
+                      <a:pPr marL="0" indent="0" algn="l">
                         <a:buNone/>
                       </a:pPr>
                       <a:r>
@@ -8698,7 +8577,7 @@
                     <a:bodyPr/>
                     <a:lstStyle/>
                     <a:p>
-                      <a:pPr algn="l" indent="0" marL="0">
+                      <a:pPr marL="0" indent="0" algn="l">
                         <a:buNone/>
                       </a:pPr>
                       <a:r>
@@ -8761,6 +8640,11 @@
                     </a:solidFill>
                   </a:tcPr>
                 </a:tc>
+                <a:extLst>
+                  <a:ext uri="{0D108BD9-81ED-4DB2-BD59-A6C34878D82A}">
+                    <a16:rowId xmlns:a16="http://schemas.microsoft.com/office/drawing/2014/main" val="10004"/>
+                  </a:ext>
+                </a:extLst>
               </a:tr>
             </a:tbl>
           </a:graphicData>
@@ -8787,7 +8671,7 @@
           <a:bodyPr wrap="square" lIns="0" tIns="0" rIns="0" bIns="0" rtlCol="0" anchor="ctr"/>
           <a:lstStyle/>
           <a:p>
-            <a:pPr algn="ctr" indent="0" marL="0">
+            <a:pPr marL="0" indent="0" algn="ctr">
               <a:buNone/>
             </a:pPr>
             <a:r>
@@ -8826,7 +8710,7 @@
           <a:bodyPr wrap="square" lIns="0" tIns="0" rIns="0" bIns="0" rtlCol="0" anchor="ctr"/>
           <a:lstStyle/>
           <a:p>
-            <a:pPr algn="r" indent="0" marL="0">
+            <a:pPr marL="0" indent="0" algn="r">
               <a:buNone/>
             </a:pPr>
             <a:r>
@@ -8860,6 +8744,7 @@
         <a:solidFill>
           <a:srgbClr val="141B41"/>
         </a:solidFill>
+        <a:effectLst/>
       </p:bgPr>
     </p:bg>
     <p:spTree>
@@ -8921,11 +8806,11 @@
           <a:bodyPr wrap="square" lIns="0" tIns="0" rIns="0" bIns="0" rtlCol="0" anchor="ctr"/>
           <a:lstStyle/>
           <a:p>
-            <a:pPr algn="l" indent="0" marL="0">
+            <a:pPr marL="0" indent="0" algn="l">
               <a:buNone/>
             </a:pPr>
             <a:r>
-              <a:rPr lang="en-US" sz="1200" b="1" spc="200" kern="0" dirty="0">
+              <a:rPr lang="en-US" sz="1200" b="1" kern="0" spc="200" dirty="0">
                 <a:solidFill>
                   <a:srgbClr val="2FE6C7"/>
                 </a:solidFill>
@@ -8961,14 +8846,14 @@
       </p:sp>
       <p:pic>
         <p:nvPicPr>
-          <p:cNvPr id="5" name="Image 0" descr="preencoded.png">    </p:cNvPr>
+          <p:cNvPr id="5" name="Image 0" descr="preencoded.png"/>
           <p:cNvPicPr>
             <a:picLocks noChangeAspect="1"/>
           </p:cNvPicPr>
           <p:nvPr/>
         </p:nvPicPr>
         <p:blipFill>
-          <a:blip r:embed="rId1"/>
+          <a:blip r:embed="rId3"/>
           <a:stretch>
             <a:fillRect/>
           </a:stretch>
@@ -9004,7 +8889,7 @@
           <a:bodyPr wrap="square" lIns="0" tIns="0" rIns="0" bIns="0" rtlCol="0" anchor="ctr"/>
           <a:lstStyle/>
           <a:p>
-            <a:pPr algn="ctr" indent="0" marL="0">
+            <a:pPr marL="0" indent="0" algn="ctr">
               <a:buNone/>
             </a:pPr>
             <a:r>
@@ -9043,7 +8928,7 @@
           <a:bodyPr wrap="square" lIns="0" tIns="0" rIns="0" bIns="0" rtlCol="0" anchor="ctr"/>
           <a:lstStyle/>
           <a:p>
-            <a:pPr algn="ctr" indent="0" marL="0">
+            <a:pPr marL="0" indent="0" algn="ctr">
               <a:lnSpc>
                 <a:spcPts val="2200"/>
               </a:lnSpc>
@@ -9080,6 +8965,7 @@
         <a:solidFill>
           <a:srgbClr val="FFFFFF"/>
         </a:solidFill>
+        <a:effectLst/>
       </p:bgPr>
     </p:bg>
     <p:spTree>
@@ -9117,11 +9003,11 @@
           <a:bodyPr wrap="square" lIns="0" tIns="0" rIns="0" bIns="0" rtlCol="0" anchor="ctr"/>
           <a:lstStyle/>
           <a:p>
-            <a:pPr algn="l" indent="0" marL="0">
+            <a:pPr marL="0" indent="0" algn="l">
               <a:buNone/>
             </a:pPr>
             <a:r>
-              <a:rPr lang="en-US" sz="1200" b="1" spc="200" kern="0" dirty="0">
+              <a:rPr lang="en-US" sz="1200" b="1" kern="0" spc="200" dirty="0">
                 <a:solidFill>
                   <a:srgbClr val="6C4BC1"/>
                 </a:solidFill>
@@ -9156,7 +9042,7 @@
           <a:bodyPr wrap="square" lIns="0" tIns="0" rIns="0" bIns="0" rtlCol="0" anchor="ctr"/>
           <a:lstStyle/>
           <a:p>
-            <a:pPr indent="0" marL="0">
+            <a:pPr marL="0" indent="0">
               <a:buNone/>
             </a:pPr>
             <a:r>
@@ -9195,7 +9081,7 @@
           <a:bodyPr wrap="square" lIns="0" tIns="0" rIns="0" bIns="0" rtlCol="0" anchor="ctr"/>
           <a:lstStyle/>
           <a:p>
-            <a:pPr indent="0" marL="0">
+            <a:pPr marL="0" indent="0">
               <a:lnSpc>
                 <a:spcPts val="1700"/>
               </a:lnSpc>
@@ -9319,7 +9205,7 @@
           <a:bodyPr wrap="square" lIns="0" tIns="0" rIns="0" bIns="0" rtlCol="0" anchor="ctr"/>
           <a:lstStyle/>
           <a:p>
-            <a:pPr indent="0" marL="0">
+            <a:pPr marL="0" indent="0">
               <a:buNone/>
             </a:pPr>
             <a:r>
@@ -9339,14 +9225,14 @@
       </p:sp>
       <p:pic>
         <p:nvPicPr>
-          <p:cNvPr id="10" name="Image 0" descr="preencoded.png">    </p:cNvPr>
+          <p:cNvPr id="10" name="Image 0" descr="preencoded.png"/>
           <p:cNvPicPr>
             <a:picLocks noChangeAspect="1"/>
           </p:cNvPicPr>
           <p:nvPr/>
         </p:nvPicPr>
         <p:blipFill>
-          <a:blip r:embed="rId1"/>
+          <a:blip r:embed="rId3"/>
           <a:stretch>
             <a:fillRect/>
           </a:stretch>
@@ -9382,7 +9268,7 @@
           <a:bodyPr wrap="square" lIns="0" tIns="0" rIns="0" bIns="0" rtlCol="0" anchor="ctr"/>
           <a:lstStyle/>
           <a:p>
-            <a:pPr indent="0" marL="0">
+            <a:pPr marL="0" indent="0">
               <a:buNone/>
             </a:pPr>
             <a:r>
@@ -9396,9 +9282,6 @@
               </a:rPr>
               <a:t>from </a:t>
             </a:r>
-            <a:pPr indent="0" marL="0">
-              <a:buNone/>
-            </a:pPr>
             <a:r>
               <a:rPr lang="en-US" sz="1250" dirty="0">
                 <a:solidFill>
@@ -9410,9 +9293,6 @@
               </a:rPr>
               <a:t>sympy </a:t>
             </a:r>
-            <a:pPr indent="0" marL="0">
-              <a:buNone/>
-            </a:pPr>
             <a:r>
               <a:rPr lang="en-US" sz="1250" dirty="0">
                 <a:solidFill>
@@ -9424,9 +9304,6 @@
               </a:rPr>
               <a:t>import </a:t>
             </a:r>
-            <a:pPr indent="0" marL="0">
-              <a:buNone/>
-            </a:pPr>
             <a:r>
               <a:rPr lang="en-US" sz="1250" dirty="0">
                 <a:solidFill>
@@ -9463,7 +9340,7 @@
           <a:bodyPr wrap="square" lIns="0" tIns="0" rIns="0" bIns="0" rtlCol="0" anchor="ctr"/>
           <a:lstStyle/>
           <a:p>
-            <a:pPr indent="0" marL="0">
+            <a:pPr marL="0" indent="0">
               <a:buNone/>
             </a:pPr>
             <a:r>
@@ -9477,9 +9354,6 @@
               </a:rPr>
               <a:t>from </a:t>
             </a:r>
-            <a:pPr indent="0" marL="0">
-              <a:buNone/>
-            </a:pPr>
             <a:r>
               <a:rPr lang="en-US" sz="1250" dirty="0">
                 <a:solidFill>
@@ -9491,9 +9365,6 @@
               </a:rPr>
               <a:t>sympy.logic </a:t>
             </a:r>
-            <a:pPr indent="0" marL="0">
-              <a:buNone/>
-            </a:pPr>
             <a:r>
               <a:rPr lang="en-US" sz="1250" dirty="0">
                 <a:solidFill>
@@ -9505,9 +9376,6 @@
               </a:rPr>
               <a:t>import </a:t>
             </a:r>
-            <a:pPr indent="0" marL="0">
-              <a:buNone/>
-            </a:pPr>
             <a:r>
               <a:rPr lang="en-US" sz="1250" dirty="0">
                 <a:solidFill>
@@ -9544,7 +9412,7 @@
           <a:bodyPr wrap="square" lIns="0" tIns="0" rIns="0" bIns="0" rtlCol="0" anchor="ctr"/>
           <a:lstStyle/>
           <a:p>
-            <a:pPr indent="0" marL="0">
+            <a:pPr marL="0" indent="0">
               <a:buNone/>
             </a:pPr>
             <a:r>
@@ -9583,7 +9451,7 @@
           <a:bodyPr wrap="square" lIns="0" tIns="0" rIns="0" bIns="0" rtlCol="0" anchor="ctr"/>
           <a:lstStyle/>
           <a:p>
-            <a:pPr indent="0" marL="0">
+            <a:pPr marL="0" indent="0">
               <a:buNone/>
             </a:pPr>
             <a:r>
@@ -9597,9 +9465,6 @@
               </a:rPr>
               <a:t>x, y, z = symbols(</a:t>
             </a:r>
-            <a:pPr indent="0" marL="0">
-              <a:buNone/>
-            </a:pPr>
             <a:r>
               <a:rPr lang="en-US" sz="1250" dirty="0">
                 <a:solidFill>
@@ -9611,9 +9476,6 @@
               </a:rPr>
               <a:t>"x y z"</a:t>
             </a:r>
-            <a:pPr indent="0" marL="0">
-              <a:buNone/>
-            </a:pPr>
             <a:r>
               <a:rPr lang="en-US" sz="1250" dirty="0">
                 <a:solidFill>
@@ -9650,7 +9512,7 @@
           <a:bodyPr wrap="square" lIns="0" tIns="0" rIns="0" bIns="0" rtlCol="0" anchor="ctr"/>
           <a:lstStyle/>
           <a:p>
-            <a:pPr indent="0" marL="0">
+            <a:pPr marL="0" indent="0">
               <a:buNone/>
             </a:pPr>
             <a:r>
@@ -9689,7 +9551,7 @@
           <a:bodyPr wrap="square" lIns="0" tIns="0" rIns="0" bIns="0" rtlCol="0" anchor="ctr"/>
           <a:lstStyle/>
           <a:p>
-            <a:pPr indent="0" marL="0">
+            <a:pPr marL="0" indent="0">
               <a:buNone/>
             </a:pPr>
             <a:r>
@@ -9728,7 +9590,7 @@
           <a:bodyPr wrap="square" lIns="0" tIns="0" rIns="0" bIns="0" rtlCol="0" anchor="ctr"/>
           <a:lstStyle/>
           <a:p>
-            <a:pPr indent="0" marL="0">
+            <a:pPr marL="0" indent="0">
               <a:buNone/>
             </a:pPr>
             <a:r>
@@ -9767,7 +9629,7 @@
           <a:bodyPr wrap="square" lIns="0" tIns="0" rIns="0" bIns="0" rtlCol="0" anchor="ctr"/>
           <a:lstStyle/>
           <a:p>
-            <a:pPr indent="0" marL="0">
+            <a:pPr marL="0" indent="0">
               <a:buNone/>
             </a:pPr>
             <a:r>
@@ -9781,9 +9643,6 @@
               </a:rPr>
               <a:t>print(simplify_logic(expressao))  </a:t>
             </a:r>
-            <a:pPr indent="0" marL="0">
-              <a:buNone/>
-            </a:pPr>
             <a:r>
               <a:rPr lang="en-US" sz="1250" dirty="0">
                 <a:solidFill>
@@ -9820,7 +9679,7 @@
           <a:bodyPr wrap="square" lIns="0" tIns="0" rIns="0" bIns="0" rtlCol="0" anchor="ctr"/>
           <a:lstStyle/>
           <a:p>
-            <a:pPr algn="r" indent="0" marL="0">
+            <a:pPr marL="0" indent="0" algn="r">
               <a:buNone/>
             </a:pPr>
             <a:r>
@@ -9854,6 +9713,7 @@
         <a:solidFill>
           <a:srgbClr val="6C4BC1"/>
         </a:solidFill>
+        <a:effectLst/>
       </p:bgPr>
     </p:bg>
     <p:spTree>
@@ -9940,14 +9800,14 @@
       </p:sp>
       <p:pic>
         <p:nvPicPr>
-          <p:cNvPr id="5" name="Image 0" descr="preencoded.png">    </p:cNvPr>
+          <p:cNvPr id="5" name="Image 0" descr="preencoded.png"/>
           <p:cNvPicPr>
             <a:picLocks noChangeAspect="1"/>
           </p:cNvPicPr>
           <p:nvPr/>
         </p:nvPicPr>
         <p:blipFill>
-          <a:blip r:embed="rId1"/>
+          <a:blip r:embed="rId3"/>
           <a:stretch>
             <a:fillRect/>
           </a:stretch>
@@ -9983,7 +9843,7 @@
           <a:bodyPr wrap="square" lIns="0" tIns="0" rIns="0" bIns="0" rtlCol="0" anchor="ctr"/>
           <a:lstStyle/>
           <a:p>
-            <a:pPr algn="ctr" indent="0" marL="0">
+            <a:pPr marL="0" indent="0" algn="ctr">
               <a:buNone/>
             </a:pPr>
             <a:r>
@@ -10022,7 +9882,7 @@
           <a:bodyPr wrap="square" lIns="0" tIns="0" rIns="0" bIns="0" rtlCol="0" anchor="ctr"/>
           <a:lstStyle/>
           <a:p>
-            <a:pPr algn="ctr" indent="0" marL="0">
+            <a:pPr marL="0" indent="0" algn="ctr">
               <a:buNone/>
             </a:pPr>
             <a:r>
@@ -10056,6 +9916,7 @@
         <a:solidFill>
           <a:srgbClr val="FFFFFF"/>
         </a:solidFill>
+        <a:effectLst/>
       </p:bgPr>
     </p:bg>
     <p:spTree>
@@ -10094,14 +9955,14 @@
       </p:sp>
       <p:pic>
         <p:nvPicPr>
-          <p:cNvPr id="3" name="Image 0" descr="preencoded.png">    </p:cNvPr>
+          <p:cNvPr id="3" name="Image 0" descr="preencoded.png"/>
           <p:cNvPicPr>
             <a:picLocks noChangeAspect="1"/>
           </p:cNvPicPr>
           <p:nvPr/>
         </p:nvPicPr>
         <p:blipFill>
-          <a:blip r:embed="rId1"/>
+          <a:blip r:embed="rId3"/>
           <a:stretch>
             <a:fillRect/>
           </a:stretch>
@@ -10137,11 +9998,11 @@
           <a:bodyPr wrap="square" lIns="0" tIns="0" rIns="0" bIns="0" rtlCol="0" anchor="ctr"/>
           <a:lstStyle/>
           <a:p>
-            <a:pPr indent="0" marL="0">
+            <a:pPr marL="0" indent="0">
               <a:buNone/>
             </a:pPr>
             <a:r>
-              <a:rPr lang="en-US" sz="1200" b="1" spc="150" kern="0" dirty="0">
+              <a:rPr lang="en-US" sz="1200" b="1" kern="0" spc="150" dirty="0">
                 <a:solidFill>
                   <a:srgbClr val="6C4BC1"/>
                 </a:solidFill>
@@ -10176,7 +10037,7 @@
           <a:bodyPr wrap="square" lIns="0" tIns="0" rIns="0" bIns="0" rtlCol="0" anchor="ctr"/>
           <a:lstStyle/>
           <a:p>
-            <a:pPr indent="0" marL="0">
+            <a:pPr marL="0" indent="0">
               <a:buNone/>
             </a:pPr>
             <a:r>
@@ -10215,7 +10076,7 @@
           <a:bodyPr wrap="square" lIns="0" tIns="0" rIns="0" bIns="0" rtlCol="0" anchor="ctr"/>
           <a:lstStyle/>
           <a:p>
-            <a:pPr indent="0" marL="0">
+            <a:pPr marL="0" indent="0">
               <a:lnSpc>
                 <a:spcPts val="1900"/>
               </a:lnSpc>
@@ -10284,7 +10145,7 @@
           <a:bodyPr wrap="square" lIns="0" tIns="0" rIns="0" bIns="0" rtlCol="0" anchor="ctr"/>
           <a:lstStyle/>
           <a:p>
-            <a:pPr indent="0" marL="0">
+            <a:pPr marL="0" indent="0">
               <a:buNone/>
             </a:pPr>
             <a:r>
@@ -10323,7 +10184,7 @@
           <a:bodyPr wrap="square" lIns="0" tIns="0" rIns="0" bIns="0" rtlCol="0" anchor="ctr"/>
           <a:lstStyle/>
           <a:p>
-            <a:pPr indent="0" marL="0">
+            <a:pPr marL="0" indent="0">
               <a:buNone/>
             </a:pPr>
             <a:r>
@@ -10362,7 +10223,7 @@
           <a:bodyPr wrap="square" lIns="0" tIns="0" rIns="0" bIns="0" rtlCol="0" anchor="ctr"/>
           <a:lstStyle/>
           <a:p>
-            <a:pPr indent="0" marL="0">
+            <a:pPr marL="0" indent="0">
               <a:buNone/>
             </a:pPr>
             <a:r>
@@ -10401,7 +10262,7 @@
           <a:bodyPr wrap="square" lIns="0" tIns="0" rIns="0" bIns="0" rtlCol="0" anchor="ctr"/>
           <a:lstStyle/>
           <a:p>
-            <a:pPr algn="r" indent="0" marL="0">
+            <a:pPr marL="0" indent="0" algn="r">
               <a:buNone/>
             </a:pPr>
             <a:r>
@@ -10435,6 +10296,7 @@
         <a:solidFill>
           <a:srgbClr val="FFFFFF"/>
         </a:solidFill>
+        <a:effectLst/>
       </p:bgPr>
     </p:bg>
     <p:spTree>
@@ -10472,11 +10334,11 @@
           <a:bodyPr wrap="square" lIns="0" tIns="0" rIns="0" bIns="0" rtlCol="0" anchor="ctr"/>
           <a:lstStyle/>
           <a:p>
-            <a:pPr algn="l" indent="0" marL="0">
+            <a:pPr marL="0" indent="0" algn="l">
               <a:buNone/>
             </a:pPr>
             <a:r>
-              <a:rPr lang="en-US" sz="1200" b="1" spc="200" kern="0" dirty="0">
+              <a:rPr lang="en-US" sz="1200" b="1" kern="0" spc="200" dirty="0">
                 <a:solidFill>
                   <a:srgbClr val="6C4BC1"/>
                 </a:solidFill>
@@ -10511,7 +10373,7 @@
           <a:bodyPr wrap="square" lIns="0" tIns="0" rIns="0" bIns="0" rtlCol="0" anchor="ctr"/>
           <a:lstStyle/>
           <a:p>
-            <a:pPr indent="0" marL="0">
+            <a:pPr marL="0" indent="0">
               <a:buNone/>
             </a:pPr>
             <a:r>
@@ -10551,14 +10413,14 @@
       </p:sp>
       <p:pic>
         <p:nvPicPr>
-          <p:cNvPr id="5" name="Image 0" descr="preencoded.png">    </p:cNvPr>
+          <p:cNvPr id="5" name="Image 0" descr="preencoded.png"/>
           <p:cNvPicPr>
             <a:picLocks noChangeAspect="1"/>
           </p:cNvPicPr>
           <p:nvPr/>
         </p:nvPicPr>
         <p:blipFill>
-          <a:blip r:embed="rId1"/>
+          <a:blip r:embed="rId3"/>
           <a:stretch>
             <a:fillRect/>
           </a:stretch>
@@ -10594,7 +10456,7 @@
           <a:bodyPr wrap="square" lIns="0" tIns="0" rIns="0" bIns="0" rtlCol="0" anchor="ctr"/>
           <a:lstStyle/>
           <a:p>
-            <a:pPr indent="0" marL="0">
+            <a:pPr marL="0" indent="0">
               <a:lnSpc>
                 <a:spcPts val="2000"/>
               </a:lnSpc>
@@ -10636,7 +10498,7 @@
           <a:bodyPr wrap="square" lIns="0" tIns="0" rIns="0" bIns="0" rtlCol="0" anchor="ctr"/>
           <a:lstStyle/>
           <a:p>
-            <a:pPr indent="0" marL="0">
+            <a:pPr marL="0" indent="0">
               <a:buNone/>
             </a:pPr>
             <a:r>
@@ -10676,14 +10538,14 @@
       </p:sp>
       <p:pic>
         <p:nvPicPr>
-          <p:cNvPr id="9" name="Image 1" descr="preencoded.png">    </p:cNvPr>
+          <p:cNvPr id="9" name="Image 1" descr="preencoded.png"/>
           <p:cNvPicPr>
             <a:picLocks noChangeAspect="1"/>
           </p:cNvPicPr>
           <p:nvPr/>
         </p:nvPicPr>
         <p:blipFill>
-          <a:blip r:embed="rId2"/>
+          <a:blip r:embed="rId4"/>
           <a:stretch>
             <a:fillRect/>
           </a:stretch>
@@ -10719,7 +10581,7 @@
           <a:bodyPr wrap="square" lIns="0" tIns="0" rIns="0" bIns="0" rtlCol="0" anchor="ctr"/>
           <a:lstStyle/>
           <a:p>
-            <a:pPr indent="0" marL="0">
+            <a:pPr marL="0" indent="0">
               <a:lnSpc>
                 <a:spcPts val="2000"/>
               </a:lnSpc>
@@ -10761,7 +10623,7 @@
           <a:bodyPr wrap="square" lIns="0" tIns="0" rIns="0" bIns="0" rtlCol="0" anchor="ctr"/>
           <a:lstStyle/>
           <a:p>
-            <a:pPr indent="0" marL="0">
+            <a:pPr marL="0" indent="0">
               <a:buNone/>
             </a:pPr>
             <a:r>
@@ -10801,14 +10663,14 @@
       </p:sp>
       <p:pic>
         <p:nvPicPr>
-          <p:cNvPr id="13" name="Image 2" descr="preencoded.png">    </p:cNvPr>
+          <p:cNvPr id="13" name="Image 2" descr="preencoded.png"/>
           <p:cNvPicPr>
             <a:picLocks noChangeAspect="1"/>
           </p:cNvPicPr>
           <p:nvPr/>
         </p:nvPicPr>
         <p:blipFill>
-          <a:blip r:embed="rId3"/>
+          <a:blip r:embed="rId5"/>
           <a:stretch>
             <a:fillRect/>
           </a:stretch>
@@ -10844,7 +10706,7 @@
           <a:bodyPr wrap="square" lIns="0" tIns="0" rIns="0" bIns="0" rtlCol="0" anchor="ctr"/>
           <a:lstStyle/>
           <a:p>
-            <a:pPr indent="0" marL="0">
+            <a:pPr marL="0" indent="0">
               <a:lnSpc>
                 <a:spcPts val="2000"/>
               </a:lnSpc>
@@ -10886,7 +10748,7 @@
           <a:bodyPr wrap="square" lIns="0" tIns="0" rIns="0" bIns="0" rtlCol="0" anchor="ctr"/>
           <a:lstStyle/>
           <a:p>
-            <a:pPr indent="0" marL="0">
+            <a:pPr marL="0" indent="0">
               <a:buNone/>
             </a:pPr>
             <a:r>
@@ -10925,7 +10787,7 @@
           <a:bodyPr wrap="square" lIns="0" tIns="0" rIns="0" bIns="0" rtlCol="0" anchor="ctr"/>
           <a:lstStyle/>
           <a:p>
-            <a:pPr algn="r" indent="0" marL="0">
+            <a:pPr marL="0" indent="0" algn="r">
               <a:buNone/>
             </a:pPr>
             <a:r>
@@ -10959,6 +10821,7 @@
         <a:solidFill>
           <a:srgbClr val="FFFFFF"/>
         </a:solidFill>
+        <a:effectLst/>
       </p:bgPr>
     </p:bg>
     <p:spTree>
@@ -10997,14 +10860,14 @@
       </p:sp>
       <p:pic>
         <p:nvPicPr>
-          <p:cNvPr id="3" name="Image 0" descr="preencoded.png">    </p:cNvPr>
+          <p:cNvPr id="3" name="Image 0" descr="preencoded.png"/>
           <p:cNvPicPr>
             <a:picLocks noChangeAspect="1"/>
           </p:cNvPicPr>
           <p:nvPr/>
         </p:nvPicPr>
         <p:blipFill>
-          <a:blip r:embed="rId1"/>
+          <a:blip r:embed="rId3"/>
           <a:stretch>
             <a:fillRect/>
           </a:stretch>
@@ -11040,11 +10903,11 @@
           <a:bodyPr wrap="square" lIns="0" tIns="0" rIns="0" bIns="0" rtlCol="0" anchor="ctr"/>
           <a:lstStyle/>
           <a:p>
-            <a:pPr indent="0" marL="0">
+            <a:pPr marL="0" indent="0">
               <a:buNone/>
             </a:pPr>
             <a:r>
-              <a:rPr lang="en-US" sz="1200" b="1" spc="150" kern="0" dirty="0">
+              <a:rPr lang="en-US" sz="1200" b="1" kern="0" spc="150" dirty="0">
                 <a:solidFill>
                   <a:srgbClr val="3EBD59"/>
                 </a:solidFill>
@@ -11079,7 +10942,7 @@
           <a:bodyPr wrap="square" lIns="0" tIns="0" rIns="0" bIns="0" rtlCol="0" anchor="ctr"/>
           <a:lstStyle/>
           <a:p>
-            <a:pPr indent="0" marL="0">
+            <a:pPr marL="0" indent="0">
               <a:buNone/>
             </a:pPr>
             <a:r>
@@ -11120,9 +10983,27 @@
             <a:tbl>
               <a:tblPr/>
               <a:tblGrid>
-                <a:gridCol w="2286000"/>
-                <a:gridCol w="2286000"/>
-                <a:gridCol w="2286000"/>
+                <a:gridCol w="2286000">
+                  <a:extLst>
+                    <a:ext uri="{9D8B030D-6E8A-4147-A177-3AD203B41FA5}">
+                      <a16:colId xmlns:a16="http://schemas.microsoft.com/office/drawing/2014/main" val="20000"/>
+                    </a:ext>
+                  </a:extLst>
+                </a:gridCol>
+                <a:gridCol w="2286000">
+                  <a:extLst>
+                    <a:ext uri="{9D8B030D-6E8A-4147-A177-3AD203B41FA5}">
+                      <a16:colId xmlns:a16="http://schemas.microsoft.com/office/drawing/2014/main" val="20001"/>
+                    </a:ext>
+                  </a:extLst>
+                </a:gridCol>
+                <a:gridCol w="2286000">
+                  <a:extLst>
+                    <a:ext uri="{9D8B030D-6E8A-4147-A177-3AD203B41FA5}">
+                      <a16:colId xmlns:a16="http://schemas.microsoft.com/office/drawing/2014/main" val="20002"/>
+                    </a:ext>
+                  </a:extLst>
+                </a:gridCol>
               </a:tblGrid>
               <a:tr h="502920">
                 <a:tc>
@@ -11130,7 +11011,7 @@
                     <a:bodyPr/>
                     <a:lstStyle/>
                     <a:p>
-                      <a:pPr algn="ctr" indent="0" marL="0">
+                      <a:pPr marL="0" indent="0" algn="ctr">
                         <a:buNone/>
                       </a:pPr>
                       <a:r>
@@ -11151,7 +11032,7 @@
                       </a:endParaRPr>
                     </a:p>
                   </a:txBody>
-                  <a:tcPr marL="91440" marR="91440" marT="45720" marB="45720" anchor="ctr">
+                  <a:tcPr anchor="ctr">
                     <a:lnL w="38100" cap="flat" cmpd="sng" algn="ctr">
                       <a:solidFill>
                         <a:srgbClr val="FFFFFF"/>
@@ -11198,7 +11079,7 @@
                     <a:bodyPr/>
                     <a:lstStyle/>
                     <a:p>
-                      <a:pPr algn="ctr" indent="0" marL="0">
+                      <a:pPr marL="0" indent="0" algn="ctr">
                         <a:buNone/>
                       </a:pPr>
                       <a:r>
@@ -11219,7 +11100,7 @@
                       </a:endParaRPr>
                     </a:p>
                   </a:txBody>
-                  <a:tcPr marL="91440" marR="91440" marT="45720" marB="45720" anchor="ctr">
+                  <a:tcPr anchor="ctr">
                     <a:lnL w="38100" cap="flat" cmpd="sng" algn="ctr">
                       <a:solidFill>
                         <a:srgbClr val="FFFFFF"/>
@@ -11266,7 +11147,7 @@
                     <a:bodyPr/>
                     <a:lstStyle/>
                     <a:p>
-                      <a:pPr algn="ctr" indent="0" marL="0">
+                      <a:pPr marL="0" indent="0" algn="ctr">
                         <a:buNone/>
                       </a:pPr>
                       <a:r>
@@ -11287,7 +11168,7 @@
                       </a:endParaRPr>
                     </a:p>
                   </a:txBody>
-                  <a:tcPr marL="91440" marR="91440" marT="45720" marB="45720" anchor="ctr">
+                  <a:tcPr anchor="ctr">
                     <a:lnL w="38100" cap="flat" cmpd="sng" algn="ctr">
                       <a:solidFill>
                         <a:srgbClr val="FFFFFF"/>
@@ -11329,6 +11210,11 @@
                     </a:solidFill>
                   </a:tcPr>
                 </a:tc>
+                <a:extLst>
+                  <a:ext uri="{0D108BD9-81ED-4DB2-BD59-A6C34878D82A}">
+                    <a16:rowId xmlns:a16="http://schemas.microsoft.com/office/drawing/2014/main" val="10000"/>
+                  </a:ext>
+                </a:extLst>
               </a:tr>
               <a:tr h="502920">
                 <a:tc>
@@ -11336,7 +11222,7 @@
                     <a:bodyPr/>
                     <a:lstStyle/>
                     <a:p>
-                      <a:pPr algn="ctr" indent="0" marL="0">
+                      <a:pPr marL="0" indent="0" algn="ctr">
                         <a:buNone/>
                       </a:pPr>
                       <a:r>
@@ -11357,7 +11243,7 @@
                       </a:endParaRPr>
                     </a:p>
                   </a:txBody>
-                  <a:tcPr marL="91440" marR="91440" marT="45720" marB="45720" anchor="ctr">
+                  <a:tcPr anchor="ctr">
                     <a:lnL w="38100" cap="flat" cmpd="sng" algn="ctr">
                       <a:solidFill>
                         <a:srgbClr val="FFFFFF"/>
@@ -11404,7 +11290,7 @@
                     <a:bodyPr/>
                     <a:lstStyle/>
                     <a:p>
-                      <a:pPr algn="ctr" indent="0" marL="0">
+                      <a:pPr marL="0" indent="0" algn="ctr">
                         <a:buNone/>
                       </a:pPr>
                       <a:r>
@@ -11425,7 +11311,7 @@
                       </a:endParaRPr>
                     </a:p>
                   </a:txBody>
-                  <a:tcPr marL="91440" marR="91440" marT="45720" marB="45720" anchor="ctr">
+                  <a:tcPr anchor="ctr">
                     <a:lnL w="38100" cap="flat" cmpd="sng" algn="ctr">
                       <a:solidFill>
                         <a:srgbClr val="FFFFFF"/>
@@ -11472,7 +11358,7 @@
                     <a:bodyPr/>
                     <a:lstStyle/>
                     <a:p>
-                      <a:pPr algn="ctr" indent="0" marL="0">
+                      <a:pPr marL="0" indent="0" algn="ctr">
                         <a:buNone/>
                       </a:pPr>
                       <a:r>
@@ -11493,7 +11379,7 @@
                       </a:endParaRPr>
                     </a:p>
                   </a:txBody>
-                  <a:tcPr marL="91440" marR="91440" marT="45720" marB="45720" anchor="ctr">
+                  <a:tcPr anchor="ctr">
                     <a:lnL w="38100" cap="flat" cmpd="sng" algn="ctr">
                       <a:solidFill>
                         <a:srgbClr val="FFFFFF"/>
@@ -11535,6 +11421,11 @@
                     </a:solidFill>
                   </a:tcPr>
                 </a:tc>
+                <a:extLst>
+                  <a:ext uri="{0D108BD9-81ED-4DB2-BD59-A6C34878D82A}">
+                    <a16:rowId xmlns:a16="http://schemas.microsoft.com/office/drawing/2014/main" val="10001"/>
+                  </a:ext>
+                </a:extLst>
               </a:tr>
               <a:tr h="502920">
                 <a:tc>
@@ -11542,7 +11433,7 @@
                     <a:bodyPr/>
                     <a:lstStyle/>
                     <a:p>
-                      <a:pPr algn="ctr" indent="0" marL="0">
+                      <a:pPr marL="0" indent="0" algn="ctr">
                         <a:buNone/>
                       </a:pPr>
                       <a:r>
@@ -11563,7 +11454,7 @@
                       </a:endParaRPr>
                     </a:p>
                   </a:txBody>
-                  <a:tcPr marL="91440" marR="91440" marT="45720" marB="45720" anchor="ctr">
+                  <a:tcPr anchor="ctr">
                     <a:lnL w="38100" cap="flat" cmpd="sng" algn="ctr">
                       <a:solidFill>
                         <a:srgbClr val="FFFFFF"/>
@@ -11610,7 +11501,7 @@
                     <a:bodyPr/>
                     <a:lstStyle/>
                     <a:p>
-                      <a:pPr algn="ctr" indent="0" marL="0">
+                      <a:pPr marL="0" indent="0" algn="ctr">
                         <a:buNone/>
                       </a:pPr>
                       <a:r>
@@ -11631,7 +11522,7 @@
                       </a:endParaRPr>
                     </a:p>
                   </a:txBody>
-                  <a:tcPr marL="91440" marR="91440" marT="45720" marB="45720" anchor="ctr">
+                  <a:tcPr anchor="ctr">
                     <a:lnL w="38100" cap="flat" cmpd="sng" algn="ctr">
                       <a:solidFill>
                         <a:srgbClr val="FFFFFF"/>
@@ -11678,7 +11569,7 @@
                     <a:bodyPr/>
                     <a:lstStyle/>
                     <a:p>
-                      <a:pPr algn="ctr" indent="0" marL="0">
+                      <a:pPr marL="0" indent="0" algn="ctr">
                         <a:buNone/>
                       </a:pPr>
                       <a:r>
@@ -11699,7 +11590,7 @@
                       </a:endParaRPr>
                     </a:p>
                   </a:txBody>
-                  <a:tcPr marL="91440" marR="91440" marT="45720" marB="45720" anchor="ctr">
+                  <a:tcPr anchor="ctr">
                     <a:lnL w="38100" cap="flat" cmpd="sng" algn="ctr">
                       <a:solidFill>
                         <a:srgbClr val="FFFFFF"/>
@@ -11741,6 +11632,11 @@
                     </a:solidFill>
                   </a:tcPr>
                 </a:tc>
+                <a:extLst>
+                  <a:ext uri="{0D108BD9-81ED-4DB2-BD59-A6C34878D82A}">
+                    <a16:rowId xmlns:a16="http://schemas.microsoft.com/office/drawing/2014/main" val="10002"/>
+                  </a:ext>
+                </a:extLst>
               </a:tr>
               <a:tr h="502920">
                 <a:tc>
@@ -11748,7 +11644,7 @@
                     <a:bodyPr/>
                     <a:lstStyle/>
                     <a:p>
-                      <a:pPr algn="ctr" indent="0" marL="0">
+                      <a:pPr marL="0" indent="0" algn="ctr">
                         <a:buNone/>
                       </a:pPr>
                       <a:r>
@@ -11769,7 +11665,7 @@
                       </a:endParaRPr>
                     </a:p>
                   </a:txBody>
-                  <a:tcPr marL="91440" marR="91440" marT="45720" marB="45720" anchor="ctr">
+                  <a:tcPr anchor="ctr">
                     <a:lnL w="38100" cap="flat" cmpd="sng" algn="ctr">
                       <a:solidFill>
                         <a:srgbClr val="FFFFFF"/>
@@ -11816,7 +11712,7 @@
                     <a:bodyPr/>
                     <a:lstStyle/>
                     <a:p>
-                      <a:pPr algn="ctr" indent="0" marL="0">
+                      <a:pPr marL="0" indent="0" algn="ctr">
                         <a:buNone/>
                       </a:pPr>
                       <a:r>
@@ -11837,7 +11733,7 @@
                       </a:endParaRPr>
                     </a:p>
                   </a:txBody>
-                  <a:tcPr marL="91440" marR="91440" marT="45720" marB="45720" anchor="ctr">
+                  <a:tcPr anchor="ctr">
                     <a:lnL w="38100" cap="flat" cmpd="sng" algn="ctr">
                       <a:solidFill>
                         <a:srgbClr val="FFFFFF"/>
@@ -11884,7 +11780,7 @@
                     <a:bodyPr/>
                     <a:lstStyle/>
                     <a:p>
-                      <a:pPr algn="ctr" indent="0" marL="0">
+                      <a:pPr marL="0" indent="0" algn="ctr">
                         <a:buNone/>
                       </a:pPr>
                       <a:r>
@@ -11905,7 +11801,7 @@
                       </a:endParaRPr>
                     </a:p>
                   </a:txBody>
-                  <a:tcPr marL="91440" marR="91440" marT="45720" marB="45720" anchor="ctr">
+                  <a:tcPr anchor="ctr">
                     <a:lnL w="38100" cap="flat" cmpd="sng" algn="ctr">
                       <a:solidFill>
                         <a:srgbClr val="FFFFFF"/>
@@ -11947,6 +11843,11 @@
                     </a:solidFill>
                   </a:tcPr>
                 </a:tc>
+                <a:extLst>
+                  <a:ext uri="{0D108BD9-81ED-4DB2-BD59-A6C34878D82A}">
+                    <a16:rowId xmlns:a16="http://schemas.microsoft.com/office/drawing/2014/main" val="10003"/>
+                  </a:ext>
+                </a:extLst>
               </a:tr>
               <a:tr h="502920">
                 <a:tc>
@@ -11954,7 +11855,7 @@
                     <a:bodyPr/>
                     <a:lstStyle/>
                     <a:p>
-                      <a:pPr algn="ctr" indent="0" marL="0">
+                      <a:pPr marL="0" indent="0" algn="ctr">
                         <a:buNone/>
                       </a:pPr>
                       <a:r>
@@ -11975,7 +11876,7 @@
                       </a:endParaRPr>
                     </a:p>
                   </a:txBody>
-                  <a:tcPr marL="91440" marR="91440" marT="45720" marB="45720" anchor="ctr">
+                  <a:tcPr anchor="ctr">
                     <a:lnL w="38100" cap="flat" cmpd="sng" algn="ctr">
                       <a:solidFill>
                         <a:srgbClr val="FFFFFF"/>
@@ -12022,7 +11923,7 @@
                     <a:bodyPr/>
                     <a:lstStyle/>
                     <a:p>
-                      <a:pPr algn="ctr" indent="0" marL="0">
+                      <a:pPr marL="0" indent="0" algn="ctr">
                         <a:buNone/>
                       </a:pPr>
                       <a:r>
@@ -12043,7 +11944,7 @@
                       </a:endParaRPr>
                     </a:p>
                   </a:txBody>
-                  <a:tcPr marL="91440" marR="91440" marT="45720" marB="45720" anchor="ctr">
+                  <a:tcPr anchor="ctr">
                     <a:lnL w="38100" cap="flat" cmpd="sng" algn="ctr">
                       <a:solidFill>
                         <a:srgbClr val="FFFFFF"/>
@@ -12090,7 +11991,7 @@
                     <a:bodyPr/>
                     <a:lstStyle/>
                     <a:p>
-                      <a:pPr algn="ctr" indent="0" marL="0">
+                      <a:pPr marL="0" indent="0" algn="ctr">
                         <a:buNone/>
                       </a:pPr>
                       <a:r>
@@ -12111,7 +12012,7 @@
                       </a:endParaRPr>
                     </a:p>
                   </a:txBody>
-                  <a:tcPr marL="91440" marR="91440" marT="45720" marB="45720" anchor="ctr">
+                  <a:tcPr anchor="ctr">
                     <a:lnL w="38100" cap="flat" cmpd="sng" algn="ctr">
                       <a:solidFill>
                         <a:srgbClr val="FFFFFF"/>
@@ -12153,6 +12054,11 @@
                     </a:solidFill>
                   </a:tcPr>
                 </a:tc>
+                <a:extLst>
+                  <a:ext uri="{0D108BD9-81ED-4DB2-BD59-A6C34878D82A}">
+                    <a16:rowId xmlns:a16="http://schemas.microsoft.com/office/drawing/2014/main" val="10004"/>
+                  </a:ext>
+                </a:extLst>
               </a:tr>
             </a:tbl>
           </a:graphicData>
@@ -12201,7 +12107,7 @@
           <a:bodyPr wrap="square" lIns="0" tIns="0" rIns="0" bIns="0" rtlCol="0" anchor="ctr"/>
           <a:lstStyle/>
           <a:p>
-            <a:pPr algn="ctr" indent="0" marL="0">
+            <a:pPr marL="0" indent="0" algn="ctr">
               <a:buNone/>
             </a:pPr>
             <a:r>
@@ -12215,9 +12121,6 @@
               </a:rPr>
               <a:t>SOP: </a:t>
             </a:r>
-            <a:pPr algn="ctr" indent="0" marL="0">
-              <a:buNone/>
-            </a:pPr>
             <a:r>
               <a:rPr lang="en-US" sz="2200" b="1" dirty="0">
                 <a:solidFill>
@@ -12229,9 +12132,6 @@
               </a:rPr>
               <a:t>x̄y + xȳ</a:t>
             </a:r>
-            <a:pPr algn="ctr" indent="0" marL="0">
-              <a:buNone/>
-            </a:pPr>
             <a:r>
               <a:rPr lang="en-US" sz="2200" dirty="0">
                 <a:solidFill>
@@ -12243,9 +12143,6 @@
               </a:rPr>
               <a:t>     →     </a:t>
             </a:r>
-            <a:pPr algn="ctr" indent="0" marL="0">
-              <a:buNone/>
-            </a:pPr>
             <a:r>
               <a:rPr lang="en-US" sz="2200" b="1" dirty="0">
                 <a:solidFill>
@@ -12282,7 +12179,7 @@
           <a:bodyPr wrap="square" lIns="0" tIns="0" rIns="0" bIns="0" rtlCol="0" anchor="ctr"/>
           <a:lstStyle/>
           <a:p>
-            <a:pPr algn="r" indent="0" marL="0">
+            <a:pPr marL="0" indent="0" algn="r">
               <a:buNone/>
             </a:pPr>
             <a:r>
@@ -12316,6 +12213,7 @@
         <a:solidFill>
           <a:srgbClr val="FFFFFF"/>
         </a:solidFill>
+        <a:effectLst/>
       </p:bgPr>
     </p:bg>
     <p:spTree>
@@ -12354,14 +12252,14 @@
       </p:sp>
       <p:pic>
         <p:nvPicPr>
-          <p:cNvPr id="3" name="Image 0" descr="preencoded.png">    </p:cNvPr>
+          <p:cNvPr id="3" name="Image 0" descr="preencoded.png"/>
           <p:cNvPicPr>
             <a:picLocks noChangeAspect="1"/>
           </p:cNvPicPr>
           <p:nvPr/>
         </p:nvPicPr>
         <p:blipFill>
-          <a:blip r:embed="rId1"/>
+          <a:blip r:embed="rId3"/>
           <a:stretch>
             <a:fillRect/>
           </a:stretch>
@@ -12397,11 +12295,11 @@
           <a:bodyPr wrap="square" lIns="0" tIns="0" rIns="0" bIns="0" rtlCol="0" anchor="ctr"/>
           <a:lstStyle/>
           <a:p>
-            <a:pPr indent="0" marL="0">
+            <a:pPr marL="0" indent="0">
               <a:buNone/>
             </a:pPr>
             <a:r>
-              <a:rPr lang="en-US" sz="1200" b="1" spc="150" kern="0" dirty="0">
+              <a:rPr lang="en-US" sz="1200" b="1" kern="0" spc="150" dirty="0">
                 <a:solidFill>
                   <a:srgbClr val="6C4BC1"/>
                 </a:solidFill>
@@ -12436,7 +12334,7 @@
           <a:bodyPr wrap="square" lIns="0" tIns="0" rIns="0" bIns="0" rtlCol="0" anchor="ctr"/>
           <a:lstStyle/>
           <a:p>
-            <a:pPr indent="0" marL="0">
+            <a:pPr marL="0" indent="0">
               <a:buNone/>
             </a:pPr>
             <a:r>
@@ -12475,7 +12373,7 @@
           <a:bodyPr wrap="square" lIns="0" tIns="0" rIns="0" bIns="0" rtlCol="0" anchor="ctr"/>
           <a:lstStyle/>
           <a:p>
-            <a:pPr indent="0" marL="0">
+            <a:pPr marL="0" indent="0">
               <a:lnSpc>
                 <a:spcPts val="1900"/>
               </a:lnSpc>
@@ -12519,9 +12417,27 @@
             <a:tbl>
               <a:tblPr/>
               <a:tblGrid>
-                <a:gridCol w="1280160"/>
-                <a:gridCol w="1645920"/>
-                <a:gridCol w="1645920"/>
+                <a:gridCol w="1280160">
+                  <a:extLst>
+                    <a:ext uri="{9D8B030D-6E8A-4147-A177-3AD203B41FA5}">
+                      <a16:colId xmlns:a16="http://schemas.microsoft.com/office/drawing/2014/main" val="20000"/>
+                    </a:ext>
+                  </a:extLst>
+                </a:gridCol>
+                <a:gridCol w="1645920">
+                  <a:extLst>
+                    <a:ext uri="{9D8B030D-6E8A-4147-A177-3AD203B41FA5}">
+                      <a16:colId xmlns:a16="http://schemas.microsoft.com/office/drawing/2014/main" val="20001"/>
+                    </a:ext>
+                  </a:extLst>
+                </a:gridCol>
+                <a:gridCol w="1645920">
+                  <a:extLst>
+                    <a:ext uri="{9D8B030D-6E8A-4147-A177-3AD203B41FA5}">
+                      <a16:colId xmlns:a16="http://schemas.microsoft.com/office/drawing/2014/main" val="20002"/>
+                    </a:ext>
+                  </a:extLst>
+                </a:gridCol>
               </a:tblGrid>
               <a:tr h="457200">
                 <a:tc>
@@ -12529,7 +12445,7 @@
                     <a:bodyPr/>
                     <a:lstStyle/>
                     <a:p>
-                      <a:pPr algn="ctr" indent="0" marL="0">
+                      <a:pPr marL="0" indent="0" algn="ctr">
                         <a:buNone/>
                       </a:pPr>
                       <a:r>
@@ -12550,7 +12466,7 @@
                       </a:endParaRPr>
                     </a:p>
                   </a:txBody>
-                  <a:tcPr marL="91440" marR="91440" marT="45720" marB="45720" anchor="ctr">
+                  <a:tcPr anchor="ctr">
                     <a:lnL w="38100" cap="flat" cmpd="sng" algn="ctr">
                       <a:solidFill>
                         <a:srgbClr val="FFFFFF"/>
@@ -12597,7 +12513,7 @@
                     <a:bodyPr/>
                     <a:lstStyle/>
                     <a:p>
-                      <a:pPr algn="ctr" indent="0" marL="0">
+                      <a:pPr marL="0" indent="0" algn="ctr">
                         <a:buNone/>
                       </a:pPr>
                       <a:r>
@@ -12618,7 +12534,7 @@
                       </a:endParaRPr>
                     </a:p>
                   </a:txBody>
-                  <a:tcPr marL="91440" marR="91440" marT="45720" marB="45720" anchor="ctr">
+                  <a:tcPr anchor="ctr">
                     <a:lnL w="38100" cap="flat" cmpd="sng" algn="ctr">
                       <a:solidFill>
                         <a:srgbClr val="FFFFFF"/>
@@ -12665,7 +12581,7 @@
                     <a:bodyPr/>
                     <a:lstStyle/>
                     <a:p>
-                      <a:pPr algn="ctr" indent="0" marL="0">
+                      <a:pPr marL="0" indent="0" algn="ctr">
                         <a:buNone/>
                       </a:pPr>
                       <a:r>
@@ -12686,7 +12602,7 @@
                       </a:endParaRPr>
                     </a:p>
                   </a:txBody>
-                  <a:tcPr marL="91440" marR="91440" marT="45720" marB="45720" anchor="ctr">
+                  <a:tcPr anchor="ctr">
                     <a:lnL w="38100" cap="flat" cmpd="sng" algn="ctr">
                       <a:solidFill>
                         <a:srgbClr val="FFFFFF"/>
@@ -12728,6 +12644,11 @@
                     </a:solidFill>
                   </a:tcPr>
                 </a:tc>
+                <a:extLst>
+                  <a:ext uri="{0D108BD9-81ED-4DB2-BD59-A6C34878D82A}">
+                    <a16:rowId xmlns:a16="http://schemas.microsoft.com/office/drawing/2014/main" val="10000"/>
+                  </a:ext>
+                </a:extLst>
               </a:tr>
               <a:tr h="1051560">
                 <a:tc>
@@ -12735,7 +12656,7 @@
                     <a:bodyPr/>
                     <a:lstStyle/>
                     <a:p>
-                      <a:pPr algn="ctr" indent="0" marL="0">
+                      <a:pPr marL="0" indent="0" algn="ctr">
                         <a:buNone/>
                       </a:pPr>
                       <a:r>
@@ -12756,7 +12677,7 @@
                       </a:endParaRPr>
                     </a:p>
                   </a:txBody>
-                  <a:tcPr marL="91440" marR="91440" marT="45720" marB="45720" anchor="ctr">
+                  <a:tcPr anchor="ctr">
                     <a:lnL w="38100" cap="flat" cmpd="sng" algn="ctr">
                       <a:solidFill>
                         <a:srgbClr val="FFFFFF"/>
@@ -12803,7 +12724,7 @@
                     <a:bodyPr/>
                     <a:lstStyle/>
                     <a:p>
-                      <a:pPr algn="ctr" indent="0" marL="0">
+                      <a:pPr marL="0" indent="0" algn="ctr">
                         <a:buNone/>
                       </a:pPr>
                       <a:r>
@@ -12824,7 +12745,7 @@
                       </a:endParaRPr>
                     </a:p>
                   </a:txBody>
-                  <a:tcPr marL="91440" marR="91440" marT="45720" marB="45720" anchor="ctr">
+                  <a:tcPr anchor="ctr">
                     <a:lnL w="38100" cap="flat" cmpd="sng" algn="ctr">
                       <a:solidFill>
                         <a:srgbClr val="FFFFFF"/>
@@ -12871,7 +12792,7 @@
                     <a:bodyPr/>
                     <a:lstStyle/>
                     <a:p>
-                      <a:pPr algn="ctr" indent="0" marL="0">
+                      <a:pPr marL="0" indent="0" algn="ctr">
                         <a:buNone/>
                       </a:pPr>
                       <a:r>
@@ -12892,7 +12813,7 @@
                       </a:endParaRPr>
                     </a:p>
                   </a:txBody>
-                  <a:tcPr marL="91440" marR="91440" marT="45720" marB="45720" anchor="ctr">
+                  <a:tcPr anchor="ctr">
                     <a:lnL w="38100" cap="flat" cmpd="sng" algn="ctr">
                       <a:solidFill>
                         <a:srgbClr val="FFFFFF"/>
@@ -12934,6 +12855,11 @@
                     </a:solidFill>
                   </a:tcPr>
                 </a:tc>
+                <a:extLst>
+                  <a:ext uri="{0D108BD9-81ED-4DB2-BD59-A6C34878D82A}">
+                    <a16:rowId xmlns:a16="http://schemas.microsoft.com/office/drawing/2014/main" val="10001"/>
+                  </a:ext>
+                </a:extLst>
               </a:tr>
               <a:tr h="1051560">
                 <a:tc>
@@ -12941,7 +12867,7 @@
                     <a:bodyPr/>
                     <a:lstStyle/>
                     <a:p>
-                      <a:pPr algn="ctr" indent="0" marL="0">
+                      <a:pPr marL="0" indent="0" algn="ctr">
                         <a:buNone/>
                       </a:pPr>
                       <a:r>
@@ -12962,7 +12888,7 @@
                       </a:endParaRPr>
                     </a:p>
                   </a:txBody>
-                  <a:tcPr marL="91440" marR="91440" marT="45720" marB="45720" anchor="ctr">
+                  <a:tcPr anchor="ctr">
                     <a:lnL w="38100" cap="flat" cmpd="sng" algn="ctr">
                       <a:solidFill>
                         <a:srgbClr val="FFFFFF"/>
@@ -13009,7 +12935,7 @@
                     <a:bodyPr/>
                     <a:lstStyle/>
                     <a:p>
-                      <a:pPr algn="ctr" indent="0" marL="0">
+                      <a:pPr marL="0" indent="0" algn="ctr">
                         <a:buNone/>
                       </a:pPr>
                       <a:r>
@@ -13030,7 +12956,7 @@
                       </a:endParaRPr>
                     </a:p>
                   </a:txBody>
-                  <a:tcPr marL="91440" marR="91440" marT="45720" marB="45720" anchor="ctr">
+                  <a:tcPr anchor="ctr">
                     <a:lnL w="38100" cap="flat" cmpd="sng" algn="ctr">
                       <a:solidFill>
                         <a:srgbClr val="FFFFFF"/>
@@ -13077,7 +13003,7 @@
                     <a:bodyPr/>
                     <a:lstStyle/>
                     <a:p>
-                      <a:pPr algn="ctr" indent="0" marL="0">
+                      <a:pPr marL="0" indent="0" algn="ctr">
                         <a:buNone/>
                       </a:pPr>
                       <a:r>
@@ -13098,7 +13024,7 @@
                       </a:endParaRPr>
                     </a:p>
                   </a:txBody>
-                  <a:tcPr marL="91440" marR="91440" marT="45720" marB="45720" anchor="ctr">
+                  <a:tcPr anchor="ctr">
                     <a:lnL w="38100" cap="flat" cmpd="sng" algn="ctr">
                       <a:solidFill>
                         <a:srgbClr val="FFFFFF"/>
@@ -13140,6 +13066,11 @@
                     </a:solidFill>
                   </a:tcPr>
                 </a:tc>
+                <a:extLst>
+                  <a:ext uri="{0D108BD9-81ED-4DB2-BD59-A6C34878D82A}">
+                    <a16:rowId xmlns:a16="http://schemas.microsoft.com/office/drawing/2014/main" val="10002"/>
+                  </a:ext>
+                </a:extLst>
               </a:tr>
             </a:tbl>
           </a:graphicData>
@@ -13166,7 +13097,7 @@
           <a:bodyPr wrap="square" lIns="0" tIns="0" rIns="0" bIns="0" rtlCol="0" anchor="ctr"/>
           <a:lstStyle/>
           <a:p>
-            <a:pPr algn="ctr" indent="0" marL="0">
+            <a:pPr marL="0" indent="0" algn="ctr">
               <a:buNone/>
             </a:pPr>
             <a:r>
@@ -13205,7 +13136,7 @@
           <a:bodyPr wrap="square" lIns="0" tIns="0" rIns="0" bIns="0" rtlCol="0" anchor="ctr"/>
           <a:lstStyle/>
           <a:p>
-            <a:pPr algn="r" indent="0" marL="0">
+            <a:pPr marL="0" indent="0" algn="r">
               <a:buNone/>
             </a:pPr>
             <a:r>
@@ -13239,6 +13170,7 @@
         <a:solidFill>
           <a:srgbClr val="FFFFFF"/>
         </a:solidFill>
+        <a:effectLst/>
       </p:bgPr>
     </p:bg>
     <p:spTree>
@@ -13277,14 +13209,14 @@
       </p:sp>
       <p:pic>
         <p:nvPicPr>
-          <p:cNvPr id="3" name="Image 0" descr="preencoded.png">    </p:cNvPr>
+          <p:cNvPr id="3" name="Image 0" descr="preencoded.png"/>
           <p:cNvPicPr>
             <a:picLocks noChangeAspect="1"/>
           </p:cNvPicPr>
           <p:nvPr/>
         </p:nvPicPr>
         <p:blipFill>
-          <a:blip r:embed="rId1"/>
+          <a:blip r:embed="rId3"/>
           <a:stretch>
             <a:fillRect/>
           </a:stretch>
@@ -13320,11 +13252,11 @@
           <a:bodyPr wrap="square" lIns="0" tIns="0" rIns="0" bIns="0" rtlCol="0" anchor="ctr"/>
           <a:lstStyle/>
           <a:p>
-            <a:pPr indent="0" marL="0">
+            <a:pPr marL="0" indent="0">
               <a:buNone/>
             </a:pPr>
             <a:r>
-              <a:rPr lang="en-US" sz="1200" b="1" spc="150" kern="0" dirty="0">
+              <a:rPr lang="en-US" sz="1200" b="1" kern="0" spc="150" dirty="0">
                 <a:solidFill>
                   <a:srgbClr val="3EBD59"/>
                 </a:solidFill>
@@ -13359,7 +13291,7 @@
           <a:bodyPr wrap="square" lIns="0" tIns="0" rIns="0" bIns="0" rtlCol="0" anchor="ctr"/>
           <a:lstStyle/>
           <a:p>
-            <a:pPr indent="0" marL="0">
+            <a:pPr marL="0" indent="0">
               <a:buNone/>
             </a:pPr>
             <a:r>
@@ -13400,9 +13332,27 @@
             <a:tbl>
               <a:tblPr/>
               <a:tblGrid>
-                <a:gridCol w="1280160"/>
-                <a:gridCol w="1645920"/>
-                <a:gridCol w="1645920"/>
+                <a:gridCol w="1280160">
+                  <a:extLst>
+                    <a:ext uri="{9D8B030D-6E8A-4147-A177-3AD203B41FA5}">
+                      <a16:colId xmlns:a16="http://schemas.microsoft.com/office/drawing/2014/main" val="20000"/>
+                    </a:ext>
+                  </a:extLst>
+                </a:gridCol>
+                <a:gridCol w="1645920">
+                  <a:extLst>
+                    <a:ext uri="{9D8B030D-6E8A-4147-A177-3AD203B41FA5}">
+                      <a16:colId xmlns:a16="http://schemas.microsoft.com/office/drawing/2014/main" val="20001"/>
+                    </a:ext>
+                  </a:extLst>
+                </a:gridCol>
+                <a:gridCol w="1645920">
+                  <a:extLst>
+                    <a:ext uri="{9D8B030D-6E8A-4147-A177-3AD203B41FA5}">
+                      <a16:colId xmlns:a16="http://schemas.microsoft.com/office/drawing/2014/main" val="20002"/>
+                    </a:ext>
+                  </a:extLst>
+                </a:gridCol>
               </a:tblGrid>
               <a:tr h="457200">
                 <a:tc>
@@ -13410,7 +13360,7 @@
                     <a:bodyPr/>
                     <a:lstStyle/>
                     <a:p>
-                      <a:pPr algn="ctr" indent="0" marL="0">
+                      <a:pPr marL="0" indent="0" algn="ctr">
                         <a:buNone/>
                       </a:pPr>
                       <a:r>
@@ -13431,7 +13381,7 @@
                       </a:endParaRPr>
                     </a:p>
                   </a:txBody>
-                  <a:tcPr marL="91440" marR="91440" marT="45720" marB="45720" anchor="ctr">
+                  <a:tcPr anchor="ctr">
                     <a:lnL w="38100" cap="flat" cmpd="sng" algn="ctr">
                       <a:solidFill>
                         <a:srgbClr val="FFFFFF"/>
@@ -13478,7 +13428,7 @@
                     <a:bodyPr/>
                     <a:lstStyle/>
                     <a:p>
-                      <a:pPr algn="ctr" indent="0" marL="0">
+                      <a:pPr marL="0" indent="0" algn="ctr">
                         <a:buNone/>
                       </a:pPr>
                       <a:r>
@@ -13499,7 +13449,7 @@
                       </a:endParaRPr>
                     </a:p>
                   </a:txBody>
-                  <a:tcPr marL="91440" marR="91440" marT="45720" marB="45720" anchor="ctr">
+                  <a:tcPr anchor="ctr">
                     <a:lnL w="38100" cap="flat" cmpd="sng" algn="ctr">
                       <a:solidFill>
                         <a:srgbClr val="FFFFFF"/>
@@ -13546,7 +13496,7 @@
                     <a:bodyPr/>
                     <a:lstStyle/>
                     <a:p>
-                      <a:pPr algn="ctr" indent="0" marL="0">
+                      <a:pPr marL="0" indent="0" algn="ctr">
                         <a:buNone/>
                       </a:pPr>
                       <a:r>
@@ -13567,7 +13517,7 @@
                       </a:endParaRPr>
                     </a:p>
                   </a:txBody>
-                  <a:tcPr marL="91440" marR="91440" marT="45720" marB="45720" anchor="ctr">
+                  <a:tcPr anchor="ctr">
                     <a:lnL w="38100" cap="flat" cmpd="sng" algn="ctr">
                       <a:solidFill>
                         <a:srgbClr val="FFFFFF"/>
@@ -13609,6 +13559,11 @@
                     </a:solidFill>
                   </a:tcPr>
                 </a:tc>
+                <a:extLst>
+                  <a:ext uri="{0D108BD9-81ED-4DB2-BD59-A6C34878D82A}">
+                    <a16:rowId xmlns:a16="http://schemas.microsoft.com/office/drawing/2014/main" val="10000"/>
+                  </a:ext>
+                </a:extLst>
               </a:tr>
               <a:tr h="1005840">
                 <a:tc>
@@ -13616,7 +13571,7 @@
                     <a:bodyPr/>
                     <a:lstStyle/>
                     <a:p>
-                      <a:pPr algn="ctr" indent="0" marL="0">
+                      <a:pPr marL="0" indent="0" algn="ctr">
                         <a:buNone/>
                       </a:pPr>
                       <a:r>
@@ -13637,7 +13592,7 @@
                       </a:endParaRPr>
                     </a:p>
                   </a:txBody>
-                  <a:tcPr marL="91440" marR="91440" marT="45720" marB="45720" anchor="ctr">
+                  <a:tcPr anchor="ctr">
                     <a:lnL w="38100" cap="flat" cmpd="sng" algn="ctr">
                       <a:solidFill>
                         <a:srgbClr val="FFFFFF"/>
@@ -13684,7 +13639,7 @@
                     <a:bodyPr/>
                     <a:lstStyle/>
                     <a:p>
-                      <a:pPr algn="ctr" indent="0" marL="0">
+                      <a:pPr marL="0" indent="0" algn="ctr">
                         <a:buNone/>
                       </a:pPr>
                       <a:r>
@@ -13705,7 +13660,7 @@
                       </a:endParaRPr>
                     </a:p>
                   </a:txBody>
-                  <a:tcPr marL="91440" marR="91440" marT="45720" marB="45720" anchor="ctr">
+                  <a:tcPr anchor="ctr">
                     <a:lnL w="38100" cap="flat" cmpd="sng" algn="ctr">
                       <a:solidFill>
                         <a:srgbClr val="FFFFFF"/>
@@ -13752,7 +13707,7 @@
                     <a:bodyPr/>
                     <a:lstStyle/>
                     <a:p>
-                      <a:pPr algn="ctr" indent="0" marL="0">
+                      <a:pPr marL="0" indent="0" algn="ctr">
                         <a:buNone/>
                       </a:pPr>
                       <a:r>
@@ -13773,7 +13728,7 @@
                       </a:endParaRPr>
                     </a:p>
                   </a:txBody>
-                  <a:tcPr marL="91440" marR="91440" marT="45720" marB="45720" anchor="ctr">
+                  <a:tcPr anchor="ctr">
                     <a:lnL w="38100" cap="flat" cmpd="sng" algn="ctr">
                       <a:solidFill>
                         <a:srgbClr val="FFFFFF"/>
@@ -13815,6 +13770,11 @@
                     </a:solidFill>
                   </a:tcPr>
                 </a:tc>
+                <a:extLst>
+                  <a:ext uri="{0D108BD9-81ED-4DB2-BD59-A6C34878D82A}">
+                    <a16:rowId xmlns:a16="http://schemas.microsoft.com/office/drawing/2014/main" val="10001"/>
+                  </a:ext>
+                </a:extLst>
               </a:tr>
               <a:tr h="1005840">
                 <a:tc>
@@ -13822,7 +13782,7 @@
                     <a:bodyPr/>
                     <a:lstStyle/>
                     <a:p>
-                      <a:pPr algn="ctr" indent="0" marL="0">
+                      <a:pPr marL="0" indent="0" algn="ctr">
                         <a:buNone/>
                       </a:pPr>
                       <a:r>
@@ -13843,7 +13803,7 @@
                       </a:endParaRPr>
                     </a:p>
                   </a:txBody>
-                  <a:tcPr marL="91440" marR="91440" marT="45720" marB="45720" anchor="ctr">
+                  <a:tcPr anchor="ctr">
                     <a:lnL w="38100" cap="flat" cmpd="sng" algn="ctr">
                       <a:solidFill>
                         <a:srgbClr val="FFFFFF"/>
@@ -13890,7 +13850,7 @@
                     <a:bodyPr/>
                     <a:lstStyle/>
                     <a:p>
-                      <a:pPr algn="ctr" indent="0" marL="0">
+                      <a:pPr marL="0" indent="0" algn="ctr">
                         <a:buNone/>
                       </a:pPr>
                       <a:r>
@@ -13911,7 +13871,7 @@
                       </a:endParaRPr>
                     </a:p>
                   </a:txBody>
-                  <a:tcPr marL="91440" marR="91440" marT="45720" marB="45720" anchor="ctr">
+                  <a:tcPr anchor="ctr">
                     <a:lnL w="38100" cap="flat" cmpd="sng" algn="ctr">
                       <a:solidFill>
                         <a:srgbClr val="FFFFFF"/>
@@ -13958,7 +13918,7 @@
                     <a:bodyPr/>
                     <a:lstStyle/>
                     <a:p>
-                      <a:pPr algn="ctr" indent="0" marL="0">
+                      <a:pPr marL="0" indent="0" algn="ctr">
                         <a:buNone/>
                       </a:pPr>
                       <a:r>
@@ -13979,7 +13939,7 @@
                       </a:endParaRPr>
                     </a:p>
                   </a:txBody>
-                  <a:tcPr marL="91440" marR="91440" marT="45720" marB="45720" anchor="ctr">
+                  <a:tcPr anchor="ctr">
                     <a:lnL w="38100" cap="flat" cmpd="sng" algn="ctr">
                       <a:solidFill>
                         <a:srgbClr val="FFFFFF"/>
@@ -14021,6 +13981,11 @@
                     </a:solidFill>
                   </a:tcPr>
                 </a:tc>
+                <a:extLst>
+                  <a:ext uri="{0D108BD9-81ED-4DB2-BD59-A6C34878D82A}">
+                    <a16:rowId xmlns:a16="http://schemas.microsoft.com/office/drawing/2014/main" val="10002"/>
+                  </a:ext>
+                </a:extLst>
               </a:tr>
             </a:tbl>
           </a:graphicData>
@@ -14095,7 +14060,7 @@
           <a:bodyPr wrap="square" lIns="0" tIns="0" rIns="0" bIns="0" rtlCol="0" anchor="ctr"/>
           <a:lstStyle/>
           <a:p>
-            <a:pPr algn="ctr" indent="0" marL="0">
+            <a:pPr marL="0" indent="0" algn="ctr">
               <a:buNone/>
             </a:pPr>
             <a:r>
@@ -14109,9 +14074,6 @@
               </a:rPr>
               <a:t>■ </a:t>
             </a:r>
-            <a:pPr algn="ctr" indent="0" marL="0">
-              <a:buNone/>
-            </a:pPr>
             <a:r>
               <a:rPr lang="en-US" sz="1350" dirty="0">
                 <a:solidFill>
@@ -14123,9 +14085,6 @@
               </a:rPr>
               <a:t>linha x=0 → x̄     </a:t>
             </a:r>
-            <a:pPr algn="ctr" indent="0" marL="0">
-              <a:buNone/>
-            </a:pPr>
             <a:r>
               <a:rPr lang="en-US" sz="1350" b="1" dirty="0">
                 <a:solidFill>
@@ -14137,9 +14096,6 @@
               </a:rPr>
               <a:t>■ </a:t>
             </a:r>
-            <a:pPr algn="ctr" indent="0" marL="0">
-              <a:buNone/>
-            </a:pPr>
             <a:r>
               <a:rPr lang="en-US" sz="1350" dirty="0">
                 <a:solidFill>
@@ -14198,7 +14154,7 @@
           <a:bodyPr wrap="square" lIns="0" tIns="0" rIns="0" bIns="0" rtlCol="0" anchor="ctr"/>
           <a:lstStyle/>
           <a:p>
-            <a:pPr algn="ctr" indent="0" marL="0">
+            <a:pPr marL="0" indent="0" algn="ctr">
               <a:buNone/>
             </a:pPr>
             <a:r>
@@ -14237,7 +14193,7 @@
           <a:bodyPr wrap="square" lIns="0" tIns="0" rIns="0" bIns="0" rtlCol="0" anchor="ctr"/>
           <a:lstStyle/>
           <a:p>
-            <a:pPr algn="r" indent="0" marL="0">
+            <a:pPr marL="0" indent="0" algn="r">
               <a:buNone/>
             </a:pPr>
             <a:r>
@@ -14271,6 +14227,7 @@
         <a:solidFill>
           <a:srgbClr val="FFFFFF"/>
         </a:solidFill>
+        <a:effectLst/>
       </p:bgPr>
     </p:bg>
     <p:spTree>
@@ -14309,14 +14266,14 @@
       </p:sp>
       <p:pic>
         <p:nvPicPr>
-          <p:cNvPr id="3" name="Image 0" descr="preencoded.png">    </p:cNvPr>
+          <p:cNvPr id="3" name="Image 0" descr="preencoded.png"/>
           <p:cNvPicPr>
             <a:picLocks noChangeAspect="1"/>
           </p:cNvPicPr>
           <p:nvPr/>
         </p:nvPicPr>
         <p:blipFill>
-          <a:blip r:embed="rId1"/>
+          <a:blip r:embed="rId3"/>
           <a:stretch>
             <a:fillRect/>
           </a:stretch>
@@ -14352,11 +14309,11 @@
           <a:bodyPr wrap="square" lIns="0" tIns="0" rIns="0" bIns="0" rtlCol="0" anchor="ctr"/>
           <a:lstStyle/>
           <a:p>
-            <a:pPr indent="0" marL="0">
+            <a:pPr marL="0" indent="0">
               <a:buNone/>
             </a:pPr>
             <a:r>
-              <a:rPr lang="en-US" sz="1200" b="1" spc="150" kern="0" dirty="0">
+              <a:rPr lang="en-US" sz="1200" b="1" kern="0" spc="150" dirty="0">
                 <a:solidFill>
                   <a:srgbClr val="6C4BC1"/>
                 </a:solidFill>
@@ -14391,7 +14348,7 @@
           <a:bodyPr wrap="square" lIns="0" tIns="0" rIns="0" bIns="0" rtlCol="0" anchor="ctr"/>
           <a:lstStyle/>
           <a:p>
-            <a:pPr indent="0" marL="0">
+            <a:pPr marL="0" indent="0">
               <a:buNone/>
             </a:pPr>
             <a:r>
@@ -14430,7 +14387,7 @@
           <a:bodyPr wrap="square" lIns="0" tIns="0" rIns="0" bIns="0" rtlCol="0" anchor="ctr"/>
           <a:lstStyle/>
           <a:p>
-            <a:pPr indent="0" marL="0">
+            <a:pPr marL="0" indent="0">
               <a:lnSpc>
                 <a:spcPts val="1800"/>
               </a:lnSpc>
@@ -14474,11 +14431,41 @@
             <a:tbl>
               <a:tblPr/>
               <a:tblGrid>
-                <a:gridCol w="1188720"/>
-                <a:gridCol w="1371600"/>
-                <a:gridCol w="1371600"/>
-                <a:gridCol w="1371600"/>
-                <a:gridCol w="1371600"/>
+                <a:gridCol w="1188720">
+                  <a:extLst>
+                    <a:ext uri="{9D8B030D-6E8A-4147-A177-3AD203B41FA5}">
+                      <a16:colId xmlns:a16="http://schemas.microsoft.com/office/drawing/2014/main" val="20000"/>
+                    </a:ext>
+                  </a:extLst>
+                </a:gridCol>
+                <a:gridCol w="1371600">
+                  <a:extLst>
+                    <a:ext uri="{9D8B030D-6E8A-4147-A177-3AD203B41FA5}">
+                      <a16:colId xmlns:a16="http://schemas.microsoft.com/office/drawing/2014/main" val="20001"/>
+                    </a:ext>
+                  </a:extLst>
+                </a:gridCol>
+                <a:gridCol w="1371600">
+                  <a:extLst>
+                    <a:ext uri="{9D8B030D-6E8A-4147-A177-3AD203B41FA5}">
+                      <a16:colId xmlns:a16="http://schemas.microsoft.com/office/drawing/2014/main" val="20002"/>
+                    </a:ext>
+                  </a:extLst>
+                </a:gridCol>
+                <a:gridCol w="1371600">
+                  <a:extLst>
+                    <a:ext uri="{9D8B030D-6E8A-4147-A177-3AD203B41FA5}">
+                      <a16:colId xmlns:a16="http://schemas.microsoft.com/office/drawing/2014/main" val="20003"/>
+                    </a:ext>
+                  </a:extLst>
+                </a:gridCol>
+                <a:gridCol w="1371600">
+                  <a:extLst>
+                    <a:ext uri="{9D8B030D-6E8A-4147-A177-3AD203B41FA5}">
+                      <a16:colId xmlns:a16="http://schemas.microsoft.com/office/drawing/2014/main" val="20004"/>
+                    </a:ext>
+                  </a:extLst>
+                </a:gridCol>
               </a:tblGrid>
               <a:tr h="457200">
                 <a:tc>
@@ -14486,7 +14473,7 @@
                     <a:bodyPr/>
                     <a:lstStyle/>
                     <a:p>
-                      <a:pPr algn="ctr" indent="0" marL="0">
+                      <a:pPr marL="0" indent="0" algn="ctr">
                         <a:buNone/>
                       </a:pPr>
                       <a:r>
@@ -14507,7 +14494,7 @@
                       </a:endParaRPr>
                     </a:p>
                   </a:txBody>
-                  <a:tcPr marL="91440" marR="91440" marT="45720" marB="45720" anchor="ctr">
+                  <a:tcPr anchor="ctr">
                     <a:lnL w="38100" cap="flat" cmpd="sng" algn="ctr">
                       <a:solidFill>
                         <a:srgbClr val="FFFFFF"/>
@@ -14554,7 +14541,7 @@
                     <a:bodyPr/>
                     <a:lstStyle/>
                     <a:p>
-                      <a:pPr algn="ctr" indent="0" marL="0">
+                      <a:pPr marL="0" indent="0" algn="ctr">
                         <a:buNone/>
                       </a:pPr>
                       <a:r>
@@ -14575,7 +14562,7 @@
                       </a:endParaRPr>
                     </a:p>
                   </a:txBody>
-                  <a:tcPr marL="91440" marR="91440" marT="45720" marB="45720" anchor="ctr">
+                  <a:tcPr anchor="ctr">
                     <a:lnL w="38100" cap="flat" cmpd="sng" algn="ctr">
                       <a:solidFill>
                         <a:srgbClr val="FFFFFF"/>
@@ -14622,7 +14609,7 @@
                     <a:bodyPr/>
                     <a:lstStyle/>
                     <a:p>
-                      <a:pPr algn="ctr" indent="0" marL="0">
+                      <a:pPr marL="0" indent="0" algn="ctr">
                         <a:buNone/>
                       </a:pPr>
                       <a:r>
@@ -14643,7 +14630,7 @@
                       </a:endParaRPr>
                     </a:p>
                   </a:txBody>
-                  <a:tcPr marL="91440" marR="91440" marT="45720" marB="45720" anchor="ctr">
+                  <a:tcPr anchor="ctr">
                     <a:lnL w="38100" cap="flat" cmpd="sng" algn="ctr">
                       <a:solidFill>
                         <a:srgbClr val="FFFFFF"/>
@@ -14690,7 +14677,7 @@
                     <a:bodyPr/>
                     <a:lstStyle/>
                     <a:p>
-                      <a:pPr algn="ctr" indent="0" marL="0">
+                      <a:pPr marL="0" indent="0" algn="ctr">
                         <a:buNone/>
                       </a:pPr>
                       <a:r>
@@ -14711,7 +14698,7 @@
                       </a:endParaRPr>
                     </a:p>
                   </a:txBody>
-                  <a:tcPr marL="91440" marR="91440" marT="45720" marB="45720" anchor="ctr">
+                  <a:tcPr anchor="ctr">
                     <a:lnL w="38100" cap="flat" cmpd="sng" algn="ctr">
                       <a:solidFill>
                         <a:srgbClr val="FFFFFF"/>
@@ -14758,7 +14745,7 @@
                     <a:bodyPr/>
                     <a:lstStyle/>
                     <a:p>
-                      <a:pPr algn="ctr" indent="0" marL="0">
+                      <a:pPr marL="0" indent="0" algn="ctr">
                         <a:buNone/>
                       </a:pPr>
                       <a:r>
@@ -14779,7 +14766,7 @@
                       </a:endParaRPr>
                     </a:p>
                   </a:txBody>
-                  <a:tcPr marL="91440" marR="91440" marT="45720" marB="45720" anchor="ctr">
+                  <a:tcPr anchor="ctr">
                     <a:lnL w="38100" cap="flat" cmpd="sng" algn="ctr">
                       <a:solidFill>
                         <a:srgbClr val="FFFFFF"/>
@@ -14821,6 +14808,11 @@
                     </a:solidFill>
                   </a:tcPr>
                 </a:tc>
+                <a:extLst>
+                  <a:ext uri="{0D108BD9-81ED-4DB2-BD59-A6C34878D82A}">
+                    <a16:rowId xmlns:a16="http://schemas.microsoft.com/office/drawing/2014/main" val="10000"/>
+                  </a:ext>
+                </a:extLst>
               </a:tr>
               <a:tr h="914400">
                 <a:tc>
@@ -14828,7 +14820,7 @@
                     <a:bodyPr/>
                     <a:lstStyle/>
                     <a:p>
-                      <a:pPr algn="ctr" indent="0" marL="0">
+                      <a:pPr marL="0" indent="0" algn="ctr">
                         <a:buNone/>
                       </a:pPr>
                       <a:r>
@@ -14849,7 +14841,7 @@
                       </a:endParaRPr>
                     </a:p>
                   </a:txBody>
-                  <a:tcPr marL="91440" marR="91440" marT="45720" marB="45720" anchor="ctr">
+                  <a:tcPr anchor="ctr">
                     <a:lnL w="38100" cap="flat" cmpd="sng" algn="ctr">
                       <a:solidFill>
                         <a:srgbClr val="FFFFFF"/>
@@ -14896,7 +14888,7 @@
                     <a:bodyPr/>
                     <a:lstStyle/>
                     <a:p>
-                      <a:pPr algn="ctr" indent="0" marL="0">
+                      <a:pPr marL="0" indent="0" algn="ctr">
                         <a:buNone/>
                       </a:pPr>
                       <a:r>
@@ -14917,7 +14909,7 @@
                       </a:endParaRPr>
                     </a:p>
                   </a:txBody>
-                  <a:tcPr marL="91440" marR="91440" marT="45720" marB="45720" anchor="ctr">
+                  <a:tcPr anchor="ctr">
                     <a:lnL w="38100" cap="flat" cmpd="sng" algn="ctr">
                       <a:solidFill>
                         <a:srgbClr val="FFFFFF"/>
@@ -14964,7 +14956,7 @@
                     <a:bodyPr/>
                     <a:lstStyle/>
                     <a:p>
-                      <a:pPr algn="ctr" indent="0" marL="0">
+                      <a:pPr marL="0" indent="0" algn="ctr">
                         <a:buNone/>
                       </a:pPr>
                       <a:r>
@@ -14985,7 +14977,7 @@
                       </a:endParaRPr>
                     </a:p>
                   </a:txBody>
-                  <a:tcPr marL="91440" marR="91440" marT="45720" marB="45720" anchor="ctr">
+                  <a:tcPr anchor="ctr">
                     <a:lnL w="38100" cap="flat" cmpd="sng" algn="ctr">
                       <a:solidFill>
                         <a:srgbClr val="FFFFFF"/>
@@ -15032,7 +15024,7 @@
                     <a:bodyPr/>
                     <a:lstStyle/>
                     <a:p>
-                      <a:pPr algn="ctr" indent="0" marL="0">
+                      <a:pPr marL="0" indent="0" algn="ctr">
                         <a:buNone/>
                       </a:pPr>
                       <a:r>
@@ -15053,7 +15045,7 @@
                       </a:endParaRPr>
                     </a:p>
                   </a:txBody>
-                  <a:tcPr marL="91440" marR="91440" marT="45720" marB="45720" anchor="ctr">
+                  <a:tcPr anchor="ctr">
                     <a:lnL w="38100" cap="flat" cmpd="sng" algn="ctr">
                       <a:solidFill>
                         <a:srgbClr val="FFFFFF"/>
@@ -15100,7 +15092,7 @@
                     <a:bodyPr/>
                     <a:lstStyle/>
                     <a:p>
-                      <a:pPr algn="ctr" indent="0" marL="0">
+                      <a:pPr marL="0" indent="0" algn="ctr">
                         <a:buNone/>
                       </a:pPr>
                       <a:r>
@@ -15121,7 +15113,7 @@
                       </a:endParaRPr>
                     </a:p>
                   </a:txBody>
-                  <a:tcPr marL="91440" marR="91440" marT="45720" marB="45720" anchor="ctr">
+                  <a:tcPr anchor="ctr">
                     <a:lnL w="38100" cap="flat" cmpd="sng" algn="ctr">
                       <a:solidFill>
                         <a:srgbClr val="FFFFFF"/>
@@ -15163,6 +15155,11 @@
                     </a:solidFill>
                   </a:tcPr>
                 </a:tc>
+                <a:extLst>
+                  <a:ext uri="{0D108BD9-81ED-4DB2-BD59-A6C34878D82A}">
+                    <a16:rowId xmlns:a16="http://schemas.microsoft.com/office/drawing/2014/main" val="10001"/>
+                  </a:ext>
+                </a:extLst>
               </a:tr>
               <a:tr h="914400">
                 <a:tc>
@@ -15170,7 +15167,7 @@
                     <a:bodyPr/>
                     <a:lstStyle/>
                     <a:p>
-                      <a:pPr algn="ctr" indent="0" marL="0">
+                      <a:pPr marL="0" indent="0" algn="ctr">
                         <a:buNone/>
                       </a:pPr>
                       <a:r>
@@ -15191,7 +15188,7 @@
                       </a:endParaRPr>
                     </a:p>
                   </a:txBody>
-                  <a:tcPr marL="91440" marR="91440" marT="45720" marB="45720" anchor="ctr">
+                  <a:tcPr anchor="ctr">
                     <a:lnL w="38100" cap="flat" cmpd="sng" algn="ctr">
                       <a:solidFill>
                         <a:srgbClr val="FFFFFF"/>
@@ -15238,7 +15235,7 @@
                     <a:bodyPr/>
                     <a:lstStyle/>
                     <a:p>
-                      <a:pPr algn="ctr" indent="0" marL="0">
+                      <a:pPr marL="0" indent="0" algn="ctr">
                         <a:buNone/>
                       </a:pPr>
                       <a:r>
@@ -15259,7 +15256,7 @@
                       </a:endParaRPr>
                     </a:p>
                   </a:txBody>
-                  <a:tcPr marL="91440" marR="91440" marT="45720" marB="45720" anchor="ctr">
+                  <a:tcPr anchor="ctr">
                     <a:lnL w="38100" cap="flat" cmpd="sng" algn="ctr">
                       <a:solidFill>
                         <a:srgbClr val="FFFFFF"/>
@@ -15306,7 +15303,7 @@
                     <a:bodyPr/>
                     <a:lstStyle/>
                     <a:p>
-                      <a:pPr algn="ctr" indent="0" marL="0">
+                      <a:pPr marL="0" indent="0" algn="ctr">
                         <a:buNone/>
                       </a:pPr>
                       <a:r>
@@ -15327,7 +15324,7 @@
                       </a:endParaRPr>
                     </a:p>
                   </a:txBody>
-                  <a:tcPr marL="91440" marR="91440" marT="45720" marB="45720" anchor="ctr">
+                  <a:tcPr anchor="ctr">
                     <a:lnL w="38100" cap="flat" cmpd="sng" algn="ctr">
                       <a:solidFill>
                         <a:srgbClr val="FFFFFF"/>
@@ -15374,7 +15371,7 @@
                     <a:bodyPr/>
                     <a:lstStyle/>
                     <a:p>
-                      <a:pPr algn="ctr" indent="0" marL="0">
+                      <a:pPr marL="0" indent="0" algn="ctr">
                         <a:buNone/>
                       </a:pPr>
                       <a:r>
@@ -15395,7 +15392,7 @@
                       </a:endParaRPr>
                     </a:p>
                   </a:txBody>
-                  <a:tcPr marL="91440" marR="91440" marT="45720" marB="45720" anchor="ctr">
+                  <a:tcPr anchor="ctr">
                     <a:lnL w="38100" cap="flat" cmpd="sng" algn="ctr">
                       <a:solidFill>
                         <a:srgbClr val="FFFFFF"/>
@@ -15442,7 +15439,7 @@
                     <a:bodyPr/>
                     <a:lstStyle/>
                     <a:p>
-                      <a:pPr algn="ctr" indent="0" marL="0">
+                      <a:pPr marL="0" indent="0" algn="ctr">
                         <a:buNone/>
                       </a:pPr>
                       <a:r>
@@ -15463,7 +15460,7 @@
                       </a:endParaRPr>
                     </a:p>
                   </a:txBody>
-                  <a:tcPr marL="91440" marR="91440" marT="45720" marB="45720" anchor="ctr">
+                  <a:tcPr anchor="ctr">
                     <a:lnL w="38100" cap="flat" cmpd="sng" algn="ctr">
                       <a:solidFill>
                         <a:srgbClr val="FFFFFF"/>
@@ -15505,6 +15502,11 @@
                     </a:solidFill>
                   </a:tcPr>
                 </a:tc>
+                <a:extLst>
+                  <a:ext uri="{0D108BD9-81ED-4DB2-BD59-A6C34878D82A}">
+                    <a16:rowId xmlns:a16="http://schemas.microsoft.com/office/drawing/2014/main" val="10002"/>
+                  </a:ext>
+                </a:extLst>
               </a:tr>
             </a:tbl>
           </a:graphicData>
@@ -15531,7 +15533,7 @@
           <a:bodyPr wrap="square" lIns="0" tIns="0" rIns="0" bIns="0" rtlCol="0" anchor="ctr"/>
           <a:lstStyle/>
           <a:p>
-            <a:pPr algn="ctr" indent="0" marL="0">
+            <a:pPr marL="0" indent="0" algn="ctr">
               <a:buNone/>
             </a:pPr>
             <a:r>
@@ -15570,7 +15572,7 @@
           <a:bodyPr wrap="square" lIns="0" tIns="0" rIns="0" bIns="0" rtlCol="0" anchor="ctr"/>
           <a:lstStyle/>
           <a:p>
-            <a:pPr algn="r" indent="0" marL="0">
+            <a:pPr marL="0" indent="0" algn="r">
               <a:buNone/>
             </a:pPr>
             <a:r>
@@ -15604,6 +15606,7 @@
         <a:solidFill>
           <a:srgbClr val="FFFFFF"/>
         </a:solidFill>
+        <a:effectLst/>
       </p:bgPr>
     </p:bg>
     <p:spTree>
@@ -15642,14 +15645,14 @@
       </p:sp>
       <p:pic>
         <p:nvPicPr>
-          <p:cNvPr id="3" name="Image 0" descr="preencoded.png">    </p:cNvPr>
+          <p:cNvPr id="3" name="Image 0" descr="preencoded.png"/>
           <p:cNvPicPr>
             <a:picLocks noChangeAspect="1"/>
           </p:cNvPicPr>
           <p:nvPr/>
         </p:nvPicPr>
         <p:blipFill>
-          <a:blip r:embed="rId1"/>
+          <a:blip r:embed="rId3"/>
           <a:stretch>
             <a:fillRect/>
           </a:stretch>
@@ -15685,11 +15688,11 @@
           <a:bodyPr wrap="square" lIns="0" tIns="0" rIns="0" bIns="0" rtlCol="0" anchor="ctr"/>
           <a:lstStyle/>
           <a:p>
-            <a:pPr indent="0" marL="0">
+            <a:pPr marL="0" indent="0">
               <a:buNone/>
             </a:pPr>
             <a:r>
-              <a:rPr lang="en-US" sz="1200" b="1" spc="150" kern="0" dirty="0">
+              <a:rPr lang="en-US" sz="1200" b="1" kern="0" spc="150" dirty="0">
                 <a:solidFill>
                   <a:srgbClr val="3EBD59"/>
                 </a:solidFill>
@@ -15724,7 +15727,7 @@
           <a:bodyPr wrap="square" lIns="0" tIns="0" rIns="0" bIns="0" rtlCol="0" anchor="ctr"/>
           <a:lstStyle/>
           <a:p>
-            <a:pPr indent="0" marL="0">
+            <a:pPr marL="0" indent="0">
               <a:buNone/>
             </a:pPr>
             <a:r>
@@ -15765,11 +15768,41 @@
             <a:tbl>
               <a:tblPr/>
               <a:tblGrid>
-                <a:gridCol w="1188720"/>
-                <a:gridCol w="1371600"/>
-                <a:gridCol w="1371600"/>
-                <a:gridCol w="1371600"/>
-                <a:gridCol w="1371600"/>
+                <a:gridCol w="1188720">
+                  <a:extLst>
+                    <a:ext uri="{9D8B030D-6E8A-4147-A177-3AD203B41FA5}">
+                      <a16:colId xmlns:a16="http://schemas.microsoft.com/office/drawing/2014/main" val="20000"/>
+                    </a:ext>
+                  </a:extLst>
+                </a:gridCol>
+                <a:gridCol w="1371600">
+                  <a:extLst>
+                    <a:ext uri="{9D8B030D-6E8A-4147-A177-3AD203B41FA5}">
+                      <a16:colId xmlns:a16="http://schemas.microsoft.com/office/drawing/2014/main" val="20001"/>
+                    </a:ext>
+                  </a:extLst>
+                </a:gridCol>
+                <a:gridCol w="1371600">
+                  <a:extLst>
+                    <a:ext uri="{9D8B030D-6E8A-4147-A177-3AD203B41FA5}">
+                      <a16:colId xmlns:a16="http://schemas.microsoft.com/office/drawing/2014/main" val="20002"/>
+                    </a:ext>
+                  </a:extLst>
+                </a:gridCol>
+                <a:gridCol w="1371600">
+                  <a:extLst>
+                    <a:ext uri="{9D8B030D-6E8A-4147-A177-3AD203B41FA5}">
+                      <a16:colId xmlns:a16="http://schemas.microsoft.com/office/drawing/2014/main" val="20003"/>
+                    </a:ext>
+                  </a:extLst>
+                </a:gridCol>
+                <a:gridCol w="1371600">
+                  <a:extLst>
+                    <a:ext uri="{9D8B030D-6E8A-4147-A177-3AD203B41FA5}">
+                      <a16:colId xmlns:a16="http://schemas.microsoft.com/office/drawing/2014/main" val="20004"/>
+                    </a:ext>
+                  </a:extLst>
+                </a:gridCol>
               </a:tblGrid>
               <a:tr h="457200">
                 <a:tc>
@@ -15777,7 +15810,7 @@
                     <a:bodyPr/>
                     <a:lstStyle/>
                     <a:p>
-                      <a:pPr algn="ctr" indent="0" marL="0">
+                      <a:pPr marL="0" indent="0" algn="ctr">
                         <a:buNone/>
                       </a:pPr>
                       <a:r>
@@ -15798,7 +15831,7 @@
                       </a:endParaRPr>
                     </a:p>
                   </a:txBody>
-                  <a:tcPr marL="91440" marR="91440" marT="45720" marB="45720" anchor="ctr">
+                  <a:tcPr anchor="ctr">
                     <a:lnL w="38100" cap="flat" cmpd="sng" algn="ctr">
                       <a:solidFill>
                         <a:srgbClr val="FFFFFF"/>
@@ -15845,7 +15878,7 @@
                     <a:bodyPr/>
                     <a:lstStyle/>
                     <a:p>
-                      <a:pPr algn="ctr" indent="0" marL="0">
+                      <a:pPr marL="0" indent="0" algn="ctr">
                         <a:buNone/>
                       </a:pPr>
                       <a:r>
@@ -15866,7 +15899,7 @@
                       </a:endParaRPr>
                     </a:p>
                   </a:txBody>
-                  <a:tcPr marL="91440" marR="91440" marT="45720" marB="45720" anchor="ctr">
+                  <a:tcPr anchor="ctr">
                     <a:lnL w="38100" cap="flat" cmpd="sng" algn="ctr">
                       <a:solidFill>
                         <a:srgbClr val="FFFFFF"/>
@@ -15913,7 +15946,7 @@
                     <a:bodyPr/>
                     <a:lstStyle/>
                     <a:p>
-                      <a:pPr algn="ctr" indent="0" marL="0">
+                      <a:pPr marL="0" indent="0" algn="ctr">
                         <a:buNone/>
                       </a:pPr>
                       <a:r>
@@ -15934,7 +15967,7 @@
                       </a:endParaRPr>
                     </a:p>
                   </a:txBody>
-                  <a:tcPr marL="91440" marR="91440" marT="45720" marB="45720" anchor="ctr">
+                  <a:tcPr anchor="ctr">
                     <a:lnL w="38100" cap="flat" cmpd="sng" algn="ctr">
                       <a:solidFill>
                         <a:srgbClr val="FFFFFF"/>
@@ -15981,7 +16014,7 @@
                     <a:bodyPr/>
                     <a:lstStyle/>
                     <a:p>
-                      <a:pPr algn="ctr" indent="0" marL="0">
+                      <a:pPr marL="0" indent="0" algn="ctr">
                         <a:buNone/>
                       </a:pPr>
                       <a:r>
@@ -16002,7 +16035,7 @@
                       </a:endParaRPr>
                     </a:p>
                   </a:txBody>
-                  <a:tcPr marL="91440" marR="91440" marT="45720" marB="45720" anchor="ctr">
+                  <a:tcPr anchor="ctr">
                     <a:lnL w="38100" cap="flat" cmpd="sng" algn="ctr">
                       <a:solidFill>
                         <a:srgbClr val="FFFFFF"/>
@@ -16049,7 +16082,7 @@
                     <a:bodyPr/>
                     <a:lstStyle/>
                     <a:p>
-                      <a:pPr algn="ctr" indent="0" marL="0">
+                      <a:pPr marL="0" indent="0" algn="ctr">
                         <a:buNone/>
                       </a:pPr>
                       <a:r>
@@ -16070,7 +16103,7 @@
                       </a:endParaRPr>
                     </a:p>
                   </a:txBody>
-                  <a:tcPr marL="91440" marR="91440" marT="45720" marB="45720" anchor="ctr">
+                  <a:tcPr anchor="ctr">
                     <a:lnL w="38100" cap="flat" cmpd="sng" algn="ctr">
                       <a:solidFill>
                         <a:srgbClr val="FFFFFF"/>
@@ -16112,6 +16145,11 @@
                     </a:solidFill>
                   </a:tcPr>
                 </a:tc>
+                <a:extLst>
+                  <a:ext uri="{0D108BD9-81ED-4DB2-BD59-A6C34878D82A}">
+                    <a16:rowId xmlns:a16="http://schemas.microsoft.com/office/drawing/2014/main" val="10000"/>
+                  </a:ext>
+                </a:extLst>
               </a:tr>
               <a:tr h="914400">
                 <a:tc>
@@ -16119,7 +16157,7 @@
                     <a:bodyPr/>
                     <a:lstStyle/>
                     <a:p>
-                      <a:pPr algn="ctr" indent="0" marL="0">
+                      <a:pPr marL="0" indent="0" algn="ctr">
                         <a:buNone/>
                       </a:pPr>
                       <a:r>
@@ -16140,7 +16178,7 @@
                       </a:endParaRPr>
                     </a:p>
                   </a:txBody>
-                  <a:tcPr marL="91440" marR="91440" marT="45720" marB="45720" anchor="ctr">
+                  <a:tcPr anchor="ctr">
                     <a:lnL w="38100" cap="flat" cmpd="sng" algn="ctr">
                       <a:solidFill>
                         <a:srgbClr val="FFFFFF"/>
@@ -16187,7 +16225,7 @@
                     <a:bodyPr/>
                     <a:lstStyle/>
                     <a:p>
-                      <a:pPr algn="ctr" indent="0" marL="0">
+                      <a:pPr marL="0" indent="0" algn="ctr">
                         <a:buNone/>
                       </a:pPr>
                       <a:r>
@@ -16208,7 +16246,7 @@
                       </a:endParaRPr>
                     </a:p>
                   </a:txBody>
-                  <a:tcPr marL="91440" marR="91440" marT="45720" marB="45720" anchor="ctr">
+                  <a:tcPr anchor="ctr">
                     <a:lnL w="38100" cap="flat" cmpd="sng" algn="ctr">
                       <a:solidFill>
                         <a:srgbClr val="FFFFFF"/>
@@ -16255,7 +16293,7 @@
                     <a:bodyPr/>
                     <a:lstStyle/>
                     <a:p>
-                      <a:pPr algn="ctr" indent="0" marL="0">
+                      <a:pPr marL="0" indent="0" algn="ctr">
                         <a:buNone/>
                       </a:pPr>
                       <a:r>
@@ -16276,7 +16314,7 @@
                       </a:endParaRPr>
                     </a:p>
                   </a:txBody>
-                  <a:tcPr marL="91440" marR="91440" marT="45720" marB="45720" anchor="ctr">
+                  <a:tcPr anchor="ctr">
                     <a:lnL w="38100" cap="flat" cmpd="sng" algn="ctr">
                       <a:solidFill>
                         <a:srgbClr val="FFFFFF"/>
@@ -16323,7 +16361,7 @@
                     <a:bodyPr/>
                     <a:lstStyle/>
                     <a:p>
-                      <a:pPr algn="ctr" indent="0" marL="0">
+                      <a:pPr marL="0" indent="0" algn="ctr">
                         <a:buNone/>
                       </a:pPr>
                       <a:r>
@@ -16344,7 +16382,7 @@
                       </a:endParaRPr>
                     </a:p>
                   </a:txBody>
-                  <a:tcPr marL="91440" marR="91440" marT="45720" marB="45720" anchor="ctr">
+                  <a:tcPr anchor="ctr">
                     <a:lnL w="38100" cap="flat" cmpd="sng" algn="ctr">
                       <a:solidFill>
                         <a:srgbClr val="FFFFFF"/>
@@ -16391,7 +16429,7 @@
                     <a:bodyPr/>
                     <a:lstStyle/>
                     <a:p>
-                      <a:pPr algn="ctr" indent="0" marL="0">
+                      <a:pPr marL="0" indent="0" algn="ctr">
                         <a:buNone/>
                       </a:pPr>
                       <a:r>
@@ -16412,7 +16450,7 @@
                       </a:endParaRPr>
                     </a:p>
                   </a:txBody>
-                  <a:tcPr marL="91440" marR="91440" marT="45720" marB="45720" anchor="ctr">
+                  <a:tcPr anchor="ctr">
                     <a:lnL w="38100" cap="flat" cmpd="sng" algn="ctr">
                       <a:solidFill>
                         <a:srgbClr val="FFFFFF"/>
@@ -16454,6 +16492,11 @@
                     </a:solidFill>
                   </a:tcPr>
                 </a:tc>
+                <a:extLst>
+                  <a:ext uri="{0D108BD9-81ED-4DB2-BD59-A6C34878D82A}">
+                    <a16:rowId xmlns:a16="http://schemas.microsoft.com/office/drawing/2014/main" val="10001"/>
+                  </a:ext>
+                </a:extLst>
               </a:tr>
               <a:tr h="914400">
                 <a:tc>
@@ -16461,7 +16504,7 @@
                     <a:bodyPr/>
                     <a:lstStyle/>
                     <a:p>
-                      <a:pPr algn="ctr" indent="0" marL="0">
+                      <a:pPr marL="0" indent="0" algn="ctr">
                         <a:buNone/>
                       </a:pPr>
                       <a:r>
@@ -16482,7 +16525,7 @@
                       </a:endParaRPr>
                     </a:p>
                   </a:txBody>
-                  <a:tcPr marL="91440" marR="91440" marT="45720" marB="45720" anchor="ctr">
+                  <a:tcPr anchor="ctr">
                     <a:lnL w="38100" cap="flat" cmpd="sng" algn="ctr">
                       <a:solidFill>
                         <a:srgbClr val="FFFFFF"/>
@@ -16529,7 +16572,7 @@
                     <a:bodyPr/>
                     <a:lstStyle/>
                     <a:p>
-                      <a:pPr algn="ctr" indent="0" marL="0">
+                      <a:pPr marL="0" indent="0" algn="ctr">
                         <a:buNone/>
                       </a:pPr>
                       <a:r>
@@ -16550,7 +16593,7 @@
                       </a:endParaRPr>
                     </a:p>
                   </a:txBody>
-                  <a:tcPr marL="91440" marR="91440" marT="45720" marB="45720" anchor="ctr">
+                  <a:tcPr anchor="ctr">
                     <a:lnL w="38100" cap="flat" cmpd="sng" algn="ctr">
                       <a:solidFill>
                         <a:srgbClr val="FFFFFF"/>
@@ -16597,7 +16640,7 @@
                     <a:bodyPr/>
                     <a:lstStyle/>
                     <a:p>
-                      <a:pPr algn="ctr" indent="0" marL="0">
+                      <a:pPr marL="0" indent="0" algn="ctr">
                         <a:buNone/>
                       </a:pPr>
                       <a:r>
@@ -16618,7 +16661,7 @@
                       </a:endParaRPr>
                     </a:p>
                   </a:txBody>
-                  <a:tcPr marL="91440" marR="91440" marT="45720" marB="45720" anchor="ctr">
+                  <a:tcPr anchor="ctr">
                     <a:lnL w="38100" cap="flat" cmpd="sng" algn="ctr">
                       <a:solidFill>
                         <a:srgbClr val="FFFFFF"/>
@@ -16665,7 +16708,7 @@
                     <a:bodyPr/>
                     <a:lstStyle/>
                     <a:p>
-                      <a:pPr algn="ctr" indent="0" marL="0">
+                      <a:pPr marL="0" indent="0" algn="ctr">
                         <a:buNone/>
                       </a:pPr>
                       <a:r>
@@ -16686,7 +16729,7 @@
                       </a:endParaRPr>
                     </a:p>
                   </a:txBody>
-                  <a:tcPr marL="91440" marR="91440" marT="45720" marB="45720" anchor="ctr">
+                  <a:tcPr anchor="ctr">
                     <a:lnL w="38100" cap="flat" cmpd="sng" algn="ctr">
                       <a:solidFill>
                         <a:srgbClr val="FFFFFF"/>
@@ -16733,7 +16776,7 @@
                     <a:bodyPr/>
                     <a:lstStyle/>
                     <a:p>
-                      <a:pPr algn="ctr" indent="0" marL="0">
+                      <a:pPr marL="0" indent="0" algn="ctr">
                         <a:buNone/>
                       </a:pPr>
                       <a:r>
@@ -16754,7 +16797,7 @@
                       </a:endParaRPr>
                     </a:p>
                   </a:txBody>
-                  <a:tcPr marL="91440" marR="91440" marT="45720" marB="45720" anchor="ctr">
+                  <a:tcPr anchor="ctr">
                     <a:lnL w="38100" cap="flat" cmpd="sng" algn="ctr">
                       <a:solidFill>
                         <a:srgbClr val="FFFFFF"/>
@@ -16796,6 +16839,11 @@
                     </a:solidFill>
                   </a:tcPr>
                 </a:tc>
+                <a:extLst>
+                  <a:ext uri="{0D108BD9-81ED-4DB2-BD59-A6C34878D82A}">
+                    <a16:rowId xmlns:a16="http://schemas.microsoft.com/office/drawing/2014/main" val="10002"/>
+                  </a:ext>
+                </a:extLst>
               </a:tr>
             </a:tbl>
           </a:graphicData>
@@ -16870,7 +16918,7 @@
           <a:bodyPr wrap="square" lIns="0" tIns="0" rIns="0" bIns="0" rtlCol="0" anchor="ctr"/>
           <a:lstStyle/>
           <a:p>
-            <a:pPr algn="ctr" indent="0" marL="0">
+            <a:pPr marL="0" indent="0" algn="ctr">
               <a:buNone/>
             </a:pPr>
             <a:r>
@@ -16884,9 +16932,6 @@
               </a:rPr>
               <a:t>■ </a:t>
             </a:r>
-            <a:pPr algn="ctr" indent="0" marL="0">
-              <a:buNone/>
-            </a:pPr>
             <a:r>
               <a:rPr lang="en-US" sz="1350" dirty="0">
                 <a:solidFill>
@@ -16898,9 +16943,6 @@
               </a:rPr>
               <a:t>linha x=1 → x     </a:t>
             </a:r>
-            <a:pPr algn="ctr" indent="0" marL="0">
-              <a:buNone/>
-            </a:pPr>
             <a:r>
               <a:rPr lang="en-US" sz="1350" b="1" dirty="0">
                 <a:solidFill>
@@ -16912,9 +16954,6 @@
               </a:rPr>
               <a:t>■ </a:t>
             </a:r>
-            <a:pPr algn="ctr" indent="0" marL="0">
-              <a:buNone/>
-            </a:pPr>
             <a:r>
               <a:rPr lang="en-US" sz="1350" dirty="0">
                 <a:solidFill>
@@ -16973,7 +17012,7 @@
           <a:bodyPr wrap="square" lIns="0" tIns="0" rIns="0" bIns="0" rtlCol="0" anchor="ctr"/>
           <a:lstStyle/>
           <a:p>
-            <a:pPr algn="ctr" indent="0" marL="0">
+            <a:pPr marL="0" indent="0" algn="ctr">
               <a:buNone/>
             </a:pPr>
             <a:r>
@@ -17012,7 +17051,7 @@
           <a:bodyPr wrap="square" lIns="0" tIns="0" rIns="0" bIns="0" rtlCol="0" anchor="ctr"/>
           <a:lstStyle/>
           <a:p>
-            <a:pPr algn="ctr" indent="0" marL="0">
+            <a:pPr marL="0" indent="0" algn="ctr">
               <a:buNone/>
             </a:pPr>
             <a:r>
@@ -17051,7 +17090,7 @@
           <a:bodyPr wrap="square" lIns="0" tIns="0" rIns="0" bIns="0" rtlCol="0" anchor="ctr"/>
           <a:lstStyle/>
           <a:p>
-            <a:pPr algn="r" indent="0" marL="0">
+            <a:pPr marL="0" indent="0" algn="r">
               <a:buNone/>
             </a:pPr>
             <a:r>
@@ -17085,6 +17124,7 @@
         <a:solidFill>
           <a:srgbClr val="141B41"/>
         </a:solidFill>
+        <a:effectLst/>
       </p:bgPr>
     </p:bg>
     <p:spTree>
@@ -17123,14 +17163,14 @@
       </p:sp>
       <p:pic>
         <p:nvPicPr>
-          <p:cNvPr id="3" name="Image 0" descr="preencoded.png">    </p:cNvPr>
+          <p:cNvPr id="3" name="Image 0" descr="preencoded.png"/>
           <p:cNvPicPr>
             <a:picLocks noChangeAspect="1"/>
           </p:cNvPicPr>
           <p:nvPr/>
         </p:nvPicPr>
         <p:blipFill>
-          <a:blip r:embed="rId1"/>
+          <a:blip r:embed="rId3"/>
           <a:stretch>
             <a:fillRect/>
           </a:stretch>
@@ -17166,11 +17206,11 @@
           <a:bodyPr wrap="square" lIns="0" tIns="0" rIns="0" bIns="0" rtlCol="0" anchor="ctr"/>
           <a:lstStyle/>
           <a:p>
-            <a:pPr indent="0" marL="0">
+            <a:pPr marL="0" indent="0">
               <a:buNone/>
             </a:pPr>
             <a:r>
-              <a:rPr lang="en-US" sz="1200" b="1" spc="150" kern="0" dirty="0">
+              <a:rPr lang="en-US" sz="1200" b="1" kern="0" spc="150" dirty="0">
                 <a:solidFill>
                   <a:srgbClr val="2FE6C7"/>
                 </a:solidFill>
@@ -17205,7 +17245,7 @@
           <a:bodyPr wrap="square" lIns="0" tIns="0" rIns="0" bIns="0" rtlCol="0" anchor="ctr"/>
           <a:lstStyle/>
           <a:p>
-            <a:pPr indent="0" marL="0">
+            <a:pPr marL="0" indent="0">
               <a:buNone/>
             </a:pPr>
             <a:r>
@@ -17244,7 +17284,7 @@
           <a:bodyPr wrap="square" lIns="0" tIns="0" rIns="0" bIns="0" rtlCol="0" anchor="ctr"/>
           <a:lstStyle/>
           <a:p>
-            <a:pPr indent="0" marL="0">
+            <a:pPr marL="0" indent="0">
               <a:lnSpc>
                 <a:spcPts val="1900"/>
               </a:lnSpc>
@@ -17288,9 +17328,27 @@
             <a:tbl>
               <a:tblPr/>
               <a:tblGrid>
-                <a:gridCol w="1280160"/>
-                <a:gridCol w="1645920"/>
-                <a:gridCol w="1645920"/>
+                <a:gridCol w="1280160">
+                  <a:extLst>
+                    <a:ext uri="{9D8B030D-6E8A-4147-A177-3AD203B41FA5}">
+                      <a16:colId xmlns:a16="http://schemas.microsoft.com/office/drawing/2014/main" val="20000"/>
+                    </a:ext>
+                  </a:extLst>
+                </a:gridCol>
+                <a:gridCol w="1645920">
+                  <a:extLst>
+                    <a:ext uri="{9D8B030D-6E8A-4147-A177-3AD203B41FA5}">
+                      <a16:colId xmlns:a16="http://schemas.microsoft.com/office/drawing/2014/main" val="20001"/>
+                    </a:ext>
+                  </a:extLst>
+                </a:gridCol>
+                <a:gridCol w="1645920">
+                  <a:extLst>
+                    <a:ext uri="{9D8B030D-6E8A-4147-A177-3AD203B41FA5}">
+                      <a16:colId xmlns:a16="http://schemas.microsoft.com/office/drawing/2014/main" val="20002"/>
+                    </a:ext>
+                  </a:extLst>
+                </a:gridCol>
               </a:tblGrid>
               <a:tr h="457200">
                 <a:tc>
@@ -17298,7 +17356,7 @@
                     <a:bodyPr/>
                     <a:lstStyle/>
                     <a:p>
-                      <a:pPr algn="ctr" indent="0" marL="0">
+                      <a:pPr marL="0" indent="0" algn="ctr">
                         <a:buNone/>
                       </a:pPr>
                       <a:r>
@@ -17319,7 +17377,7 @@
                       </a:endParaRPr>
                     </a:p>
                   </a:txBody>
-                  <a:tcPr marL="91440" marR="91440" marT="45720" marB="45720" anchor="ctr">
+                  <a:tcPr anchor="ctr">
                     <a:lnL w="38100" cap="flat" cmpd="sng" algn="ctr">
                       <a:solidFill>
                         <a:srgbClr val="FFFFFF"/>
@@ -17366,7 +17424,7 @@
                     <a:bodyPr/>
                     <a:lstStyle/>
                     <a:p>
-                      <a:pPr algn="ctr" indent="0" marL="0">
+                      <a:pPr marL="0" indent="0" algn="ctr">
                         <a:buNone/>
                       </a:pPr>
                       <a:r>
@@ -17387,7 +17445,7 @@
                       </a:endParaRPr>
                     </a:p>
                   </a:txBody>
-                  <a:tcPr marL="91440" marR="91440" marT="45720" marB="45720" anchor="ctr">
+                  <a:tcPr anchor="ctr">
                     <a:lnL w="38100" cap="flat" cmpd="sng" algn="ctr">
                       <a:solidFill>
                         <a:srgbClr val="FFFFFF"/>
@@ -17434,7 +17492,7 @@
                     <a:bodyPr/>
                     <a:lstStyle/>
                     <a:p>
-                      <a:pPr algn="ctr" indent="0" marL="0">
+                      <a:pPr marL="0" indent="0" algn="ctr">
                         <a:buNone/>
                       </a:pPr>
                       <a:r>
@@ -17455,7 +17513,7 @@
                       </a:endParaRPr>
                     </a:p>
                   </a:txBody>
-                  <a:tcPr marL="91440" marR="91440" marT="45720" marB="45720" anchor="ctr">
+                  <a:tcPr anchor="ctr">
                     <a:lnL w="38100" cap="flat" cmpd="sng" algn="ctr">
                       <a:solidFill>
                         <a:srgbClr val="FFFFFF"/>
@@ -17497,6 +17555,11 @@
                     </a:solidFill>
                   </a:tcPr>
                 </a:tc>
+                <a:extLst>
+                  <a:ext uri="{0D108BD9-81ED-4DB2-BD59-A6C34878D82A}">
+                    <a16:rowId xmlns:a16="http://schemas.microsoft.com/office/drawing/2014/main" val="10000"/>
+                  </a:ext>
+                </a:extLst>
               </a:tr>
               <a:tr h="1051560">
                 <a:tc>
@@ -17504,7 +17567,7 @@
                     <a:bodyPr/>
                     <a:lstStyle/>
                     <a:p>
-                      <a:pPr algn="ctr" indent="0" marL="0">
+                      <a:pPr marL="0" indent="0" algn="ctr">
                         <a:buNone/>
                       </a:pPr>
                       <a:r>
@@ -17525,7 +17588,7 @@
                       </a:endParaRPr>
                     </a:p>
                   </a:txBody>
-                  <a:tcPr marL="91440" marR="91440" marT="45720" marB="45720" anchor="ctr">
+                  <a:tcPr anchor="ctr">
                     <a:lnL w="38100" cap="flat" cmpd="sng" algn="ctr">
                       <a:solidFill>
                         <a:srgbClr val="FFFFFF"/>
@@ -17572,7 +17635,7 @@
                     <a:bodyPr/>
                     <a:lstStyle/>
                     <a:p>
-                      <a:pPr algn="ctr" indent="0" marL="0">
+                      <a:pPr marL="0" indent="0" algn="ctr">
                         <a:buNone/>
                       </a:pPr>
                       <a:r>
@@ -17593,7 +17656,7 @@
                       </a:endParaRPr>
                     </a:p>
                   </a:txBody>
-                  <a:tcPr marL="91440" marR="91440" marT="45720" marB="45720" anchor="ctr">
+                  <a:tcPr anchor="ctr">
                     <a:lnL w="38100" cap="flat" cmpd="sng" algn="ctr">
                       <a:solidFill>
                         <a:srgbClr val="FFFFFF"/>
@@ -17640,7 +17703,7 @@
                     <a:bodyPr/>
                     <a:lstStyle/>
                     <a:p>
-                      <a:pPr algn="ctr" indent="0" marL="0">
+                      <a:pPr marL="0" indent="0" algn="ctr">
                         <a:buNone/>
                       </a:pPr>
                       <a:r>
@@ -17661,7 +17724,7 @@
                       </a:endParaRPr>
                     </a:p>
                   </a:txBody>
-                  <a:tcPr marL="91440" marR="91440" marT="45720" marB="45720" anchor="ctr">
+                  <a:tcPr anchor="ctr">
                     <a:lnL w="38100" cap="flat" cmpd="sng" algn="ctr">
                       <a:solidFill>
                         <a:srgbClr val="FFFFFF"/>
@@ -17703,6 +17766,11 @@
                     </a:solidFill>
                   </a:tcPr>
                 </a:tc>
+                <a:extLst>
+                  <a:ext uri="{0D108BD9-81ED-4DB2-BD59-A6C34878D82A}">
+                    <a16:rowId xmlns:a16="http://schemas.microsoft.com/office/drawing/2014/main" val="10001"/>
+                  </a:ext>
+                </a:extLst>
               </a:tr>
               <a:tr h="1051560">
                 <a:tc>
@@ -17710,7 +17778,7 @@
                     <a:bodyPr/>
                     <a:lstStyle/>
                     <a:p>
-                      <a:pPr algn="ctr" indent="0" marL="0">
+                      <a:pPr marL="0" indent="0" algn="ctr">
                         <a:buNone/>
                       </a:pPr>
                       <a:r>
@@ -17731,7 +17799,7 @@
                       </a:endParaRPr>
                     </a:p>
                   </a:txBody>
-                  <a:tcPr marL="91440" marR="91440" marT="45720" marB="45720" anchor="ctr">
+                  <a:tcPr anchor="ctr">
                     <a:lnL w="38100" cap="flat" cmpd="sng" algn="ctr">
                       <a:solidFill>
                         <a:srgbClr val="FFFFFF"/>
@@ -17778,7 +17846,7 @@
                     <a:bodyPr/>
                     <a:lstStyle/>
                     <a:p>
-                      <a:pPr algn="ctr" indent="0" marL="0">
+                      <a:pPr marL="0" indent="0" algn="ctr">
                         <a:buNone/>
                       </a:pPr>
                       <a:r>
@@ -17799,7 +17867,7 @@
                       </a:endParaRPr>
                     </a:p>
                   </a:txBody>
-                  <a:tcPr marL="91440" marR="91440" marT="45720" marB="45720" anchor="ctr">
+                  <a:tcPr anchor="ctr">
                     <a:lnL w="38100" cap="flat" cmpd="sng" algn="ctr">
                       <a:solidFill>
                         <a:srgbClr val="FFFFFF"/>
@@ -17846,7 +17914,7 @@
                     <a:bodyPr/>
                     <a:lstStyle/>
                     <a:p>
-                      <a:pPr algn="ctr" indent="0" marL="0">
+                      <a:pPr marL="0" indent="0" algn="ctr">
                         <a:buNone/>
                       </a:pPr>
                       <a:r>
@@ -17867,7 +17935,7 @@
                       </a:endParaRPr>
                     </a:p>
                   </a:txBody>
-                  <a:tcPr marL="91440" marR="91440" marT="45720" marB="45720" anchor="ctr">
+                  <a:tcPr anchor="ctr">
                     <a:lnL w="38100" cap="flat" cmpd="sng" algn="ctr">
                       <a:solidFill>
                         <a:srgbClr val="FFFFFF"/>
@@ -17909,6 +17977,11 @@
                     </a:solidFill>
                   </a:tcPr>
                 </a:tc>
+                <a:extLst>
+                  <a:ext uri="{0D108BD9-81ED-4DB2-BD59-A6C34878D82A}">
+                    <a16:rowId xmlns:a16="http://schemas.microsoft.com/office/drawing/2014/main" val="10002"/>
+                  </a:ext>
+                </a:extLst>
               </a:tr>
             </a:tbl>
           </a:graphicData>
@@ -17935,7 +18008,7 @@
           <a:bodyPr wrap="square" lIns="0" tIns="0" rIns="0" bIns="0" rtlCol="0" anchor="ctr"/>
           <a:lstStyle/>
           <a:p>
-            <a:pPr algn="ctr" indent="0" marL="0">
+            <a:pPr marL="0" indent="0" algn="ctr">
               <a:buNone/>
             </a:pPr>
             <a:r>
@@ -17974,7 +18047,7 @@
           <a:bodyPr wrap="square" lIns="0" tIns="0" rIns="0" bIns="0" rtlCol="0" anchor="ctr"/>
           <a:lstStyle/>
           <a:p>
-            <a:pPr algn="r" indent="0" marL="0">
+            <a:pPr marL="0" indent="0" algn="r">
               <a:buNone/>
             </a:pPr>
             <a:r>
@@ -18008,6 +18081,7 @@
         <a:solidFill>
           <a:srgbClr val="141B41"/>
         </a:solidFill>
+        <a:effectLst/>
       </p:bgPr>
     </p:bg>
     <p:spTree>
@@ -18046,14 +18120,14 @@
       </p:sp>
       <p:pic>
         <p:nvPicPr>
-          <p:cNvPr id="3" name="Image 0" descr="preencoded.png">    </p:cNvPr>
+          <p:cNvPr id="3" name="Image 0" descr="preencoded.png"/>
           <p:cNvPicPr>
             <a:picLocks noChangeAspect="1"/>
           </p:cNvPicPr>
           <p:nvPr/>
         </p:nvPicPr>
         <p:blipFill>
-          <a:blip r:embed="rId1"/>
+          <a:blip r:embed="rId3"/>
           <a:stretch>
             <a:fillRect/>
           </a:stretch>
@@ -18089,11 +18163,11 @@
           <a:bodyPr wrap="square" lIns="0" tIns="0" rIns="0" bIns="0" rtlCol="0" anchor="ctr"/>
           <a:lstStyle/>
           <a:p>
-            <a:pPr indent="0" marL="0">
+            <a:pPr marL="0" indent="0">
               <a:buNone/>
             </a:pPr>
             <a:r>
-              <a:rPr lang="en-US" sz="1200" b="1" spc="150" kern="0" dirty="0">
+              <a:rPr lang="en-US" sz="1200" b="1" kern="0" spc="150" dirty="0">
                 <a:solidFill>
                   <a:srgbClr val="2FE6C7"/>
                 </a:solidFill>
@@ -18128,7 +18202,7 @@
           <a:bodyPr wrap="square" lIns="0" tIns="0" rIns="0" bIns="0" rtlCol="0" anchor="ctr"/>
           <a:lstStyle/>
           <a:p>
-            <a:pPr indent="0" marL="0">
+            <a:pPr marL="0" indent="0">
               <a:buNone/>
             </a:pPr>
             <a:r>
@@ -18169,9 +18243,27 @@
             <a:tbl>
               <a:tblPr/>
               <a:tblGrid>
-                <a:gridCol w="1280160"/>
-                <a:gridCol w="1645920"/>
-                <a:gridCol w="1645920"/>
+                <a:gridCol w="1280160">
+                  <a:extLst>
+                    <a:ext uri="{9D8B030D-6E8A-4147-A177-3AD203B41FA5}">
+                      <a16:colId xmlns:a16="http://schemas.microsoft.com/office/drawing/2014/main" val="20000"/>
+                    </a:ext>
+                  </a:extLst>
+                </a:gridCol>
+                <a:gridCol w="1645920">
+                  <a:extLst>
+                    <a:ext uri="{9D8B030D-6E8A-4147-A177-3AD203B41FA5}">
+                      <a16:colId xmlns:a16="http://schemas.microsoft.com/office/drawing/2014/main" val="20001"/>
+                    </a:ext>
+                  </a:extLst>
+                </a:gridCol>
+                <a:gridCol w="1645920">
+                  <a:extLst>
+                    <a:ext uri="{9D8B030D-6E8A-4147-A177-3AD203B41FA5}">
+                      <a16:colId xmlns:a16="http://schemas.microsoft.com/office/drawing/2014/main" val="20002"/>
+                    </a:ext>
+                  </a:extLst>
+                </a:gridCol>
               </a:tblGrid>
               <a:tr h="457200">
                 <a:tc>
@@ -18179,7 +18271,7 @@
                     <a:bodyPr/>
                     <a:lstStyle/>
                     <a:p>
-                      <a:pPr algn="ctr" indent="0" marL="0">
+                      <a:pPr marL="0" indent="0" algn="ctr">
                         <a:buNone/>
                       </a:pPr>
                       <a:r>
@@ -18200,7 +18292,7 @@
                       </a:endParaRPr>
                     </a:p>
                   </a:txBody>
-                  <a:tcPr marL="91440" marR="91440" marT="45720" marB="45720" anchor="ctr">
+                  <a:tcPr anchor="ctr">
                     <a:lnL w="38100" cap="flat" cmpd="sng" algn="ctr">
                       <a:solidFill>
                         <a:srgbClr val="FFFFFF"/>
@@ -18247,7 +18339,7 @@
                     <a:bodyPr/>
                     <a:lstStyle/>
                     <a:p>
-                      <a:pPr algn="ctr" indent="0" marL="0">
+                      <a:pPr marL="0" indent="0" algn="ctr">
                         <a:buNone/>
                       </a:pPr>
                       <a:r>
@@ -18268,7 +18360,7 @@
                       </a:endParaRPr>
                     </a:p>
                   </a:txBody>
-                  <a:tcPr marL="91440" marR="91440" marT="45720" marB="45720" anchor="ctr">
+                  <a:tcPr anchor="ctr">
                     <a:lnL w="38100" cap="flat" cmpd="sng" algn="ctr">
                       <a:solidFill>
                         <a:srgbClr val="FFFFFF"/>
@@ -18315,7 +18407,7 @@
                     <a:bodyPr/>
                     <a:lstStyle/>
                     <a:p>
-                      <a:pPr algn="ctr" indent="0" marL="0">
+                      <a:pPr marL="0" indent="0" algn="ctr">
                         <a:buNone/>
                       </a:pPr>
                       <a:r>
@@ -18336,7 +18428,7 @@
                       </a:endParaRPr>
                     </a:p>
                   </a:txBody>
-                  <a:tcPr marL="91440" marR="91440" marT="45720" marB="45720" anchor="ctr">
+                  <a:tcPr anchor="ctr">
                     <a:lnL w="38100" cap="flat" cmpd="sng" algn="ctr">
                       <a:solidFill>
                         <a:srgbClr val="FFFFFF"/>
@@ -18378,6 +18470,11 @@
                     </a:solidFill>
                   </a:tcPr>
                 </a:tc>
+                <a:extLst>
+                  <a:ext uri="{0D108BD9-81ED-4DB2-BD59-A6C34878D82A}">
+                    <a16:rowId xmlns:a16="http://schemas.microsoft.com/office/drawing/2014/main" val="10000"/>
+                  </a:ext>
+                </a:extLst>
               </a:tr>
               <a:tr h="1005840">
                 <a:tc>
@@ -18385,7 +18482,7 @@
                     <a:bodyPr/>
                     <a:lstStyle/>
                     <a:p>
-                      <a:pPr algn="ctr" indent="0" marL="0">
+                      <a:pPr marL="0" indent="0" algn="ctr">
                         <a:buNone/>
                       </a:pPr>
                       <a:r>
@@ -18406,7 +18503,7 @@
                       </a:endParaRPr>
                     </a:p>
                   </a:txBody>
-                  <a:tcPr marL="91440" marR="91440" marT="45720" marB="45720" anchor="ctr">
+                  <a:tcPr anchor="ctr">
                     <a:lnL w="38100" cap="flat" cmpd="sng" algn="ctr">
                       <a:solidFill>
                         <a:srgbClr val="FFFFFF"/>
@@ -18453,7 +18550,7 @@
                     <a:bodyPr/>
                     <a:lstStyle/>
                     <a:p>
-                      <a:pPr algn="ctr" indent="0" marL="0">
+                      <a:pPr marL="0" indent="0" algn="ctr">
                         <a:buNone/>
                       </a:pPr>
                       <a:r>
@@ -18474,7 +18571,7 @@
                       </a:endParaRPr>
                     </a:p>
                   </a:txBody>
-                  <a:tcPr marL="91440" marR="91440" marT="45720" marB="45720" anchor="ctr">
+                  <a:tcPr anchor="ctr">
                     <a:lnL w="38100" cap="flat" cmpd="sng" algn="ctr">
                       <a:solidFill>
                         <a:srgbClr val="FFFFFF"/>
@@ -18521,7 +18618,7 @@
                     <a:bodyPr/>
                     <a:lstStyle/>
                     <a:p>
-                      <a:pPr algn="ctr" indent="0" marL="0">
+                      <a:pPr marL="0" indent="0" algn="ctr">
                         <a:buNone/>
                       </a:pPr>
                       <a:r>
@@ -18542,7 +18639,7 @@
                       </a:endParaRPr>
                     </a:p>
                   </a:txBody>
-                  <a:tcPr marL="91440" marR="91440" marT="45720" marB="45720" anchor="ctr">
+                  <a:tcPr anchor="ctr">
                     <a:lnL w="38100" cap="flat" cmpd="sng" algn="ctr">
                       <a:solidFill>
                         <a:srgbClr val="FFFFFF"/>
@@ -18584,6 +18681,11 @@
                     </a:solidFill>
                   </a:tcPr>
                 </a:tc>
+                <a:extLst>
+                  <a:ext uri="{0D108BD9-81ED-4DB2-BD59-A6C34878D82A}">
+                    <a16:rowId xmlns:a16="http://schemas.microsoft.com/office/drawing/2014/main" val="10001"/>
+                  </a:ext>
+                </a:extLst>
               </a:tr>
               <a:tr h="1005840">
                 <a:tc>
@@ -18591,7 +18693,7 @@
                     <a:bodyPr/>
                     <a:lstStyle/>
                     <a:p>
-                      <a:pPr algn="ctr" indent="0" marL="0">
+                      <a:pPr marL="0" indent="0" algn="ctr">
                         <a:buNone/>
                       </a:pPr>
                       <a:r>
@@ -18612,7 +18714,7 @@
                       </a:endParaRPr>
                     </a:p>
                   </a:txBody>
-                  <a:tcPr marL="91440" marR="91440" marT="45720" marB="45720" anchor="ctr">
+                  <a:tcPr anchor="ctr">
                     <a:lnL w="38100" cap="flat" cmpd="sng" algn="ctr">
                       <a:solidFill>
                         <a:srgbClr val="FFFFFF"/>
@@ -18659,7 +18761,7 @@
                     <a:bodyPr/>
                     <a:lstStyle/>
                     <a:p>
-                      <a:pPr algn="ctr" indent="0" marL="0">
+                      <a:pPr marL="0" indent="0" algn="ctr">
                         <a:buNone/>
                       </a:pPr>
                       <a:r>
@@ -18680,7 +18782,7 @@
                       </a:endParaRPr>
                     </a:p>
                   </a:txBody>
-                  <a:tcPr marL="91440" marR="91440" marT="45720" marB="45720" anchor="ctr">
+                  <a:tcPr anchor="ctr">
                     <a:lnL w="38100" cap="flat" cmpd="sng" algn="ctr">
                       <a:solidFill>
                         <a:srgbClr val="FFFFFF"/>
@@ -18727,7 +18829,7 @@
                     <a:bodyPr/>
                     <a:lstStyle/>
                     <a:p>
-                      <a:pPr algn="ctr" indent="0" marL="0">
+                      <a:pPr marL="0" indent="0" algn="ctr">
                         <a:buNone/>
                       </a:pPr>
                       <a:r>
@@ -18748,7 +18850,7 @@
                       </a:endParaRPr>
                     </a:p>
                   </a:txBody>
-                  <a:tcPr marL="91440" marR="91440" marT="45720" marB="45720" anchor="ctr">
+                  <a:tcPr anchor="ctr">
                     <a:lnL w="38100" cap="flat" cmpd="sng" algn="ctr">
                       <a:solidFill>
                         <a:srgbClr val="FFFFFF"/>
@@ -18790,6 +18892,11 @@
                     </a:solidFill>
                   </a:tcPr>
                 </a:tc>
+                <a:extLst>
+                  <a:ext uri="{0D108BD9-81ED-4DB2-BD59-A6C34878D82A}">
+                    <a16:rowId xmlns:a16="http://schemas.microsoft.com/office/drawing/2014/main" val="10002"/>
+                  </a:ext>
+                </a:extLst>
               </a:tr>
             </a:tbl>
           </a:graphicData>
@@ -18816,7 +18923,7 @@
           <a:bodyPr wrap="square" lIns="0" tIns="0" rIns="0" bIns="0" rtlCol="0" anchor="ctr"/>
           <a:lstStyle/>
           <a:p>
-            <a:pPr algn="ctr" indent="0" marL="0">
+            <a:pPr marL="0" indent="0" algn="ctr">
               <a:lnSpc>
                 <a:spcPts val="1900"/>
               </a:lnSpc>
@@ -18880,7 +18987,7 @@
           <a:bodyPr wrap="square" lIns="0" tIns="0" rIns="0" bIns="0" rtlCol="0" anchor="ctr"/>
           <a:lstStyle/>
           <a:p>
-            <a:pPr algn="ctr" indent="0" marL="0">
+            <a:pPr marL="0" indent="0" algn="ctr">
               <a:buNone/>
             </a:pPr>
             <a:r>
@@ -18919,7 +19026,7 @@
           <a:bodyPr wrap="square" lIns="0" tIns="0" rIns="0" bIns="0" rtlCol="0" anchor="ctr"/>
           <a:lstStyle/>
           <a:p>
-            <a:pPr algn="r" indent="0" marL="0">
+            <a:pPr marL="0" indent="0" algn="r">
               <a:buNone/>
             </a:pPr>
             <a:r>
@@ -18953,6 +19060,7 @@
         <a:solidFill>
           <a:srgbClr val="FFFFFF"/>
         </a:solidFill>
+        <a:effectLst/>
       </p:bgPr>
     </p:bg>
     <p:spTree>
@@ -18990,11 +19098,11 @@
           <a:bodyPr wrap="square" lIns="0" tIns="0" rIns="0" bIns="0" rtlCol="0" anchor="ctr"/>
           <a:lstStyle/>
           <a:p>
-            <a:pPr algn="l" indent="0" marL="0">
+            <a:pPr marL="0" indent="0" algn="l">
               <a:buNone/>
             </a:pPr>
             <a:r>
-              <a:rPr lang="en-US" sz="1200" b="1" spc="200" kern="0" dirty="0">
+              <a:rPr lang="en-US" sz="1200" b="1" kern="0" spc="200" dirty="0">
                 <a:solidFill>
                   <a:srgbClr val="6C4BC1"/>
                 </a:solidFill>
@@ -19029,7 +19137,7 @@
           <a:bodyPr wrap="square" lIns="0" tIns="0" rIns="0" bIns="0" rtlCol="0" anchor="ctr"/>
           <a:lstStyle/>
           <a:p>
-            <a:pPr indent="0" marL="0">
+            <a:pPr marL="0" indent="0">
               <a:buNone/>
             </a:pPr>
             <a:r>
@@ -19089,14 +19197,14 @@
       </p:sp>
       <p:pic>
         <p:nvPicPr>
-          <p:cNvPr id="6" name="Image 0" descr="preencoded.png">    </p:cNvPr>
+          <p:cNvPr id="6" name="Image 0" descr="preencoded.png"/>
           <p:cNvPicPr>
             <a:picLocks noChangeAspect="1"/>
           </p:cNvPicPr>
           <p:nvPr/>
         </p:nvPicPr>
         <p:blipFill>
-          <a:blip r:embed="rId1"/>
+          <a:blip r:embed="rId3"/>
           <a:stretch>
             <a:fillRect/>
           </a:stretch>
@@ -19132,7 +19240,7 @@
           <a:bodyPr wrap="square" lIns="0" tIns="0" rIns="0" bIns="0" rtlCol="0" anchor="ctr"/>
           <a:lstStyle/>
           <a:p>
-            <a:pPr algn="ctr" indent="0" marL="0">
+            <a:pPr marL="0" indent="0" algn="ctr">
               <a:buNone/>
             </a:pPr>
             <a:r>
@@ -19171,7 +19279,7 @@
           <a:bodyPr wrap="square" lIns="0" tIns="0" rIns="0" bIns="0" rtlCol="0" anchor="ctr"/>
           <a:lstStyle/>
           <a:p>
-            <a:pPr algn="ctr" indent="0" marL="0">
+            <a:pPr marL="0" indent="0" algn="ctr">
               <a:lnSpc>
                 <a:spcPts val="1300"/>
               </a:lnSpc>
@@ -19235,11 +19343,11 @@
           <a:bodyPr wrap="square" lIns="0" tIns="0" rIns="0" bIns="0" rtlCol="0" anchor="ctr"/>
           <a:lstStyle/>
           <a:p>
-            <a:pPr algn="ctr" indent="0" marL="0">
+            <a:pPr marL="0" indent="0" algn="ctr">
               <a:buNone/>
             </a:pPr>
             <a:r>
-              <a:rPr lang="en-US" sz="950" b="1" spc="50" kern="0" dirty="0">
+              <a:rPr lang="en-US" sz="950" b="1" kern="0" spc="50" dirty="0">
                 <a:solidFill>
                   <a:srgbClr val="141B41"/>
                 </a:solidFill>
@@ -19275,14 +19383,14 @@
       </p:sp>
       <p:pic>
         <p:nvPicPr>
-          <p:cNvPr id="12" name="Image 1" descr="preencoded.png">    </p:cNvPr>
+          <p:cNvPr id="12" name="Image 1" descr="preencoded.png"/>
           <p:cNvPicPr>
             <a:picLocks noChangeAspect="1"/>
           </p:cNvPicPr>
           <p:nvPr/>
         </p:nvPicPr>
         <p:blipFill>
-          <a:blip r:embed="rId2"/>
+          <a:blip r:embed="rId4"/>
           <a:stretch>
             <a:fillRect/>
           </a:stretch>
@@ -19318,7 +19426,7 @@
           <a:bodyPr wrap="square" lIns="0" tIns="0" rIns="0" bIns="0" rtlCol="0" anchor="ctr"/>
           <a:lstStyle/>
           <a:p>
-            <a:pPr algn="ctr" indent="0" marL="0">
+            <a:pPr marL="0" indent="0" algn="ctr">
               <a:buNone/>
             </a:pPr>
             <a:r>
@@ -19357,7 +19465,7 @@
           <a:bodyPr wrap="square" lIns="0" tIns="0" rIns="0" bIns="0" rtlCol="0" anchor="ctr"/>
           <a:lstStyle/>
           <a:p>
-            <a:pPr algn="ctr" indent="0" marL="0">
+            <a:pPr marL="0" indent="0" algn="ctr">
               <a:buNone/>
             </a:pPr>
             <a:r>
@@ -19402,14 +19510,14 @@
       </p:sp>
       <p:pic>
         <p:nvPicPr>
-          <p:cNvPr id="16" name="Image 2" descr="preencoded.png">    </p:cNvPr>
+          <p:cNvPr id="16" name="Image 2" descr="preencoded.png"/>
           <p:cNvPicPr>
             <a:picLocks noChangeAspect="1"/>
           </p:cNvPicPr>
           <p:nvPr/>
         </p:nvPicPr>
         <p:blipFill>
-          <a:blip r:embed="rId3"/>
+          <a:blip r:embed="rId5"/>
           <a:stretch>
             <a:fillRect/>
           </a:stretch>
@@ -19445,7 +19553,7 @@
           <a:bodyPr wrap="square" lIns="0" tIns="0" rIns="0" bIns="0" rtlCol="0" anchor="ctr"/>
           <a:lstStyle/>
           <a:p>
-            <a:pPr algn="ctr" indent="0" marL="0">
+            <a:pPr marL="0" indent="0" algn="ctr">
               <a:buNone/>
             </a:pPr>
             <a:r>
@@ -19484,7 +19592,7 @@
           <a:bodyPr wrap="square" lIns="0" tIns="0" rIns="0" bIns="0" rtlCol="0" anchor="ctr"/>
           <a:lstStyle/>
           <a:p>
-            <a:pPr algn="ctr" indent="0" marL="0">
+            <a:pPr marL="0" indent="0" algn="ctr">
               <a:lnSpc>
                 <a:spcPts val="1300"/>
               </a:lnSpc>
@@ -19526,7 +19634,7 @@
           <a:bodyPr wrap="square" lIns="0" tIns="0" rIns="0" bIns="0" rtlCol="0" anchor="ctr"/>
           <a:lstStyle/>
           <a:p>
-            <a:pPr algn="ctr" indent="0" marL="0">
+            <a:pPr marL="0" indent="0" algn="ctr">
               <a:buNone/>
             </a:pPr>
             <a:r>
@@ -19565,7 +19673,7 @@
           <a:bodyPr wrap="square" lIns="0" tIns="0" rIns="0" bIns="0" rtlCol="0" anchor="ctr"/>
           <a:lstStyle/>
           <a:p>
-            <a:pPr algn="r" indent="0" marL="0">
+            <a:pPr marL="0" indent="0" algn="r">
               <a:buNone/>
             </a:pPr>
             <a:r>
@@ -19599,6 +19707,7 @@
         <a:solidFill>
           <a:srgbClr val="FFFFFF"/>
         </a:solidFill>
+        <a:effectLst/>
       </p:bgPr>
     </p:bg>
     <p:spTree>
@@ -19636,11 +19745,11 @@
           <a:bodyPr wrap="square" lIns="0" tIns="0" rIns="0" bIns="0" rtlCol="0" anchor="ctr"/>
           <a:lstStyle/>
           <a:p>
-            <a:pPr algn="l" indent="0" marL="0">
+            <a:pPr marL="0" indent="0" algn="l">
               <a:buNone/>
             </a:pPr>
             <a:r>
-              <a:rPr lang="en-US" sz="1200" b="1" spc="200" kern="0" dirty="0">
+              <a:rPr lang="en-US" sz="1200" b="1" kern="0" spc="200" dirty="0">
                 <a:solidFill>
                   <a:srgbClr val="6C4BC1"/>
                 </a:solidFill>
@@ -19675,7 +19784,7 @@
           <a:bodyPr wrap="square" lIns="0" tIns="0" rIns="0" bIns="0" rtlCol="0" anchor="ctr"/>
           <a:lstStyle/>
           <a:p>
-            <a:pPr indent="0" marL="0">
+            <a:pPr marL="0" indent="0">
               <a:buNone/>
             </a:pPr>
             <a:r>
@@ -19714,7 +19823,7 @@
           <a:bodyPr wrap="square" lIns="0" tIns="0" rIns="0" bIns="0" rtlCol="0" anchor="ctr"/>
           <a:lstStyle/>
           <a:p>
-            <a:pPr indent="0" marL="0">
+            <a:pPr marL="0" indent="0">
               <a:buNone/>
             </a:pPr>
             <a:r>
@@ -19776,14 +19885,14 @@
       </p:sp>
       <p:pic>
         <p:nvPicPr>
-          <p:cNvPr id="7" name="Image 0" descr="preencoded.png">    </p:cNvPr>
+          <p:cNvPr id="7" name="Image 0" descr="preencoded.png"/>
           <p:cNvPicPr>
             <a:picLocks noChangeAspect="1"/>
           </p:cNvPicPr>
           <p:nvPr/>
         </p:nvPicPr>
         <p:blipFill>
-          <a:blip r:embed="rId1"/>
+          <a:blip r:embed="rId3"/>
           <a:stretch>
             <a:fillRect/>
           </a:stretch>
@@ -19819,7 +19928,7 @@
           <a:bodyPr wrap="square" lIns="0" tIns="0" rIns="0" bIns="0" rtlCol="0" anchor="ctr"/>
           <a:lstStyle/>
           <a:p>
-            <a:pPr indent="0" marL="0">
+            <a:pPr marL="0" indent="0">
               <a:lnSpc>
                 <a:spcPts val="1500"/>
               </a:lnSpc>
@@ -19861,7 +19970,7 @@
           <a:bodyPr wrap="square" lIns="0" tIns="0" rIns="0" bIns="0" rtlCol="0" anchor="ctr"/>
           <a:lstStyle/>
           <a:p>
-            <a:pPr indent="0" marL="0">
+            <a:pPr marL="0" indent="0">
               <a:lnSpc>
                 <a:spcPts val="1700"/>
               </a:lnSpc>
@@ -19926,14 +20035,14 @@
       </p:sp>
       <p:pic>
         <p:nvPicPr>
-          <p:cNvPr id="12" name="Image 1" descr="preencoded.png">    </p:cNvPr>
+          <p:cNvPr id="12" name="Image 1" descr="preencoded.png"/>
           <p:cNvPicPr>
             <a:picLocks noChangeAspect="1"/>
           </p:cNvPicPr>
           <p:nvPr/>
         </p:nvPicPr>
         <p:blipFill>
-          <a:blip r:embed="rId2"/>
+          <a:blip r:embed="rId3"/>
           <a:stretch>
             <a:fillRect/>
           </a:stretch>
@@ -19969,7 +20078,7 @@
           <a:bodyPr wrap="square" lIns="0" tIns="0" rIns="0" bIns="0" rtlCol="0" anchor="ctr"/>
           <a:lstStyle/>
           <a:p>
-            <a:pPr indent="0" marL="0">
+            <a:pPr marL="0" indent="0">
               <a:lnSpc>
                 <a:spcPts val="1500"/>
               </a:lnSpc>
@@ -20011,7 +20120,7 @@
           <a:bodyPr wrap="square" lIns="0" tIns="0" rIns="0" bIns="0" rtlCol="0" anchor="ctr"/>
           <a:lstStyle/>
           <a:p>
-            <a:pPr indent="0" marL="0">
+            <a:pPr marL="0" indent="0">
               <a:lnSpc>
                 <a:spcPts val="1700"/>
               </a:lnSpc>
@@ -20076,7 +20185,7 @@
       </p:sp>
       <p:pic>
         <p:nvPicPr>
-          <p:cNvPr id="17" name="Image 2" descr="preencoded.png">    </p:cNvPr>
+          <p:cNvPr id="17" name="Image 2" descr="preencoded.png"/>
           <p:cNvPicPr>
             <a:picLocks noChangeAspect="1"/>
           </p:cNvPicPr>
@@ -20119,7 +20228,7 @@
           <a:bodyPr wrap="square" lIns="0" tIns="0" rIns="0" bIns="0" rtlCol="0" anchor="ctr"/>
           <a:lstStyle/>
           <a:p>
-            <a:pPr indent="0" marL="0">
+            <a:pPr marL="0" indent="0">
               <a:lnSpc>
                 <a:spcPts val="1500"/>
               </a:lnSpc>
@@ -20161,7 +20270,7 @@
           <a:bodyPr wrap="square" lIns="0" tIns="0" rIns="0" bIns="0" rtlCol="0" anchor="ctr"/>
           <a:lstStyle/>
           <a:p>
-            <a:pPr indent="0" marL="0">
+            <a:pPr marL="0" indent="0">
               <a:lnSpc>
                 <a:spcPts val="1700"/>
               </a:lnSpc>
@@ -20203,7 +20312,7 @@
           <a:bodyPr wrap="square" lIns="0" tIns="0" rIns="0" bIns="0" rtlCol="0" anchor="ctr"/>
           <a:lstStyle/>
           <a:p>
-            <a:pPr algn="r" indent="0" marL="0">
+            <a:pPr marL="0" indent="0" algn="r">
               <a:buNone/>
             </a:pPr>
             <a:r>
@@ -20237,6 +20346,7 @@
         <a:solidFill>
           <a:srgbClr val="FFFFFF"/>
         </a:solidFill>
+        <a:effectLst/>
       </p:bgPr>
     </p:bg>
     <p:spTree>
@@ -20274,11 +20384,11 @@
           <a:bodyPr wrap="square" lIns="0" tIns="0" rIns="0" bIns="0" rtlCol="0" anchor="ctr"/>
           <a:lstStyle/>
           <a:p>
-            <a:pPr algn="l" indent="0" marL="0">
+            <a:pPr marL="0" indent="0" algn="l">
               <a:buNone/>
             </a:pPr>
             <a:r>
-              <a:rPr lang="en-US" sz="1200" b="1" spc="200" kern="0" dirty="0">
+              <a:rPr lang="en-US" sz="1200" b="1" kern="0" spc="200" dirty="0">
                 <a:solidFill>
                   <a:srgbClr val="6C4BC1"/>
                 </a:solidFill>
@@ -20313,7 +20423,7 @@
           <a:bodyPr wrap="square" lIns="0" tIns="0" rIns="0" bIns="0" rtlCol="0" anchor="ctr"/>
           <a:lstStyle/>
           <a:p>
-            <a:pPr indent="0" marL="0">
+            <a:pPr marL="0" indent="0">
               <a:buNone/>
             </a:pPr>
             <a:r>
@@ -20375,14 +20485,14 @@
       </p:sp>
       <p:pic>
         <p:nvPicPr>
-          <p:cNvPr id="6" name="Image 0" descr="preencoded.png">    </p:cNvPr>
+          <p:cNvPr id="6" name="Image 0" descr="preencoded.png"/>
           <p:cNvPicPr>
             <a:picLocks noChangeAspect="1"/>
           </p:cNvPicPr>
           <p:nvPr/>
         </p:nvPicPr>
         <p:blipFill>
-          <a:blip r:embed="rId1"/>
+          <a:blip r:embed="rId3"/>
           <a:stretch>
             <a:fillRect/>
           </a:stretch>
@@ -20418,7 +20528,7 @@
           <a:bodyPr wrap="square" lIns="0" tIns="0" rIns="0" bIns="0" rtlCol="0" anchor="ctr"/>
           <a:lstStyle/>
           <a:p>
-            <a:pPr indent="0" marL="0">
+            <a:pPr marL="0" indent="0">
               <a:buNone/>
             </a:pPr>
             <a:r>
@@ -20457,7 +20567,7 @@
           <a:bodyPr wrap="square" lIns="0" tIns="0" rIns="0" bIns="0" rtlCol="0" anchor="ctr"/>
           <a:lstStyle/>
           <a:p>
-            <a:pPr indent="0" marL="0">
+            <a:pPr marL="0" indent="0">
               <a:lnSpc>
                 <a:spcPts val="1900"/>
               </a:lnSpc>
@@ -20474,7 +20584,7 @@
                 <a:latin typeface="Calibri" pitchFamily="34" charset="0"/>
                 <a:ea typeface="Calibri" pitchFamily="34" charset="-122"/>
                 <a:cs typeface="Calibri" pitchFamily="34" charset="-120"/>
-                <a:hlinkClick r:id="rId2" invalidUrl="" action="" tgtFrame="" tooltip="" history="1" highlightClick="0" endSnd="0">
+                <a:hlinkClick r:id="rId4">
                   <a:extLst>
                     <a:ext uri="{A12FA001-AC4F-418D-AE19-62706E023703}">
                       <ahyp:hlinkClr xmlns:ahyp="http://schemas.microsoft.com/office/drawing/2018/hyperlinkcolor" val="tx"/>
@@ -20484,15 +20594,6 @@
               </a:rPr>
               <a:t>sympy.logic — simplificação simbólica</a:t>
             </a:r>
-            <a:pPr indent="0" marL="0">
-              <a:lnSpc>
-                <a:spcPts val="1900"/>
-              </a:lnSpc>
-              <a:spcAft>
-                <a:spcPts val="1200"/>
-              </a:spcAft>
-              <a:buNone/>
-            </a:pPr>
             <a:r>
               <a:rPr lang="en-US" sz="1250" dirty="0">
                 <a:solidFill>
@@ -20552,14 +20653,14 @@
       </p:sp>
       <p:pic>
         <p:nvPicPr>
-          <p:cNvPr id="11" name="Image 1" descr="preencoded.png">    </p:cNvPr>
+          <p:cNvPr id="11" name="Image 1" descr="preencoded.png"/>
           <p:cNvPicPr>
             <a:picLocks noChangeAspect="1"/>
           </p:cNvPicPr>
           <p:nvPr/>
         </p:nvPicPr>
         <p:blipFill>
-          <a:blip r:embed="rId3"/>
+          <a:blip r:embed="rId5"/>
           <a:stretch>
             <a:fillRect/>
           </a:stretch>
@@ -20595,7 +20696,7 @@
           <a:bodyPr wrap="square" lIns="0" tIns="0" rIns="0" bIns="0" rtlCol="0" anchor="ctr"/>
           <a:lstStyle/>
           <a:p>
-            <a:pPr indent="0" marL="0">
+            <a:pPr marL="0" indent="0">
               <a:buNone/>
             </a:pPr>
             <a:r>
@@ -20634,7 +20735,7 @@
           <a:bodyPr wrap="square" lIns="0" tIns="0" rIns="0" bIns="0" rtlCol="0" anchor="ctr"/>
           <a:lstStyle/>
           <a:p>
-            <a:pPr indent="0" marL="0">
+            <a:pPr marL="0" indent="0">
               <a:lnSpc>
                 <a:spcPts val="1900"/>
               </a:lnSpc>
@@ -20651,7 +20752,7 @@
                 <a:latin typeface="Calibri" pitchFamily="34" charset="0"/>
                 <a:ea typeface="Calibri" pitchFamily="34" charset="-122"/>
                 <a:cs typeface="Calibri" pitchFamily="34" charset="-120"/>
-                <a:hlinkClick r:id="rId4" invalidUrl="" action="" tgtFrame="" tooltip="" history="1" highlightClick="0" endSnd="0">
+                <a:hlinkClick r:id="rId6">
                   <a:extLst>
                     <a:ext uri="{A12FA001-AC4F-418D-AE19-62706E023703}">
                       <ahyp:hlinkClr xmlns:ahyp="http://schemas.microsoft.com/office/drawing/2018/hyperlinkcolor" val="tx"/>
@@ -20661,15 +20762,6 @@
               </a:rPr>
               <a:t>Mapas de Karnaugh — 2, 3 e 4 variáveis</a:t>
             </a:r>
-            <a:pPr indent="0" marL="0">
-              <a:lnSpc>
-                <a:spcPts val="1900"/>
-              </a:lnSpc>
-              <a:spcAft>
-                <a:spcPts val="1200"/>
-              </a:spcAft>
-              <a:buNone/>
-            </a:pPr>
             <a:r>
               <a:rPr lang="en-US" sz="1250" dirty="0">
                 <a:solidFill>
@@ -20684,7 +20776,7 @@
             <a:endParaRPr lang="en-US" sz="1250" dirty="0"/>
           </a:p>
           <a:p>
-            <a:pPr indent="0" marL="0">
+            <a:pPr marL="0" indent="0">
               <a:lnSpc>
                 <a:spcPts val="1900"/>
               </a:lnSpc>
@@ -20701,7 +20793,7 @@
                 <a:latin typeface="Calibri" pitchFamily="34" charset="0"/>
                 <a:ea typeface="Calibri" pitchFamily="34" charset="-122"/>
                 <a:cs typeface="Calibri" pitchFamily="34" charset="-120"/>
-                <a:hlinkClick r:id="rId5" invalidUrl="" action="" tgtFrame="" tooltip="" history="1" highlightClick="0" endSnd="0">
+                <a:hlinkClick r:id="rId7">
                   <a:extLst>
                     <a:ext uri="{A12FA001-AC4F-418D-AE19-62706E023703}">
                       <ahyp:hlinkClr xmlns:ahyp="http://schemas.microsoft.com/office/drawing/2018/hyperlinkcolor" val="tx"/>
@@ -20711,15 +20803,6 @@
               </a:rPr>
               <a:t>Condições "don't care"</a:t>
             </a:r>
-            <a:pPr indent="0" marL="0">
-              <a:lnSpc>
-                <a:spcPts val="1900"/>
-              </a:lnSpc>
-              <a:spcAft>
-                <a:spcPts val="1200"/>
-              </a:spcAft>
-              <a:buNone/>
-            </a:pPr>
             <a:r>
               <a:rPr lang="en-US" sz="1250" dirty="0">
                 <a:solidFill>
@@ -20756,7 +20839,7 @@
           <a:bodyPr wrap="square" lIns="0" tIns="0" rIns="0" bIns="0" rtlCol="0" anchor="ctr"/>
           <a:lstStyle/>
           <a:p>
-            <a:pPr algn="r" indent="0" marL="0">
+            <a:pPr marL="0" indent="0" algn="r">
               <a:buNone/>
             </a:pPr>
             <a:r>
@@ -20790,6 +20873,7 @@
         <a:solidFill>
           <a:srgbClr val="FFFFFF"/>
         </a:solidFill>
+        <a:effectLst/>
       </p:bgPr>
     </p:bg>
     <p:spTree>
@@ -20827,11 +20911,11 @@
           <a:bodyPr wrap="square" lIns="0" tIns="0" rIns="0" bIns="0" rtlCol="0" anchor="ctr"/>
           <a:lstStyle/>
           <a:p>
-            <a:pPr algn="l" indent="0" marL="0">
+            <a:pPr marL="0" indent="0" algn="l">
               <a:buNone/>
             </a:pPr>
             <a:r>
-              <a:rPr lang="en-US" sz="1200" b="1" spc="200" kern="0" dirty="0">
+              <a:rPr lang="en-US" sz="1200" b="1" kern="0" spc="200" dirty="0">
                 <a:solidFill>
                   <a:srgbClr val="6C4BC1"/>
                 </a:solidFill>
@@ -20866,7 +20950,7 @@
           <a:bodyPr wrap="square" lIns="0" tIns="0" rIns="0" bIns="0" rtlCol="0" anchor="ctr"/>
           <a:lstStyle/>
           <a:p>
-            <a:pPr indent="0" marL="0">
+            <a:pPr marL="0" indent="0">
               <a:buNone/>
             </a:pPr>
             <a:r>
@@ -20905,7 +20989,7 @@
           <a:bodyPr wrap="square" lIns="0" tIns="0" rIns="0" bIns="0" rtlCol="0" anchor="ctr"/>
           <a:lstStyle/>
           <a:p>
-            <a:pPr indent="0" marL="0">
+            <a:pPr marL="0" indent="0">
               <a:buNone/>
             </a:pPr>
             <a:r>
@@ -20966,7 +21050,7 @@
           <a:bodyPr wrap="square" lIns="0" tIns="0" rIns="0" bIns="0" rtlCol="0" anchor="ctr"/>
           <a:lstStyle/>
           <a:p>
-            <a:pPr algn="ctr" indent="0" marL="0">
+            <a:pPr marL="0" indent="0" algn="ctr">
               <a:buNone/>
             </a:pPr>
             <a:r>
@@ -21005,7 +21089,7 @@
           <a:bodyPr wrap="square" lIns="0" tIns="0" rIns="0" bIns="0" rtlCol="0" anchor="ctr"/>
           <a:lstStyle/>
           <a:p>
-            <a:pPr algn="ctr" indent="0" marL="0">
+            <a:pPr marL="0" indent="0" algn="ctr">
               <a:buNone/>
             </a:pPr>
             <a:r>
@@ -21045,14 +21129,14 @@
       </p:sp>
       <p:pic>
         <p:nvPicPr>
-          <p:cNvPr id="9" name="Image 0" descr="preencoded.png">    </p:cNvPr>
+          <p:cNvPr id="9" name="Image 0" descr="preencoded.png"/>
           <p:cNvPicPr>
             <a:picLocks noChangeAspect="1"/>
           </p:cNvPicPr>
           <p:nvPr/>
         </p:nvPicPr>
         <p:blipFill>
-          <a:blip r:embed="rId1"/>
+          <a:blip r:embed="rId3"/>
           <a:stretch>
             <a:fillRect/>
           </a:stretch>
@@ -21088,7 +21172,7 @@
           <a:bodyPr wrap="square" lIns="0" tIns="0" rIns="0" bIns="0" rtlCol="0" anchor="ctr"/>
           <a:lstStyle/>
           <a:p>
-            <a:pPr indent="0" marL="0">
+            <a:pPr marL="0" indent="0">
               <a:buNone/>
             </a:pPr>
             <a:r>
@@ -21127,7 +21211,7 @@
           <a:bodyPr wrap="square" lIns="0" tIns="0" rIns="0" bIns="0" rtlCol="0" anchor="ctr"/>
           <a:lstStyle/>
           <a:p>
-            <a:pPr algn="r" indent="0" marL="0">
+            <a:pPr marL="0" indent="0" algn="r">
               <a:buNone/>
             </a:pPr>
             <a:r>
@@ -21161,6 +21245,7 @@
         <a:solidFill>
           <a:srgbClr val="141B41"/>
         </a:solidFill>
+        <a:effectLst/>
       </p:bgPr>
     </p:bg>
     <p:spTree>
@@ -21247,14 +21332,14 @@
       </p:sp>
       <p:pic>
         <p:nvPicPr>
-          <p:cNvPr id="5" name="Image 0" descr="preencoded.png">    </p:cNvPr>
+          <p:cNvPr id="5" name="Image 0" descr="preencoded.png"/>
           <p:cNvPicPr>
             <a:picLocks noChangeAspect="1"/>
           </p:cNvPicPr>
           <p:nvPr/>
         </p:nvPicPr>
         <p:blipFill>
-          <a:blip r:embed="rId1"/>
+          <a:blip r:embed="rId3"/>
           <a:stretch>
             <a:fillRect/>
           </a:stretch>
@@ -21290,11 +21375,11 @@
           <a:bodyPr wrap="square" lIns="0" tIns="0" rIns="0" bIns="0" rtlCol="0" anchor="ctr"/>
           <a:lstStyle/>
           <a:p>
-            <a:pPr indent="0" marL="0">
+            <a:pPr marL="0" indent="0">
               <a:buNone/>
             </a:pPr>
             <a:r>
-              <a:rPr lang="en-US" sz="1300" b="1" spc="300" kern="0" dirty="0">
+              <a:rPr lang="en-US" sz="1300" b="1" kern="0" spc="300" dirty="0">
                 <a:solidFill>
                   <a:srgbClr val="2FE6C7"/>
                 </a:solidFill>
@@ -21329,7 +21414,7 @@
           <a:bodyPr wrap="square" lIns="0" tIns="0" rIns="0" bIns="0" rtlCol="0" anchor="ctr"/>
           <a:lstStyle/>
           <a:p>
-            <a:pPr indent="0" marL="0">
+            <a:pPr marL="0" indent="0">
               <a:buNone/>
             </a:pPr>
             <a:r>
@@ -21368,7 +21453,7 @@
           <a:bodyPr wrap="square" lIns="0" tIns="0" rIns="0" bIns="0" rtlCol="0" anchor="ctr"/>
           <a:lstStyle/>
           <a:p>
-            <a:pPr indent="0" marL="0">
+            <a:pPr marL="0" indent="0">
               <a:lnSpc>
                 <a:spcPts val="3800"/>
               </a:lnSpc>
@@ -21388,7 +21473,7 @@
             <a:endParaRPr lang="en-US" sz="3200" dirty="0"/>
           </a:p>
           <a:p>
-            <a:pPr indent="0" marL="0">
+            <a:pPr marL="0" indent="0">
               <a:lnSpc>
                 <a:spcPts val="3800"/>
               </a:lnSpc>
@@ -21430,7 +21515,7 @@
           <a:bodyPr wrap="square" lIns="0" tIns="0" rIns="0" bIns="0" rtlCol="0" anchor="ctr"/>
           <a:lstStyle/>
           <a:p>
-            <a:pPr indent="0" marL="0">
+            <a:pPr marL="0" indent="0">
               <a:lnSpc>
                 <a:spcPts val="2000"/>
               </a:lnSpc>
@@ -21472,11 +21557,11 @@
           <a:bodyPr wrap="square" lIns="0" tIns="0" rIns="0" bIns="0" rtlCol="0" anchor="ctr"/>
           <a:lstStyle/>
           <a:p>
-            <a:pPr indent="0" marL="0">
+            <a:pPr marL="0" indent="0">
               <a:buNone/>
             </a:pPr>
             <a:r>
-              <a:rPr lang="en-US" sz="1150" spc="100" kern="0" dirty="0">
+              <a:rPr lang="en-US" sz="1150" kern="0" spc="100" dirty="0">
                 <a:solidFill>
                   <a:srgbClr val="6F76B0"/>
                 </a:solidFill>
@@ -21506,6 +21591,7 @@
         <a:solidFill>
           <a:srgbClr val="FFFFFF"/>
         </a:solidFill>
+        <a:effectLst/>
       </p:bgPr>
     </p:bg>
     <p:spTree>
@@ -21543,11 +21629,11 @@
           <a:bodyPr wrap="square" lIns="0" tIns="0" rIns="0" bIns="0" rtlCol="0" anchor="ctr"/>
           <a:lstStyle/>
           <a:p>
-            <a:pPr algn="l" indent="0" marL="0">
+            <a:pPr marL="0" indent="0" algn="l">
               <a:buNone/>
             </a:pPr>
             <a:r>
-              <a:rPr lang="en-US" sz="1200" b="1" spc="200" kern="0" dirty="0">
+              <a:rPr lang="en-US" sz="1200" b="1" kern="0" spc="200" dirty="0">
                 <a:solidFill>
                   <a:srgbClr val="6C4BC1"/>
                 </a:solidFill>
@@ -21583,14 +21669,14 @@
       </p:sp>
       <p:pic>
         <p:nvPicPr>
-          <p:cNvPr id="4" name="Image 0" descr="preencoded.png">    </p:cNvPr>
+          <p:cNvPr id="4" name="Image 0" descr="preencoded.png"/>
           <p:cNvPicPr>
             <a:picLocks noChangeAspect="1"/>
           </p:cNvPicPr>
           <p:nvPr/>
         </p:nvPicPr>
         <p:blipFill>
-          <a:blip r:embed="rId1"/>
+          <a:blip r:embed="rId3"/>
           <a:stretch>
             <a:fillRect/>
           </a:stretch>
@@ -21626,7 +21712,7 @@
           <a:bodyPr wrap="square" lIns="0" tIns="0" rIns="0" bIns="0" rtlCol="0" anchor="ctr"/>
           <a:lstStyle/>
           <a:p>
-            <a:pPr indent="0" marL="0">
+            <a:pPr marL="0" indent="0">
               <a:buNone/>
             </a:pPr>
             <a:r>
@@ -21665,7 +21751,7 @@
           <a:bodyPr wrap="square" lIns="0" tIns="0" rIns="0" bIns="0" rtlCol="0" anchor="ctr"/>
           <a:lstStyle/>
           <a:p>
-            <a:pPr indent="0" marL="0">
+            <a:pPr marL="0" indent="0">
               <a:lnSpc>
                 <a:spcPts val="2000"/>
               </a:lnSpc>
@@ -21729,7 +21815,7 @@
           <a:bodyPr wrap="square" lIns="0" tIns="0" rIns="0" bIns="0" rtlCol="0" anchor="ctr"/>
           <a:lstStyle/>
           <a:p>
-            <a:pPr indent="0" marL="0">
+            <a:pPr marL="0" indent="0">
               <a:buNone/>
             </a:pPr>
             <a:r>
@@ -21768,7 +21854,7 @@
           <a:bodyPr wrap="square" lIns="0" tIns="0" rIns="0" bIns="0" rtlCol="0" anchor="ctr"/>
           <a:lstStyle/>
           <a:p>
-            <a:pPr indent="0" marL="0">
+            <a:pPr marL="0" indent="0">
               <a:buNone/>
             </a:pPr>
             <a:r>
@@ -21782,9 +21868,6 @@
               </a:rPr>
               <a:t>mintermo: </a:t>
             </a:r>
-            <a:pPr indent="0" marL="0">
-              <a:buNone/>
-            </a:pPr>
             <a:r>
               <a:rPr lang="en-US" sz="2400" b="1" dirty="0">
                 <a:solidFill>
@@ -21843,7 +21926,7 @@
           <a:bodyPr wrap="square" lIns="0" tIns="0" rIns="0" bIns="0" rtlCol="0" anchor="ctr"/>
           <a:lstStyle/>
           <a:p>
-            <a:pPr indent="0" marL="0">
+            <a:pPr marL="0" indent="0">
               <a:lnSpc>
                 <a:spcPts val="2000"/>
               </a:lnSpc>
@@ -21885,7 +21968,7 @@
           <a:bodyPr wrap="square" lIns="0" tIns="0" rIns="0" bIns="0" rtlCol="0" anchor="ctr"/>
           <a:lstStyle/>
           <a:p>
-            <a:pPr algn="r" indent="0" marL="0">
+            <a:pPr marL="0" indent="0" algn="r">
               <a:buNone/>
             </a:pPr>
             <a:r>
@@ -21919,6 +22002,7 @@
         <a:solidFill>
           <a:srgbClr val="FFFFFF"/>
         </a:solidFill>
+        <a:effectLst/>
       </p:bgPr>
     </p:bg>
     <p:spTree>
@@ -21956,11 +22040,11 @@
           <a:bodyPr wrap="square" lIns="0" tIns="0" rIns="0" bIns="0" rtlCol="0" anchor="ctr"/>
           <a:lstStyle/>
           <a:p>
-            <a:pPr algn="l" indent="0" marL="0">
+            <a:pPr marL="0" indent="0" algn="l">
               <a:buNone/>
             </a:pPr>
             <a:r>
-              <a:rPr lang="en-US" sz="1200" b="1" spc="200" kern="0" dirty="0">
+              <a:rPr lang="en-US" sz="1200" b="1" kern="0" spc="200" dirty="0">
                 <a:solidFill>
                   <a:srgbClr val="6C4BC1"/>
                 </a:solidFill>
@@ -21995,7 +22079,7 @@
           <a:bodyPr wrap="square" lIns="0" tIns="0" rIns="0" bIns="0" rtlCol="0" anchor="ctr"/>
           <a:lstStyle/>
           <a:p>
-            <a:pPr indent="0" marL="0">
+            <a:pPr marL="0" indent="0">
               <a:buNone/>
             </a:pPr>
             <a:r>
@@ -22036,9 +22120,27 @@
             <a:tbl>
               <a:tblPr/>
               <a:tblGrid>
-                <a:gridCol w="2286000"/>
-                <a:gridCol w="2286000"/>
-                <a:gridCol w="2286000"/>
+                <a:gridCol w="2286000">
+                  <a:extLst>
+                    <a:ext uri="{9D8B030D-6E8A-4147-A177-3AD203B41FA5}">
+                      <a16:colId xmlns:a16="http://schemas.microsoft.com/office/drawing/2014/main" val="20000"/>
+                    </a:ext>
+                  </a:extLst>
+                </a:gridCol>
+                <a:gridCol w="2286000">
+                  <a:extLst>
+                    <a:ext uri="{9D8B030D-6E8A-4147-A177-3AD203B41FA5}">
+                      <a16:colId xmlns:a16="http://schemas.microsoft.com/office/drawing/2014/main" val="20001"/>
+                    </a:ext>
+                  </a:extLst>
+                </a:gridCol>
+                <a:gridCol w="2286000">
+                  <a:extLst>
+                    <a:ext uri="{9D8B030D-6E8A-4147-A177-3AD203B41FA5}">
+                      <a16:colId xmlns:a16="http://schemas.microsoft.com/office/drawing/2014/main" val="20002"/>
+                    </a:ext>
+                  </a:extLst>
+                </a:gridCol>
               </a:tblGrid>
               <a:tr h="457200">
                 <a:tc>
@@ -22046,7 +22148,7 @@
                     <a:bodyPr/>
                     <a:lstStyle/>
                     <a:p>
-                      <a:pPr algn="ctr" indent="0" marL="0">
+                      <a:pPr marL="0" indent="0" algn="ctr">
                         <a:buNone/>
                       </a:pPr>
                       <a:r>
@@ -22067,7 +22169,7 @@
                       </a:endParaRPr>
                     </a:p>
                   </a:txBody>
-                  <a:tcPr marL="91440" marR="91440" marT="45720" marB="45720" anchor="ctr">
+                  <a:tcPr anchor="ctr">
                     <a:lnL w="38100" cap="flat" cmpd="sng" algn="ctr">
                       <a:solidFill>
                         <a:srgbClr val="FFFFFF"/>
@@ -22114,7 +22216,7 @@
                     <a:bodyPr/>
                     <a:lstStyle/>
                     <a:p>
-                      <a:pPr algn="ctr" indent="0" marL="0">
+                      <a:pPr marL="0" indent="0" algn="ctr">
                         <a:buNone/>
                       </a:pPr>
                       <a:r>
@@ -22135,7 +22237,7 @@
                       </a:endParaRPr>
                     </a:p>
                   </a:txBody>
-                  <a:tcPr marL="91440" marR="91440" marT="45720" marB="45720" anchor="ctr">
+                  <a:tcPr anchor="ctr">
                     <a:lnL w="38100" cap="flat" cmpd="sng" algn="ctr">
                       <a:solidFill>
                         <a:srgbClr val="FFFFFF"/>
@@ -22182,7 +22284,7 @@
                     <a:bodyPr/>
                     <a:lstStyle/>
                     <a:p>
-                      <a:pPr algn="ctr" indent="0" marL="0">
+                      <a:pPr marL="0" indent="0" algn="ctr">
                         <a:buNone/>
                       </a:pPr>
                       <a:r>
@@ -22203,7 +22305,7 @@
                       </a:endParaRPr>
                     </a:p>
                   </a:txBody>
-                  <a:tcPr marL="91440" marR="91440" marT="45720" marB="45720" anchor="ctr">
+                  <a:tcPr anchor="ctr">
                     <a:lnL w="38100" cap="flat" cmpd="sng" algn="ctr">
                       <a:solidFill>
                         <a:srgbClr val="FFFFFF"/>
@@ -22245,6 +22347,11 @@
                     </a:solidFill>
                   </a:tcPr>
                 </a:tc>
+                <a:extLst>
+                  <a:ext uri="{0D108BD9-81ED-4DB2-BD59-A6C34878D82A}">
+                    <a16:rowId xmlns:a16="http://schemas.microsoft.com/office/drawing/2014/main" val="10000"/>
+                  </a:ext>
+                </a:extLst>
               </a:tr>
               <a:tr h="457200">
                 <a:tc>
@@ -22252,7 +22359,7 @@
                     <a:bodyPr/>
                     <a:lstStyle/>
                     <a:p>
-                      <a:pPr algn="ctr" indent="0" marL="0">
+                      <a:pPr marL="0" indent="0" algn="ctr">
                         <a:buNone/>
                       </a:pPr>
                       <a:r>
@@ -22273,7 +22380,7 @@
                       </a:endParaRPr>
                     </a:p>
                   </a:txBody>
-                  <a:tcPr marL="91440" marR="91440" marT="45720" marB="45720" anchor="ctr">
+                  <a:tcPr anchor="ctr">
                     <a:lnL w="38100" cap="flat" cmpd="sng" algn="ctr">
                       <a:solidFill>
                         <a:srgbClr val="FFFFFF"/>
@@ -22320,7 +22427,7 @@
                     <a:bodyPr/>
                     <a:lstStyle/>
                     <a:p>
-                      <a:pPr algn="ctr" indent="0" marL="0">
+                      <a:pPr marL="0" indent="0" algn="ctr">
                         <a:buNone/>
                       </a:pPr>
                       <a:r>
@@ -22341,7 +22448,7 @@
                       </a:endParaRPr>
                     </a:p>
                   </a:txBody>
-                  <a:tcPr marL="91440" marR="91440" marT="45720" marB="45720" anchor="ctr">
+                  <a:tcPr anchor="ctr">
                     <a:lnL w="38100" cap="flat" cmpd="sng" algn="ctr">
                       <a:solidFill>
                         <a:srgbClr val="FFFFFF"/>
@@ -22388,7 +22495,7 @@
                     <a:bodyPr/>
                     <a:lstStyle/>
                     <a:p>
-                      <a:pPr algn="ctr" indent="0" marL="0">
+                      <a:pPr marL="0" indent="0" algn="ctr">
                         <a:buNone/>
                       </a:pPr>
                       <a:r>
@@ -22409,7 +22516,7 @@
                       </a:endParaRPr>
                     </a:p>
                   </a:txBody>
-                  <a:tcPr marL="91440" marR="91440" marT="45720" marB="45720" anchor="ctr">
+                  <a:tcPr anchor="ctr">
                     <a:lnL w="38100" cap="flat" cmpd="sng" algn="ctr">
                       <a:solidFill>
                         <a:srgbClr val="FFFFFF"/>
@@ -22451,6 +22558,11 @@
                     </a:solidFill>
                   </a:tcPr>
                 </a:tc>
+                <a:extLst>
+                  <a:ext uri="{0D108BD9-81ED-4DB2-BD59-A6C34878D82A}">
+                    <a16:rowId xmlns:a16="http://schemas.microsoft.com/office/drawing/2014/main" val="10001"/>
+                  </a:ext>
+                </a:extLst>
               </a:tr>
               <a:tr h="457200">
                 <a:tc>
@@ -22458,7 +22570,7 @@
                     <a:bodyPr/>
                     <a:lstStyle/>
                     <a:p>
-                      <a:pPr algn="ctr" indent="0" marL="0">
+                      <a:pPr marL="0" indent="0" algn="ctr">
                         <a:buNone/>
                       </a:pPr>
                       <a:r>
@@ -22479,7 +22591,7 @@
                       </a:endParaRPr>
                     </a:p>
                   </a:txBody>
-                  <a:tcPr marL="91440" marR="91440" marT="45720" marB="45720" anchor="ctr">
+                  <a:tcPr anchor="ctr">
                     <a:lnL w="38100" cap="flat" cmpd="sng" algn="ctr">
                       <a:solidFill>
                         <a:srgbClr val="FFFFFF"/>
@@ -22526,7 +22638,7 @@
                     <a:bodyPr/>
                     <a:lstStyle/>
                     <a:p>
-                      <a:pPr algn="ctr" indent="0" marL="0">
+                      <a:pPr marL="0" indent="0" algn="ctr">
                         <a:buNone/>
                       </a:pPr>
                       <a:r>
@@ -22547,7 +22659,7 @@
                       </a:endParaRPr>
                     </a:p>
                   </a:txBody>
-                  <a:tcPr marL="91440" marR="91440" marT="45720" marB="45720" anchor="ctr">
+                  <a:tcPr anchor="ctr">
                     <a:lnL w="38100" cap="flat" cmpd="sng" algn="ctr">
                       <a:solidFill>
                         <a:srgbClr val="FFFFFF"/>
@@ -22594,7 +22706,7 @@
                     <a:bodyPr/>
                     <a:lstStyle/>
                     <a:p>
-                      <a:pPr algn="ctr" indent="0" marL="0">
+                      <a:pPr marL="0" indent="0" algn="ctr">
                         <a:buNone/>
                       </a:pPr>
                       <a:r>
@@ -22615,7 +22727,7 @@
                       </a:endParaRPr>
                     </a:p>
                   </a:txBody>
-                  <a:tcPr marL="91440" marR="91440" marT="45720" marB="45720" anchor="ctr">
+                  <a:tcPr anchor="ctr">
                     <a:lnL w="38100" cap="flat" cmpd="sng" algn="ctr">
                       <a:solidFill>
                         <a:srgbClr val="FFFFFF"/>
@@ -22657,6 +22769,11 @@
                     </a:solidFill>
                   </a:tcPr>
                 </a:tc>
+                <a:extLst>
+                  <a:ext uri="{0D108BD9-81ED-4DB2-BD59-A6C34878D82A}">
+                    <a16:rowId xmlns:a16="http://schemas.microsoft.com/office/drawing/2014/main" val="10002"/>
+                  </a:ext>
+                </a:extLst>
               </a:tr>
               <a:tr h="457200">
                 <a:tc>
@@ -22664,7 +22781,7 @@
                     <a:bodyPr/>
                     <a:lstStyle/>
                     <a:p>
-                      <a:pPr algn="ctr" indent="0" marL="0">
+                      <a:pPr marL="0" indent="0" algn="ctr">
                         <a:buNone/>
                       </a:pPr>
                       <a:r>
@@ -22685,7 +22802,7 @@
                       </a:endParaRPr>
                     </a:p>
                   </a:txBody>
-                  <a:tcPr marL="91440" marR="91440" marT="45720" marB="45720" anchor="ctr">
+                  <a:tcPr anchor="ctr">
                     <a:lnL w="38100" cap="flat" cmpd="sng" algn="ctr">
                       <a:solidFill>
                         <a:srgbClr val="FFFFFF"/>
@@ -22732,7 +22849,7 @@
                     <a:bodyPr/>
                     <a:lstStyle/>
                     <a:p>
-                      <a:pPr algn="ctr" indent="0" marL="0">
+                      <a:pPr marL="0" indent="0" algn="ctr">
                         <a:buNone/>
                       </a:pPr>
                       <a:r>
@@ -22753,7 +22870,7 @@
                       </a:endParaRPr>
                     </a:p>
                   </a:txBody>
-                  <a:tcPr marL="91440" marR="91440" marT="45720" marB="45720" anchor="ctr">
+                  <a:tcPr anchor="ctr">
                     <a:lnL w="38100" cap="flat" cmpd="sng" algn="ctr">
                       <a:solidFill>
                         <a:srgbClr val="FFFFFF"/>
@@ -22800,7 +22917,7 @@
                     <a:bodyPr/>
                     <a:lstStyle/>
                     <a:p>
-                      <a:pPr algn="ctr" indent="0" marL="0">
+                      <a:pPr marL="0" indent="0" algn="ctr">
                         <a:buNone/>
                       </a:pPr>
                       <a:r>
@@ -22821,7 +22938,7 @@
                       </a:endParaRPr>
                     </a:p>
                   </a:txBody>
-                  <a:tcPr marL="91440" marR="91440" marT="45720" marB="45720" anchor="ctr">
+                  <a:tcPr anchor="ctr">
                     <a:lnL w="38100" cap="flat" cmpd="sng" algn="ctr">
                       <a:solidFill>
                         <a:srgbClr val="FFFFFF"/>
@@ -22863,6 +22980,11 @@
                     </a:solidFill>
                   </a:tcPr>
                 </a:tc>
+                <a:extLst>
+                  <a:ext uri="{0D108BD9-81ED-4DB2-BD59-A6C34878D82A}">
+                    <a16:rowId xmlns:a16="http://schemas.microsoft.com/office/drawing/2014/main" val="10003"/>
+                  </a:ext>
+                </a:extLst>
               </a:tr>
               <a:tr h="457200">
                 <a:tc>
@@ -22870,7 +22992,7 @@
                     <a:bodyPr/>
                     <a:lstStyle/>
                     <a:p>
-                      <a:pPr algn="ctr" indent="0" marL="0">
+                      <a:pPr marL="0" indent="0" algn="ctr">
                         <a:buNone/>
                       </a:pPr>
                       <a:r>
@@ -22891,7 +23013,7 @@
                       </a:endParaRPr>
                     </a:p>
                   </a:txBody>
-                  <a:tcPr marL="91440" marR="91440" marT="45720" marB="45720" anchor="ctr">
+                  <a:tcPr anchor="ctr">
                     <a:lnL w="38100" cap="flat" cmpd="sng" algn="ctr">
                       <a:solidFill>
                         <a:srgbClr val="FFFFFF"/>
@@ -22938,7 +23060,7 @@
                     <a:bodyPr/>
                     <a:lstStyle/>
                     <a:p>
-                      <a:pPr algn="ctr" indent="0" marL="0">
+                      <a:pPr marL="0" indent="0" algn="ctr">
                         <a:buNone/>
                       </a:pPr>
                       <a:r>
@@ -22959,7 +23081,7 @@
                       </a:endParaRPr>
                     </a:p>
                   </a:txBody>
-                  <a:tcPr marL="91440" marR="91440" marT="45720" marB="45720" anchor="ctr">
+                  <a:tcPr anchor="ctr">
                     <a:lnL w="38100" cap="flat" cmpd="sng" algn="ctr">
                       <a:solidFill>
                         <a:srgbClr val="FFFFFF"/>
@@ -23006,7 +23128,7 @@
                     <a:bodyPr/>
                     <a:lstStyle/>
                     <a:p>
-                      <a:pPr algn="ctr" indent="0" marL="0">
+                      <a:pPr marL="0" indent="0" algn="ctr">
                         <a:buNone/>
                       </a:pPr>
                       <a:r>
@@ -23027,7 +23149,7 @@
                       </a:endParaRPr>
                     </a:p>
                   </a:txBody>
-                  <a:tcPr marL="91440" marR="91440" marT="45720" marB="45720" anchor="ctr">
+                  <a:tcPr anchor="ctr">
                     <a:lnL w="38100" cap="flat" cmpd="sng" algn="ctr">
                       <a:solidFill>
                         <a:srgbClr val="FFFFFF"/>
@@ -23069,6 +23191,11 @@
                     </a:solidFill>
                   </a:tcPr>
                 </a:tc>
+                <a:extLst>
+                  <a:ext uri="{0D108BD9-81ED-4DB2-BD59-A6C34878D82A}">
+                    <a16:rowId xmlns:a16="http://schemas.microsoft.com/office/drawing/2014/main" val="10004"/>
+                  </a:ext>
+                </a:extLst>
               </a:tr>
             </a:tbl>
           </a:graphicData>
@@ -23095,7 +23222,7 @@
           <a:bodyPr wrap="square" lIns="0" tIns="0" rIns="0" bIns="0" rtlCol="0" anchor="ctr"/>
           <a:lstStyle/>
           <a:p>
-            <a:pPr indent="0" marL="0">
+            <a:pPr marL="0" indent="0">
               <a:buNone/>
             </a:pPr>
             <a:r>
@@ -23115,7 +23242,7 @@
       </p:sp>
       <p:sp>
         <p:nvSpPr>
-          <p:cNvPr id="6" name="Shape 3"/>
+          <p:cNvPr id="4" name="Shape 3"/>
           <p:cNvSpPr/>
           <p:nvPr/>
         </p:nvSpPr>
@@ -23156,7 +23283,7 @@
           <a:bodyPr wrap="square" lIns="0" tIns="0" rIns="0" bIns="0" rtlCol="0" anchor="ctr"/>
           <a:lstStyle/>
           <a:p>
-            <a:pPr algn="ctr" indent="0" marL="0">
+            <a:pPr marL="0" indent="0" algn="ctr">
               <a:buNone/>
             </a:pPr>
             <a:r>
@@ -23195,7 +23322,7 @@
           <a:bodyPr wrap="square" lIns="0" tIns="0" rIns="0" bIns="0" rtlCol="0" anchor="ctr"/>
           <a:lstStyle/>
           <a:p>
-            <a:pPr algn="ctr" indent="0" marL="0">
+            <a:pPr marL="0" indent="0" algn="ctr">
               <a:buNone/>
             </a:pPr>
             <a:r>
@@ -23234,7 +23361,7 @@
           <a:bodyPr wrap="square" lIns="0" tIns="0" rIns="0" bIns="0" rtlCol="0" anchor="ctr"/>
           <a:lstStyle/>
           <a:p>
-            <a:pPr algn="r" indent="0" marL="0">
+            <a:pPr marL="0" indent="0" algn="r">
               <a:buNone/>
             </a:pPr>
             <a:r>
@@ -23268,6 +23395,7 @@
         <a:solidFill>
           <a:srgbClr val="6C4BC1"/>
         </a:solidFill>
+        <a:effectLst/>
       </p:bgPr>
     </p:bg>
     <p:spTree>
@@ -23354,14 +23482,14 @@
       </p:sp>
       <p:pic>
         <p:nvPicPr>
-          <p:cNvPr id="5" name="Image 0" descr="preencoded.png">    </p:cNvPr>
+          <p:cNvPr id="5" name="Image 0" descr="preencoded.png"/>
           <p:cNvPicPr>
             <a:picLocks noChangeAspect="1"/>
           </p:cNvPicPr>
           <p:nvPr/>
         </p:nvPicPr>
         <p:blipFill>
-          <a:blip r:embed="rId1"/>
+          <a:blip r:embed="rId3"/>
           <a:stretch>
             <a:fillRect/>
           </a:stretch>
@@ -23397,7 +23525,7 @@
           <a:bodyPr wrap="square" lIns="0" tIns="0" rIns="0" bIns="0" rtlCol="0" anchor="ctr"/>
           <a:lstStyle/>
           <a:p>
-            <a:pPr algn="ctr" indent="0" marL="0">
+            <a:pPr marL="0" indent="0" algn="ctr">
               <a:buNone/>
             </a:pPr>
             <a:r>
@@ -23436,7 +23564,7 @@
           <a:bodyPr wrap="square" lIns="0" tIns="0" rIns="0" bIns="0" rtlCol="0" anchor="ctr"/>
           <a:lstStyle/>
           <a:p>
-            <a:pPr algn="ctr" indent="0" marL="0">
+            <a:pPr marL="0" indent="0" algn="ctr">
               <a:lnSpc>
                 <a:spcPts val="2200"/>
               </a:lnSpc>
@@ -23473,6 +23601,7 @@
         <a:solidFill>
           <a:srgbClr val="FFFFFF"/>
         </a:solidFill>
+        <a:effectLst/>
       </p:bgPr>
     </p:bg>
     <p:spTree>
@@ -23510,11 +23639,11 @@
           <a:bodyPr wrap="square" lIns="0" tIns="0" rIns="0" bIns="0" rtlCol="0" anchor="ctr"/>
           <a:lstStyle/>
           <a:p>
-            <a:pPr algn="l" indent="0" marL="0">
+            <a:pPr marL="0" indent="0" algn="l">
               <a:buNone/>
             </a:pPr>
             <a:r>
-              <a:rPr lang="en-US" sz="1200" b="1" spc="200" kern="0" dirty="0">
+              <a:rPr lang="en-US" sz="1200" b="1" kern="0" spc="200" dirty="0">
                 <a:solidFill>
                   <a:srgbClr val="6C4BC1"/>
                 </a:solidFill>
@@ -23549,7 +23678,7 @@
           <a:bodyPr wrap="square" lIns="0" tIns="0" rIns="0" bIns="0" rtlCol="0" anchor="ctr"/>
           <a:lstStyle/>
           <a:p>
-            <a:pPr indent="0" marL="0">
+            <a:pPr marL="0" indent="0">
               <a:buNone/>
             </a:pPr>
             <a:r>
@@ -23588,7 +23717,7 @@
           <a:bodyPr wrap="square" lIns="0" tIns="0" rIns="0" bIns="0" rtlCol="0" anchor="ctr"/>
           <a:lstStyle/>
           <a:p>
-            <a:pPr indent="0" marL="0">
+            <a:pPr marL="0" indent="0">
               <a:buNone/>
             </a:pPr>
             <a:r>
@@ -23629,9 +23758,27 @@
             <a:tbl>
               <a:tblPr/>
               <a:tblGrid>
-                <a:gridCol w="1280160"/>
-                <a:gridCol w="1645920"/>
-                <a:gridCol w="1645920"/>
+                <a:gridCol w="1280160">
+                  <a:extLst>
+                    <a:ext uri="{9D8B030D-6E8A-4147-A177-3AD203B41FA5}">
+                      <a16:colId xmlns:a16="http://schemas.microsoft.com/office/drawing/2014/main" val="20000"/>
+                    </a:ext>
+                  </a:extLst>
+                </a:gridCol>
+                <a:gridCol w="1645920">
+                  <a:extLst>
+                    <a:ext uri="{9D8B030D-6E8A-4147-A177-3AD203B41FA5}">
+                      <a16:colId xmlns:a16="http://schemas.microsoft.com/office/drawing/2014/main" val="20001"/>
+                    </a:ext>
+                  </a:extLst>
+                </a:gridCol>
+                <a:gridCol w="1645920">
+                  <a:extLst>
+                    <a:ext uri="{9D8B030D-6E8A-4147-A177-3AD203B41FA5}">
+                      <a16:colId xmlns:a16="http://schemas.microsoft.com/office/drawing/2014/main" val="20002"/>
+                    </a:ext>
+                  </a:extLst>
+                </a:gridCol>
               </a:tblGrid>
               <a:tr h="457200">
                 <a:tc>
@@ -23639,7 +23786,7 @@
                     <a:bodyPr/>
                     <a:lstStyle/>
                     <a:p>
-                      <a:pPr algn="ctr" indent="0" marL="0">
+                      <a:pPr marL="0" indent="0" algn="ctr">
                         <a:buNone/>
                       </a:pPr>
                       <a:r>
@@ -23660,7 +23807,7 @@
                       </a:endParaRPr>
                     </a:p>
                   </a:txBody>
-                  <a:tcPr marL="91440" marR="91440" marT="45720" marB="45720" anchor="ctr">
+                  <a:tcPr anchor="ctr">
                     <a:lnL w="38100" cap="flat" cmpd="sng" algn="ctr">
                       <a:solidFill>
                         <a:srgbClr val="FFFFFF"/>
@@ -23707,7 +23854,7 @@
                     <a:bodyPr/>
                     <a:lstStyle/>
                     <a:p>
-                      <a:pPr algn="ctr" indent="0" marL="0">
+                      <a:pPr marL="0" indent="0" algn="ctr">
                         <a:buNone/>
                       </a:pPr>
                       <a:r>
@@ -23728,7 +23875,7 @@
                       </a:endParaRPr>
                     </a:p>
                   </a:txBody>
-                  <a:tcPr marL="91440" marR="91440" marT="45720" marB="45720" anchor="ctr">
+                  <a:tcPr anchor="ctr">
                     <a:lnL w="38100" cap="flat" cmpd="sng" algn="ctr">
                       <a:solidFill>
                         <a:srgbClr val="FFFFFF"/>
@@ -23775,7 +23922,7 @@
                     <a:bodyPr/>
                     <a:lstStyle/>
                     <a:p>
-                      <a:pPr algn="ctr" indent="0" marL="0">
+                      <a:pPr marL="0" indent="0" algn="ctr">
                         <a:buNone/>
                       </a:pPr>
                       <a:r>
@@ -23796,7 +23943,7 @@
                       </a:endParaRPr>
                     </a:p>
                   </a:txBody>
-                  <a:tcPr marL="91440" marR="91440" marT="45720" marB="45720" anchor="ctr">
+                  <a:tcPr anchor="ctr">
                     <a:lnL w="38100" cap="flat" cmpd="sng" algn="ctr">
                       <a:solidFill>
                         <a:srgbClr val="FFFFFF"/>
@@ -23838,6 +23985,11 @@
                     </a:solidFill>
                   </a:tcPr>
                 </a:tc>
+                <a:extLst>
+                  <a:ext uri="{0D108BD9-81ED-4DB2-BD59-A6C34878D82A}">
+                    <a16:rowId xmlns:a16="http://schemas.microsoft.com/office/drawing/2014/main" val="10000"/>
+                  </a:ext>
+                </a:extLst>
               </a:tr>
               <a:tr h="1097280">
                 <a:tc>
@@ -23845,7 +23997,7 @@
                     <a:bodyPr/>
                     <a:lstStyle/>
                     <a:p>
-                      <a:pPr algn="ctr" indent="0" marL="0">
+                      <a:pPr marL="0" indent="0" algn="ctr">
                         <a:buNone/>
                       </a:pPr>
                       <a:r>
@@ -23866,7 +24018,7 @@
                       </a:endParaRPr>
                     </a:p>
                   </a:txBody>
-                  <a:tcPr marL="91440" marR="91440" marT="45720" marB="45720" anchor="ctr">
+                  <a:tcPr anchor="ctr">
                     <a:lnL w="38100" cap="flat" cmpd="sng" algn="ctr">
                       <a:solidFill>
                         <a:srgbClr val="FFFFFF"/>
@@ -23913,7 +24065,7 @@
                     <a:bodyPr/>
                     <a:lstStyle/>
                     <a:p>
-                      <a:pPr algn="ctr" indent="0" marL="0">
+                      <a:pPr marL="0" indent="0" algn="ctr">
                         <a:buNone/>
                       </a:pPr>
                       <a:r>
@@ -23934,7 +24086,7 @@
                       </a:endParaRPr>
                     </a:p>
                   </a:txBody>
-                  <a:tcPr marL="91440" marR="91440" marT="45720" marB="45720" anchor="ctr">
+                  <a:tcPr anchor="ctr">
                     <a:lnL w="38100" cap="flat" cmpd="sng" algn="ctr">
                       <a:solidFill>
                         <a:srgbClr val="FFFFFF"/>
@@ -23981,7 +24133,7 @@
                     <a:bodyPr/>
                     <a:lstStyle/>
                     <a:p>
-                      <a:pPr algn="ctr" indent="0" marL="0">
+                      <a:pPr marL="0" indent="0" algn="ctr">
                         <a:buNone/>
                       </a:pPr>
                       <a:r>
@@ -24002,7 +24154,7 @@
                       </a:endParaRPr>
                     </a:p>
                   </a:txBody>
-                  <a:tcPr marL="91440" marR="91440" marT="45720" marB="45720" anchor="ctr">
+                  <a:tcPr anchor="ctr">
                     <a:lnL w="38100" cap="flat" cmpd="sng" algn="ctr">
                       <a:solidFill>
                         <a:srgbClr val="FFFFFF"/>
@@ -24044,6 +24196,11 @@
                     </a:solidFill>
                   </a:tcPr>
                 </a:tc>
+                <a:extLst>
+                  <a:ext uri="{0D108BD9-81ED-4DB2-BD59-A6C34878D82A}">
+                    <a16:rowId xmlns:a16="http://schemas.microsoft.com/office/drawing/2014/main" val="10001"/>
+                  </a:ext>
+                </a:extLst>
               </a:tr>
               <a:tr h="1097280">
                 <a:tc>
@@ -24051,7 +24208,7 @@
                     <a:bodyPr/>
                     <a:lstStyle/>
                     <a:p>
-                      <a:pPr algn="ctr" indent="0" marL="0">
+                      <a:pPr marL="0" indent="0" algn="ctr">
                         <a:buNone/>
                       </a:pPr>
                       <a:r>
@@ -24072,7 +24229,7 @@
                       </a:endParaRPr>
                     </a:p>
                   </a:txBody>
-                  <a:tcPr marL="91440" marR="91440" marT="45720" marB="45720" anchor="ctr">
+                  <a:tcPr anchor="ctr">
                     <a:lnL w="38100" cap="flat" cmpd="sng" algn="ctr">
                       <a:solidFill>
                         <a:srgbClr val="FFFFFF"/>
@@ -24119,7 +24276,7 @@
                     <a:bodyPr/>
                     <a:lstStyle/>
                     <a:p>
-                      <a:pPr algn="ctr" indent="0" marL="0">
+                      <a:pPr marL="0" indent="0" algn="ctr">
                         <a:buNone/>
                       </a:pPr>
                       <a:r>
@@ -24140,7 +24297,7 @@
                       </a:endParaRPr>
                     </a:p>
                   </a:txBody>
-                  <a:tcPr marL="91440" marR="91440" marT="45720" marB="45720" anchor="ctr">
+                  <a:tcPr anchor="ctr">
                     <a:lnL w="38100" cap="flat" cmpd="sng" algn="ctr">
                       <a:solidFill>
                         <a:srgbClr val="FFFFFF"/>
@@ -24187,7 +24344,7 @@
                     <a:bodyPr/>
                     <a:lstStyle/>
                     <a:p>
-                      <a:pPr algn="ctr" indent="0" marL="0">
+                      <a:pPr marL="0" indent="0" algn="ctr">
                         <a:buNone/>
                       </a:pPr>
                       <a:r>
@@ -24208,7 +24365,7 @@
                       </a:endParaRPr>
                     </a:p>
                   </a:txBody>
-                  <a:tcPr marL="91440" marR="91440" marT="45720" marB="45720" anchor="ctr">
+                  <a:tcPr anchor="ctr">
                     <a:lnL w="38100" cap="flat" cmpd="sng" algn="ctr">
                       <a:solidFill>
                         <a:srgbClr val="FFFFFF"/>
@@ -24250,6 +24407,11 @@
                     </a:solidFill>
                   </a:tcPr>
                 </a:tc>
+                <a:extLst>
+                  <a:ext uri="{0D108BD9-81ED-4DB2-BD59-A6C34878D82A}">
+                    <a16:rowId xmlns:a16="http://schemas.microsoft.com/office/drawing/2014/main" val="10002"/>
+                  </a:ext>
+                </a:extLst>
               </a:tr>
             </a:tbl>
           </a:graphicData>
@@ -24305,7 +24467,7 @@
       </p:sp>
       <p:sp>
         <p:nvSpPr>
-          <p:cNvPr id="8" name="Text 5"/>
+          <p:cNvPr id="5" name="Text 5"/>
           <p:cNvSpPr/>
           <p:nvPr/>
         </p:nvSpPr>
@@ -24324,7 +24486,7 @@
           <a:bodyPr wrap="square" lIns="0" tIns="0" rIns="0" bIns="0" rtlCol="0" anchor="ctr"/>
           <a:lstStyle/>
           <a:p>
-            <a:pPr algn="ctr" indent="0" marL="0">
+            <a:pPr marL="0" indent="0" algn="ctr">
               <a:buNone/>
             </a:pPr>
             <a:r>
@@ -24338,9 +24500,6 @@
               </a:rPr>
               <a:t>■ </a:t>
             </a:r>
-            <a:pPr algn="ctr" indent="0" marL="0">
-              <a:buNone/>
-            </a:pPr>
             <a:r>
               <a:rPr lang="en-US" sz="1400" dirty="0">
                 <a:solidFill>
@@ -24352,9 +24511,6 @@
               </a:rPr>
               <a:t>linha x=1 → sobra x     </a:t>
             </a:r>
-            <a:pPr algn="ctr" indent="0" marL="0">
-              <a:buNone/>
-            </a:pPr>
             <a:r>
               <a:rPr lang="en-US" sz="1400" b="1" dirty="0">
                 <a:solidFill>
@@ -24366,9 +24522,6 @@
               </a:rPr>
               <a:t>■ </a:t>
             </a:r>
-            <a:pPr algn="ctr" indent="0" marL="0">
-              <a:buNone/>
-            </a:pPr>
             <a:r>
               <a:rPr lang="en-US" sz="1400" dirty="0">
                 <a:solidFill>
@@ -24405,7 +24558,7 @@
           <a:bodyPr wrap="square" lIns="0" tIns="0" rIns="0" bIns="0" rtlCol="0" anchor="ctr"/>
           <a:lstStyle/>
           <a:p>
-            <a:pPr algn="ctr" indent="0" marL="0">
+            <a:pPr marL="0" indent="0" algn="ctr">
               <a:buNone/>
             </a:pPr>
             <a:r>
@@ -24444,7 +24597,7 @@
           <a:bodyPr wrap="square" lIns="0" tIns="0" rIns="0" bIns="0" rtlCol="0" anchor="ctr"/>
           <a:lstStyle/>
           <a:p>
-            <a:pPr algn="r" indent="0" marL="0">
+            <a:pPr marL="0" indent="0" algn="r">
               <a:buNone/>
             </a:pPr>
             <a:r>
@@ -24478,6 +24631,7 @@
         <a:solidFill>
           <a:srgbClr val="FFFFFF"/>
         </a:solidFill>
+        <a:effectLst/>
       </p:bgPr>
     </p:bg>
     <p:spTree>
@@ -24515,11 +24669,11 @@
           <a:bodyPr wrap="square" lIns="0" tIns="0" rIns="0" bIns="0" rtlCol="0" anchor="ctr"/>
           <a:lstStyle/>
           <a:p>
-            <a:pPr algn="l" indent="0" marL="0">
+            <a:pPr marL="0" indent="0" algn="l">
               <a:buNone/>
             </a:pPr>
             <a:r>
-              <a:rPr lang="en-US" sz="1200" b="1" spc="200" kern="0" dirty="0">
+              <a:rPr lang="en-US" sz="1200" b="1" kern="0" spc="200" dirty="0">
                 <a:solidFill>
                   <a:srgbClr val="6C4BC1"/>
                 </a:solidFill>
@@ -24554,7 +24708,7 @@
           <a:bodyPr wrap="square" lIns="0" tIns="0" rIns="0" bIns="0" rtlCol="0" anchor="ctr"/>
           <a:lstStyle/>
           <a:p>
-            <a:pPr indent="0" marL="0">
+            <a:pPr marL="0" indent="0">
               <a:buNone/>
             </a:pPr>
             <a:r>
@@ -24593,7 +24747,7 @@
           <a:bodyPr wrap="square" lIns="0" tIns="0" rIns="0" bIns="0" rtlCol="0" anchor="ctr"/>
           <a:lstStyle/>
           <a:p>
-            <a:pPr indent="0" marL="0">
+            <a:pPr marL="0" indent="0">
               <a:buNone/>
             </a:pPr>
             <a:r>
@@ -24632,7 +24786,7 @@
           <a:bodyPr wrap="square" lIns="0" tIns="0" rIns="0" bIns="0" rtlCol="0" anchor="ctr"/>
           <a:lstStyle/>
           <a:p>
-            <a:pPr indent="0" marL="0">
+            <a:pPr marL="0" indent="0">
               <a:buNone/>
             </a:pPr>
             <a:r>
@@ -24693,7 +24847,7 @@
           <a:bodyPr wrap="square" lIns="0" tIns="0" rIns="0" bIns="0" rtlCol="0" anchor="ctr"/>
           <a:lstStyle/>
           <a:p>
-            <a:pPr algn="ctr" indent="0" marL="0">
+            <a:pPr marL="0" indent="0" algn="ctr">
               <a:buNone/>
             </a:pPr>
             <a:r>
@@ -24759,7 +24913,7 @@
           <a:bodyPr wrap="square" lIns="0" tIns="0" rIns="0" bIns="0" rtlCol="0" anchor="ctr"/>
           <a:lstStyle/>
           <a:p>
-            <a:pPr algn="ctr" indent="0" marL="0">
+            <a:pPr marL="0" indent="0" algn="ctr">
               <a:buNone/>
             </a:pPr>
             <a:r>
@@ -24825,7 +24979,7 @@
           <a:bodyPr wrap="square" lIns="0" tIns="0" rIns="0" bIns="0" rtlCol="0" anchor="ctr"/>
           <a:lstStyle/>
           <a:p>
-            <a:pPr algn="ctr" indent="0" marL="0">
+            <a:pPr marL="0" indent="0" algn="ctr">
               <a:buNone/>
             </a:pPr>
             <a:r>
@@ -24886,7 +25040,7 @@
           <a:bodyPr wrap="square" lIns="0" tIns="0" rIns="0" bIns="0" rtlCol="0" anchor="ctr"/>
           <a:lstStyle/>
           <a:p>
-            <a:pPr algn="ctr" indent="0" marL="0">
+            <a:pPr marL="0" indent="0" algn="ctr">
               <a:buNone/>
             </a:pPr>
             <a:r>
@@ -24925,7 +25079,7 @@
           <a:bodyPr wrap="square" lIns="0" tIns="0" rIns="0" bIns="0" rtlCol="0" anchor="ctr"/>
           <a:lstStyle/>
           <a:p>
-            <a:pPr algn="ctr" indent="0" marL="0">
+            <a:pPr marL="0" indent="0" algn="ctr">
               <a:buNone/>
             </a:pPr>
             <a:r>
@@ -24964,7 +25118,7 @@
           <a:bodyPr wrap="square" lIns="0" tIns="0" rIns="0" bIns="0" rtlCol="0" anchor="ctr"/>
           <a:lstStyle/>
           <a:p>
-            <a:pPr indent="0" marL="0">
+            <a:pPr marL="0" indent="0">
               <a:buNone/>
             </a:pPr>
             <a:r>
@@ -25025,7 +25179,7 @@
           <a:bodyPr wrap="square" lIns="0" tIns="0" rIns="0" bIns="0" rtlCol="0" anchor="ctr"/>
           <a:lstStyle/>
           <a:p>
-            <a:pPr algn="ctr" indent="0" marL="0">
+            <a:pPr marL="0" indent="0" algn="ctr">
               <a:buNone/>
             </a:pPr>
             <a:r>
@@ -25086,7 +25240,7 @@
           <a:bodyPr wrap="square" lIns="0" tIns="0" rIns="0" bIns="0" rtlCol="0" anchor="ctr"/>
           <a:lstStyle/>
           <a:p>
-            <a:pPr algn="ctr" indent="0" marL="0">
+            <a:pPr marL="0" indent="0" algn="ctr">
               <a:buNone/>
             </a:pPr>
             <a:r>
@@ -25147,7 +25301,7 @@
           <a:bodyPr wrap="square" lIns="0" tIns="0" rIns="0" bIns="0" rtlCol="0" anchor="ctr"/>
           <a:lstStyle/>
           <a:p>
-            <a:pPr algn="ctr" indent="0" marL="0">
+            <a:pPr marL="0" indent="0" algn="ctr">
               <a:buNone/>
             </a:pPr>
             <a:r>
@@ -25208,7 +25362,7 @@
           <a:bodyPr wrap="square" lIns="0" tIns="0" rIns="0" bIns="0" rtlCol="0" anchor="ctr"/>
           <a:lstStyle/>
           <a:p>
-            <a:pPr algn="ctr" indent="0" marL="0">
+            <a:pPr marL="0" indent="0" algn="ctr">
               <a:buNone/>
             </a:pPr>
             <a:r>
@@ -25247,7 +25401,7 @@
           <a:bodyPr wrap="square" lIns="0" tIns="0" rIns="0" bIns="0" rtlCol="0" anchor="ctr"/>
           <a:lstStyle/>
           <a:p>
-            <a:pPr algn="ctr" indent="0" marL="0">
+            <a:pPr marL="0" indent="0" algn="ctr">
               <a:buNone/>
             </a:pPr>
             <a:r>
@@ -25286,7 +25440,7 @@
           <a:bodyPr wrap="square" lIns="0" tIns="0" rIns="0" bIns="0" rtlCol="0" anchor="ctr"/>
           <a:lstStyle/>
           <a:p>
-            <a:pPr algn="r" indent="0" marL="0">
+            <a:pPr marL="0" indent="0" algn="r">
               <a:buNone/>
             </a:pPr>
             <a:r>
@@ -25320,6 +25474,7 @@
         <a:solidFill>
           <a:srgbClr val="FFFFFF"/>
         </a:solidFill>
+        <a:effectLst/>
       </p:bgPr>
     </p:bg>
     <p:spTree>
@@ -25357,11 +25512,11 @@
           <a:bodyPr wrap="square" lIns="0" tIns="0" rIns="0" bIns="0" rtlCol="0" anchor="ctr"/>
           <a:lstStyle/>
           <a:p>
-            <a:pPr algn="l" indent="0" marL="0">
+            <a:pPr marL="0" indent="0" algn="l">
               <a:buNone/>
             </a:pPr>
             <a:r>
-              <a:rPr lang="en-US" sz="1200" b="1" spc="200" kern="0" dirty="0">
+              <a:rPr lang="en-US" sz="1200" b="1" kern="0" spc="200" dirty="0">
                 <a:solidFill>
                   <a:srgbClr val="6C4BC1"/>
                 </a:solidFill>
@@ -25396,7 +25551,7 @@
           <a:bodyPr wrap="square" lIns="0" tIns="0" rIns="0" bIns="0" rtlCol="0" anchor="ctr"/>
           <a:lstStyle/>
           <a:p>
-            <a:pPr indent="0" marL="0">
+            <a:pPr marL="0" indent="0">
               <a:buNone/>
             </a:pPr>
             <a:r>
@@ -25435,7 +25590,7 @@
           <a:bodyPr wrap="square" lIns="0" tIns="0" rIns="0" bIns="0" rtlCol="0" anchor="ctr"/>
           <a:lstStyle/>
           <a:p>
-            <a:pPr indent="0" marL="0">
+            <a:pPr marL="0" indent="0">
               <a:buNone/>
             </a:pPr>
             <a:r>
@@ -25476,11 +25631,41 @@
             <a:tbl>
               <a:tblPr/>
               <a:tblGrid>
-                <a:gridCol w="1188720"/>
-                <a:gridCol w="1371600"/>
-                <a:gridCol w="1371600"/>
-                <a:gridCol w="1371600"/>
-                <a:gridCol w="1371600"/>
+                <a:gridCol w="1188720">
+                  <a:extLst>
+                    <a:ext uri="{9D8B030D-6E8A-4147-A177-3AD203B41FA5}">
+                      <a16:colId xmlns:a16="http://schemas.microsoft.com/office/drawing/2014/main" val="20000"/>
+                    </a:ext>
+                  </a:extLst>
+                </a:gridCol>
+                <a:gridCol w="1371600">
+                  <a:extLst>
+                    <a:ext uri="{9D8B030D-6E8A-4147-A177-3AD203B41FA5}">
+                      <a16:colId xmlns:a16="http://schemas.microsoft.com/office/drawing/2014/main" val="20001"/>
+                    </a:ext>
+                  </a:extLst>
+                </a:gridCol>
+                <a:gridCol w="1371600">
+                  <a:extLst>
+                    <a:ext uri="{9D8B030D-6E8A-4147-A177-3AD203B41FA5}">
+                      <a16:colId xmlns:a16="http://schemas.microsoft.com/office/drawing/2014/main" val="20002"/>
+                    </a:ext>
+                  </a:extLst>
+                </a:gridCol>
+                <a:gridCol w="1371600">
+                  <a:extLst>
+                    <a:ext uri="{9D8B030D-6E8A-4147-A177-3AD203B41FA5}">
+                      <a16:colId xmlns:a16="http://schemas.microsoft.com/office/drawing/2014/main" val="20003"/>
+                    </a:ext>
+                  </a:extLst>
+                </a:gridCol>
+                <a:gridCol w="1371600">
+                  <a:extLst>
+                    <a:ext uri="{9D8B030D-6E8A-4147-A177-3AD203B41FA5}">
+                      <a16:colId xmlns:a16="http://schemas.microsoft.com/office/drawing/2014/main" val="20004"/>
+                    </a:ext>
+                  </a:extLst>
+                </a:gridCol>
               </a:tblGrid>
               <a:tr h="457200">
                 <a:tc>
@@ -25488,7 +25673,7 @@
                     <a:bodyPr/>
                     <a:lstStyle/>
                     <a:p>
-                      <a:pPr algn="ctr" indent="0" marL="0">
+                      <a:pPr marL="0" indent="0" algn="ctr">
                         <a:buNone/>
                       </a:pPr>
                       <a:r>
@@ -25509,7 +25694,7 @@
                       </a:endParaRPr>
                     </a:p>
                   </a:txBody>
-                  <a:tcPr marL="91440" marR="91440" marT="45720" marB="45720" anchor="ctr">
+                  <a:tcPr anchor="ctr">
                     <a:lnL w="38100" cap="flat" cmpd="sng" algn="ctr">
                       <a:solidFill>
                         <a:srgbClr val="FFFFFF"/>
@@ -25556,7 +25741,7 @@
                     <a:bodyPr/>
                     <a:lstStyle/>
                     <a:p>
-                      <a:pPr algn="ctr" indent="0" marL="0">
+                      <a:pPr marL="0" indent="0" algn="ctr">
                         <a:buNone/>
                       </a:pPr>
                       <a:r>
@@ -25577,7 +25762,7 @@
                       </a:endParaRPr>
                     </a:p>
                   </a:txBody>
-                  <a:tcPr marL="91440" marR="91440" marT="45720" marB="45720" anchor="ctr">
+                  <a:tcPr anchor="ctr">
                     <a:lnL w="38100" cap="flat" cmpd="sng" algn="ctr">
                       <a:solidFill>
                         <a:srgbClr val="FFFFFF"/>
@@ -25624,7 +25809,7 @@
                     <a:bodyPr/>
                     <a:lstStyle/>
                     <a:p>
-                      <a:pPr algn="ctr" indent="0" marL="0">
+                      <a:pPr marL="0" indent="0" algn="ctr">
                         <a:buNone/>
                       </a:pPr>
                       <a:r>
@@ -25645,7 +25830,7 @@
                       </a:endParaRPr>
                     </a:p>
                   </a:txBody>
-                  <a:tcPr marL="91440" marR="91440" marT="45720" marB="45720" anchor="ctr">
+                  <a:tcPr anchor="ctr">
                     <a:lnL w="38100" cap="flat" cmpd="sng" algn="ctr">
                       <a:solidFill>
                         <a:srgbClr val="FFFFFF"/>
@@ -25692,7 +25877,7 @@
                     <a:bodyPr/>
                     <a:lstStyle/>
                     <a:p>
-                      <a:pPr algn="ctr" indent="0" marL="0">
+                      <a:pPr marL="0" indent="0" algn="ctr">
                         <a:buNone/>
                       </a:pPr>
                       <a:r>
@@ -25713,7 +25898,7 @@
                       </a:endParaRPr>
                     </a:p>
                   </a:txBody>
-                  <a:tcPr marL="91440" marR="91440" marT="45720" marB="45720" anchor="ctr">
+                  <a:tcPr anchor="ctr">
                     <a:lnL w="38100" cap="flat" cmpd="sng" algn="ctr">
                       <a:solidFill>
                         <a:srgbClr val="FFFFFF"/>
@@ -25760,7 +25945,7 @@
                     <a:bodyPr/>
                     <a:lstStyle/>
                     <a:p>
-                      <a:pPr algn="ctr" indent="0" marL="0">
+                      <a:pPr marL="0" indent="0" algn="ctr">
                         <a:buNone/>
                       </a:pPr>
                       <a:r>
@@ -25781,7 +25966,7 @@
                       </a:endParaRPr>
                     </a:p>
                   </a:txBody>
-                  <a:tcPr marL="91440" marR="91440" marT="45720" marB="45720" anchor="ctr">
+                  <a:tcPr anchor="ctr">
                     <a:lnL w="38100" cap="flat" cmpd="sng" algn="ctr">
                       <a:solidFill>
                         <a:srgbClr val="FFFFFF"/>
@@ -25823,6 +26008,11 @@
                     </a:solidFill>
                   </a:tcPr>
                 </a:tc>
+                <a:extLst>
+                  <a:ext uri="{0D108BD9-81ED-4DB2-BD59-A6C34878D82A}">
+                    <a16:rowId xmlns:a16="http://schemas.microsoft.com/office/drawing/2014/main" val="10000"/>
+                  </a:ext>
+                </a:extLst>
               </a:tr>
               <a:tr h="960120">
                 <a:tc>
@@ -25830,7 +26020,7 @@
                     <a:bodyPr/>
                     <a:lstStyle/>
                     <a:p>
-                      <a:pPr algn="ctr" indent="0" marL="0">
+                      <a:pPr marL="0" indent="0" algn="ctr">
                         <a:buNone/>
                       </a:pPr>
                       <a:r>
@@ -25851,7 +26041,7 @@
                       </a:endParaRPr>
                     </a:p>
                   </a:txBody>
-                  <a:tcPr marL="91440" marR="91440" marT="45720" marB="45720" anchor="ctr">
+                  <a:tcPr anchor="ctr">
                     <a:lnL w="38100" cap="flat" cmpd="sng" algn="ctr">
                       <a:solidFill>
                         <a:srgbClr val="FFFFFF"/>
@@ -25898,7 +26088,7 @@
                     <a:bodyPr/>
                     <a:lstStyle/>
                     <a:p>
-                      <a:pPr algn="ctr" indent="0" marL="0">
+                      <a:pPr marL="0" indent="0" algn="ctr">
                         <a:buNone/>
                       </a:pPr>
                       <a:r>
@@ -25919,7 +26109,7 @@
                       </a:endParaRPr>
                     </a:p>
                   </a:txBody>
-                  <a:tcPr marL="91440" marR="91440" marT="45720" marB="45720" anchor="ctr">
+                  <a:tcPr anchor="ctr">
                     <a:lnL w="38100" cap="flat" cmpd="sng" algn="ctr">
                       <a:solidFill>
                         <a:srgbClr val="FFFFFF"/>
@@ -25966,7 +26156,7 @@
                     <a:bodyPr/>
                     <a:lstStyle/>
                     <a:p>
-                      <a:pPr algn="ctr" indent="0" marL="0">
+                      <a:pPr marL="0" indent="0" algn="ctr">
                         <a:buNone/>
                       </a:pPr>
                       <a:r>
@@ -25987,7 +26177,7 @@
                       </a:endParaRPr>
                     </a:p>
                   </a:txBody>
-                  <a:tcPr marL="91440" marR="91440" marT="45720" marB="45720" anchor="ctr">
+                  <a:tcPr anchor="ctr">
                     <a:lnL w="38100" cap="flat" cmpd="sng" algn="ctr">
                       <a:solidFill>
                         <a:srgbClr val="FFFFFF"/>
@@ -26034,7 +26224,7 @@
                     <a:bodyPr/>
                     <a:lstStyle/>
                     <a:p>
-                      <a:pPr algn="ctr" indent="0" marL="0">
+                      <a:pPr marL="0" indent="0" algn="ctr">
                         <a:buNone/>
                       </a:pPr>
                       <a:r>
@@ -26055,7 +26245,7 @@
                       </a:endParaRPr>
                     </a:p>
                   </a:txBody>
-                  <a:tcPr marL="91440" marR="91440" marT="45720" marB="45720" anchor="ctr">
+                  <a:tcPr anchor="ctr">
                     <a:lnL w="38100" cap="flat" cmpd="sng" algn="ctr">
                       <a:solidFill>
                         <a:srgbClr val="FFFFFF"/>
@@ -26102,7 +26292,7 @@
                     <a:bodyPr/>
                     <a:lstStyle/>
                     <a:p>
-                      <a:pPr algn="ctr" indent="0" marL="0">
+                      <a:pPr marL="0" indent="0" algn="ctr">
                         <a:buNone/>
                       </a:pPr>
                       <a:r>
@@ -26123,7 +26313,7 @@
                       </a:endParaRPr>
                     </a:p>
                   </a:txBody>
-                  <a:tcPr marL="91440" marR="91440" marT="45720" marB="45720" anchor="ctr">
+                  <a:tcPr anchor="ctr">
                     <a:lnL w="38100" cap="flat" cmpd="sng" algn="ctr">
                       <a:solidFill>
                         <a:srgbClr val="FFFFFF"/>
@@ -26165,6 +26355,11 @@
                     </a:solidFill>
                   </a:tcPr>
                 </a:tc>
+                <a:extLst>
+                  <a:ext uri="{0D108BD9-81ED-4DB2-BD59-A6C34878D82A}">
+                    <a16:rowId xmlns:a16="http://schemas.microsoft.com/office/drawing/2014/main" val="10001"/>
+                  </a:ext>
+                </a:extLst>
               </a:tr>
               <a:tr h="960120">
                 <a:tc>
@@ -26172,7 +26367,7 @@
                     <a:bodyPr/>
                     <a:lstStyle/>
                     <a:p>
-                      <a:pPr algn="ctr" indent="0" marL="0">
+                      <a:pPr marL="0" indent="0" algn="ctr">
                         <a:buNone/>
                       </a:pPr>
                       <a:r>
@@ -26193,7 +26388,7 @@
                       </a:endParaRPr>
                     </a:p>
                   </a:txBody>
-                  <a:tcPr marL="91440" marR="91440" marT="45720" marB="45720" anchor="ctr">
+                  <a:tcPr anchor="ctr">
                     <a:lnL w="38100" cap="flat" cmpd="sng" algn="ctr">
                       <a:solidFill>
                         <a:srgbClr val="FFFFFF"/>
@@ -26240,7 +26435,7 @@
                     <a:bodyPr/>
                     <a:lstStyle/>
                     <a:p>
-                      <a:pPr algn="ctr" indent="0" marL="0">
+                      <a:pPr marL="0" indent="0" algn="ctr">
                         <a:buNone/>
                       </a:pPr>
                       <a:r>
@@ -26261,7 +26456,7 @@
                       </a:endParaRPr>
                     </a:p>
                   </a:txBody>
-                  <a:tcPr marL="91440" marR="91440" marT="45720" marB="45720" anchor="ctr">
+                  <a:tcPr anchor="ctr">
                     <a:lnL w="38100" cap="flat" cmpd="sng" algn="ctr">
                       <a:solidFill>
                         <a:srgbClr val="FFFFFF"/>
@@ -26308,7 +26503,7 @@
                     <a:bodyPr/>
                     <a:lstStyle/>
                     <a:p>
-                      <a:pPr algn="ctr" indent="0" marL="0">
+                      <a:pPr marL="0" indent="0" algn="ctr">
                         <a:buNone/>
                       </a:pPr>
                       <a:r>
@@ -26329,7 +26524,7 @@
                       </a:endParaRPr>
                     </a:p>
                   </a:txBody>
-                  <a:tcPr marL="91440" marR="91440" marT="45720" marB="45720" anchor="ctr">
+                  <a:tcPr anchor="ctr">
                     <a:lnL w="38100" cap="flat" cmpd="sng" algn="ctr">
                       <a:solidFill>
                         <a:srgbClr val="FFFFFF"/>
@@ -26376,7 +26571,7 @@
                     <a:bodyPr/>
                     <a:lstStyle/>
                     <a:p>
-                      <a:pPr algn="ctr" indent="0" marL="0">
+                      <a:pPr marL="0" indent="0" algn="ctr">
                         <a:buNone/>
                       </a:pPr>
                       <a:r>
@@ -26397,7 +26592,7 @@
                       </a:endParaRPr>
                     </a:p>
                   </a:txBody>
-                  <a:tcPr marL="91440" marR="91440" marT="45720" marB="45720" anchor="ctr">
+                  <a:tcPr anchor="ctr">
                     <a:lnL w="38100" cap="flat" cmpd="sng" algn="ctr">
                       <a:solidFill>
                         <a:srgbClr val="FFFFFF"/>
@@ -26444,7 +26639,7 @@
                     <a:bodyPr/>
                     <a:lstStyle/>
                     <a:p>
-                      <a:pPr algn="ctr" indent="0" marL="0">
+                      <a:pPr marL="0" indent="0" algn="ctr">
                         <a:buNone/>
                       </a:pPr>
                       <a:r>
@@ -26465,7 +26660,7 @@
                       </a:endParaRPr>
                     </a:p>
                   </a:txBody>
-                  <a:tcPr marL="91440" marR="91440" marT="45720" marB="45720" anchor="ctr">
+                  <a:tcPr anchor="ctr">
                     <a:lnL w="38100" cap="flat" cmpd="sng" algn="ctr">
                       <a:solidFill>
                         <a:srgbClr val="FFFFFF"/>
@@ -26507,6 +26702,11 @@
                     </a:solidFill>
                   </a:tcPr>
                 </a:tc>
+                <a:extLst>
+                  <a:ext uri="{0D108BD9-81ED-4DB2-BD59-A6C34878D82A}">
+                    <a16:rowId xmlns:a16="http://schemas.microsoft.com/office/drawing/2014/main" val="10002"/>
+                  </a:ext>
+                </a:extLst>
               </a:tr>
             </a:tbl>
           </a:graphicData>
@@ -26557,7 +26757,7 @@
           <a:bodyPr wrap="square" lIns="0" tIns="0" rIns="0" bIns="0" rtlCol="0" anchor="ctr"/>
           <a:lstStyle/>
           <a:p>
-            <a:pPr algn="ctr" indent="0" marL="0">
+            <a:pPr marL="0" indent="0" algn="ctr">
               <a:lnSpc>
                 <a:spcPts val="1800"/>
               </a:lnSpc>
@@ -26621,7 +26821,7 @@
           <a:bodyPr wrap="square" lIns="0" tIns="0" rIns="0" bIns="0" rtlCol="0" anchor="ctr"/>
           <a:lstStyle/>
           <a:p>
-            <a:pPr algn="ctr" indent="0" marL="0">
+            <a:pPr marL="0" indent="0" algn="ctr">
               <a:buNone/>
             </a:pPr>
             <a:r>
@@ -26641,7 +26841,7 @@
       </p:sp>
       <p:sp>
         <p:nvSpPr>
-          <p:cNvPr id="10" name="Text 7"/>
+          <p:cNvPr id="5" name="Text 7"/>
           <p:cNvSpPr/>
           <p:nvPr/>
         </p:nvSpPr>
@@ -26660,7 +26860,7 @@
           <a:bodyPr wrap="square" lIns="0" tIns="0" rIns="0" bIns="0" rtlCol="0" anchor="ctr"/>
           <a:lstStyle/>
           <a:p>
-            <a:pPr algn="ctr" indent="0" marL="0">
+            <a:pPr marL="0" indent="0" algn="ctr">
               <a:buNone/>
             </a:pPr>
             <a:r>
@@ -26699,7 +26899,7 @@
           <a:bodyPr wrap="square" lIns="0" tIns="0" rIns="0" bIns="0" rtlCol="0" anchor="ctr"/>
           <a:lstStyle/>
           <a:p>
-            <a:pPr algn="r" indent="0" marL="0">
+            <a:pPr marL="0" indent="0" algn="r">
               <a:buNone/>
             </a:pPr>
             <a:r>
@@ -27018,4 +27218,319 @@
     </a:ext>
   </a:extLst>
 </a:theme>
+</file>
+
+<file path=ppt/theme/theme2.xml><?xml version="1.0" encoding="utf-8"?>
+<a:theme xmlns:a="http://schemas.openxmlformats.org/drawingml/2006/main" name="Tema do Office">
+  <a:themeElements>
+    <a:clrScheme name="Office">
+      <a:dk1>
+        <a:sysClr val="windowText" lastClr="000000"/>
+      </a:dk1>
+      <a:lt1>
+        <a:sysClr val="window" lastClr="FFFFFF"/>
+      </a:lt1>
+      <a:dk2>
+        <a:srgbClr val="0E2841"/>
+      </a:dk2>
+      <a:lt2>
+        <a:srgbClr val="E8E8E8"/>
+      </a:lt2>
+      <a:accent1>
+        <a:srgbClr val="156082"/>
+      </a:accent1>
+      <a:accent2>
+        <a:srgbClr val="E97132"/>
+      </a:accent2>
+      <a:accent3>
+        <a:srgbClr val="196B24"/>
+      </a:accent3>
+      <a:accent4>
+        <a:srgbClr val="0F9ED5"/>
+      </a:accent4>
+      <a:accent5>
+        <a:srgbClr val="A02B93"/>
+      </a:accent5>
+      <a:accent6>
+        <a:srgbClr val="4EA72E"/>
+      </a:accent6>
+      <a:hlink>
+        <a:srgbClr val="467886"/>
+      </a:hlink>
+      <a:folHlink>
+        <a:srgbClr val="96607D"/>
+      </a:folHlink>
+    </a:clrScheme>
+    <a:fontScheme name="Office">
+      <a:majorFont>
+        <a:latin typeface="Aptos Display" panose="02110004020202020204"/>
+        <a:ea typeface=""/>
+        <a:cs typeface=""/>
+        <a:font script="Jpan" typeface="游ゴシック Light"/>
+        <a:font script="Hang" typeface="맑은 고딕"/>
+        <a:font script="Hans" typeface="等线 Light"/>
+        <a:font script="Hant" typeface="新細明體"/>
+        <a:font script="Arab" typeface="Times New Roman"/>
+        <a:font script="Hebr" typeface="Times New Roman"/>
+        <a:font script="Thai" typeface="Angsana New"/>
+        <a:font script="Ethi" typeface="Nyala"/>
+        <a:font script="Beng" typeface="Vrinda"/>
+        <a:font script="Gujr" typeface="Shruti"/>
+        <a:font script="Khmr" typeface="MoolBoran"/>
+        <a:font script="Knda" typeface="Tunga"/>
+        <a:font script="Guru" typeface="Raavi"/>
+        <a:font script="Cans" typeface="Euphemia"/>
+        <a:font script="Cher" typeface="Plantagenet Cherokee"/>
+        <a:font script="Yiii" typeface="Microsoft Yi Baiti"/>
+        <a:font script="Tibt" typeface="Microsoft Himalaya"/>
+        <a:font script="Thaa" typeface="MV Boli"/>
+        <a:font script="Deva" typeface="Mangal"/>
+        <a:font script="Telu" typeface="Gautami"/>
+        <a:font script="Taml" typeface="Latha"/>
+        <a:font script="Syrc" typeface="Estrangelo Edessa"/>
+        <a:font script="Orya" typeface="Kalinga"/>
+        <a:font script="Mlym" typeface="Kartika"/>
+        <a:font script="Laoo" typeface="DokChampa"/>
+        <a:font script="Sinh" typeface="Iskoola Pota"/>
+        <a:font script="Mong" typeface="Mongolian Baiti"/>
+        <a:font script="Viet" typeface="Times New Roman"/>
+        <a:font script="Uigh" typeface="Microsoft Uighur"/>
+        <a:font script="Geor" typeface="Sylfaen"/>
+        <a:font script="Armn" typeface="Arial"/>
+        <a:font script="Bugi" typeface="Leelawadee UI"/>
+        <a:font script="Bopo" typeface="Microsoft JhengHei"/>
+        <a:font script="Java" typeface="Javanese Text"/>
+        <a:font script="Lisu" typeface="Segoe UI"/>
+        <a:font script="Mymr" typeface="Myanmar Text"/>
+        <a:font script="Nkoo" typeface="Ebrima"/>
+        <a:font script="Olck" typeface="Nirmala UI"/>
+        <a:font script="Osma" typeface="Ebrima"/>
+        <a:font script="Phag" typeface="Phagspa"/>
+        <a:font script="Syrn" typeface="Estrangelo Edessa"/>
+        <a:font script="Syrj" typeface="Estrangelo Edessa"/>
+        <a:font script="Syre" typeface="Estrangelo Edessa"/>
+        <a:font script="Sora" typeface="Nirmala UI"/>
+        <a:font script="Tale" typeface="Microsoft Tai Le"/>
+        <a:font script="Talu" typeface="Microsoft New Tai Lue"/>
+        <a:font script="Tfng" typeface="Ebrima"/>
+      </a:majorFont>
+      <a:minorFont>
+        <a:latin typeface="Aptos" panose="02110004020202020204"/>
+        <a:ea typeface=""/>
+        <a:cs typeface=""/>
+        <a:font script="Jpan" typeface="游ゴシック"/>
+        <a:font script="Hang" typeface="맑은 고딕"/>
+        <a:font script="Hans" typeface="等线"/>
+        <a:font script="Hant" typeface="新細明體"/>
+        <a:font script="Arab" typeface="Arial"/>
+        <a:font script="Hebr" typeface="Arial"/>
+        <a:font script="Thai" typeface="Cordia New"/>
+        <a:font script="Ethi" typeface="Nyala"/>
+        <a:font script="Beng" typeface="Vrinda"/>
+        <a:font script="Gujr" typeface="Shruti"/>
+        <a:font script="Khmr" typeface="DaunPenh"/>
+        <a:font script="Knda" typeface="Tunga"/>
+        <a:font script="Guru" typeface="Raavi"/>
+        <a:font script="Cans" typeface="Euphemia"/>
+        <a:font script="Cher" typeface="Plantagenet Cherokee"/>
+        <a:font script="Yiii" typeface="Microsoft Yi Baiti"/>
+        <a:font script="Tibt" typeface="Microsoft Himalaya"/>
+        <a:font script="Thaa" typeface="MV Boli"/>
+        <a:font script="Deva" typeface="Mangal"/>
+        <a:font script="Telu" typeface="Gautami"/>
+        <a:font script="Taml" typeface="Latha"/>
+        <a:font script="Syrc" typeface="Estrangelo Edessa"/>
+        <a:font script="Orya" typeface="Kalinga"/>
+        <a:font script="Mlym" typeface="Kartika"/>
+        <a:font script="Laoo" typeface="DokChampa"/>
+        <a:font script="Sinh" typeface="Iskoola Pota"/>
+        <a:font script="Mong" typeface="Mongolian Baiti"/>
+        <a:font script="Viet" typeface="Arial"/>
+        <a:font script="Uigh" typeface="Microsoft Uighur"/>
+        <a:font script="Geor" typeface="Sylfaen"/>
+        <a:font script="Armn" typeface="Arial"/>
+        <a:font script="Bugi" typeface="Leelawadee UI"/>
+        <a:font script="Bopo" typeface="Microsoft JhengHei"/>
+        <a:font script="Java" typeface="Javanese Text"/>
+        <a:font script="Lisu" typeface="Segoe UI"/>
+        <a:font script="Mymr" typeface="Myanmar Text"/>
+        <a:font script="Nkoo" typeface="Ebrima"/>
+        <a:font script="Olck" typeface="Nirmala UI"/>
+        <a:font script="Osma" typeface="Ebrima"/>
+        <a:font script="Phag" typeface="Phagspa"/>
+        <a:font script="Syrn" typeface="Estrangelo Edessa"/>
+        <a:font script="Syrj" typeface="Estrangelo Edessa"/>
+        <a:font script="Syre" typeface="Estrangelo Edessa"/>
+        <a:font script="Sora" typeface="Nirmala UI"/>
+        <a:font script="Tale" typeface="Microsoft Tai Le"/>
+        <a:font script="Talu" typeface="Microsoft New Tai Lue"/>
+        <a:font script="Tfng" typeface="Ebrima"/>
+      </a:minorFont>
+    </a:fontScheme>
+    <a:fmtScheme name="Office">
+      <a:fillStyleLst>
+        <a:solidFill>
+          <a:schemeClr val="phClr"/>
+        </a:solidFill>
+        <a:gradFill rotWithShape="1">
+          <a:gsLst>
+            <a:gs pos="0">
+              <a:schemeClr val="phClr">
+                <a:lumMod val="110000"/>
+                <a:satMod val="105000"/>
+                <a:tint val="67000"/>
+              </a:schemeClr>
+            </a:gs>
+            <a:gs pos="50000">
+              <a:schemeClr val="phClr">
+                <a:lumMod val="105000"/>
+                <a:satMod val="103000"/>
+                <a:tint val="73000"/>
+              </a:schemeClr>
+            </a:gs>
+            <a:gs pos="100000">
+              <a:schemeClr val="phClr">
+                <a:lumMod val="105000"/>
+                <a:satMod val="109000"/>
+                <a:tint val="81000"/>
+              </a:schemeClr>
+            </a:gs>
+          </a:gsLst>
+          <a:lin ang="5400000" scaled="0"/>
+        </a:gradFill>
+        <a:gradFill rotWithShape="1">
+          <a:gsLst>
+            <a:gs pos="0">
+              <a:schemeClr val="phClr">
+                <a:satMod val="103000"/>
+                <a:lumMod val="102000"/>
+                <a:tint val="94000"/>
+              </a:schemeClr>
+            </a:gs>
+            <a:gs pos="50000">
+              <a:schemeClr val="phClr">
+                <a:satMod val="110000"/>
+                <a:lumMod val="100000"/>
+                <a:shade val="100000"/>
+              </a:schemeClr>
+            </a:gs>
+            <a:gs pos="100000">
+              <a:schemeClr val="phClr">
+                <a:lumMod val="99000"/>
+                <a:satMod val="120000"/>
+                <a:shade val="78000"/>
+              </a:schemeClr>
+            </a:gs>
+          </a:gsLst>
+          <a:lin ang="5400000" scaled="0"/>
+        </a:gradFill>
+      </a:fillStyleLst>
+      <a:lnStyleLst>
+        <a:ln w="12700" cap="flat" cmpd="sng" algn="ctr">
+          <a:solidFill>
+            <a:schemeClr val="phClr"/>
+          </a:solidFill>
+          <a:prstDash val="solid"/>
+          <a:miter lim="800000"/>
+        </a:ln>
+        <a:ln w="19050" cap="flat" cmpd="sng" algn="ctr">
+          <a:solidFill>
+            <a:schemeClr val="phClr"/>
+          </a:solidFill>
+          <a:prstDash val="solid"/>
+          <a:miter lim="800000"/>
+        </a:ln>
+        <a:ln w="25400" cap="flat" cmpd="sng" algn="ctr">
+          <a:solidFill>
+            <a:schemeClr val="phClr"/>
+          </a:solidFill>
+          <a:prstDash val="solid"/>
+          <a:miter lim="800000"/>
+        </a:ln>
+      </a:lnStyleLst>
+      <a:effectStyleLst>
+        <a:effectStyle>
+          <a:effectLst/>
+        </a:effectStyle>
+        <a:effectStyle>
+          <a:effectLst/>
+        </a:effectStyle>
+        <a:effectStyle>
+          <a:effectLst>
+            <a:outerShdw blurRad="57150" dist="19050" dir="5400000" algn="ctr" rotWithShape="0">
+              <a:srgbClr val="000000">
+                <a:alpha val="63000"/>
+              </a:srgbClr>
+            </a:outerShdw>
+          </a:effectLst>
+        </a:effectStyle>
+      </a:effectStyleLst>
+      <a:bgFillStyleLst>
+        <a:solidFill>
+          <a:schemeClr val="phClr"/>
+        </a:solidFill>
+        <a:solidFill>
+          <a:schemeClr val="phClr">
+            <a:tint val="95000"/>
+            <a:satMod val="170000"/>
+          </a:schemeClr>
+        </a:solidFill>
+        <a:gradFill rotWithShape="1">
+          <a:gsLst>
+            <a:gs pos="0">
+              <a:schemeClr val="phClr">
+                <a:tint val="93000"/>
+                <a:satMod val="150000"/>
+                <a:shade val="98000"/>
+                <a:lumMod val="102000"/>
+              </a:schemeClr>
+            </a:gs>
+            <a:gs pos="50000">
+              <a:schemeClr val="phClr">
+                <a:tint val="98000"/>
+                <a:satMod val="130000"/>
+                <a:shade val="90000"/>
+                <a:lumMod val="103000"/>
+              </a:schemeClr>
+            </a:gs>
+            <a:gs pos="100000">
+              <a:schemeClr val="phClr">
+                <a:shade val="63000"/>
+                <a:satMod val="120000"/>
+              </a:schemeClr>
+            </a:gs>
+          </a:gsLst>
+          <a:lin ang="5400000" scaled="0"/>
+        </a:gradFill>
+      </a:bgFillStyleLst>
+    </a:fmtScheme>
+  </a:themeElements>
+  <a:objectDefaults>
+    <a:lnDef>
+      <a:spPr/>
+      <a:bodyPr/>
+      <a:lstStyle/>
+      <a:style>
+        <a:lnRef idx="2">
+          <a:schemeClr val="accent1"/>
+        </a:lnRef>
+        <a:fillRef idx="0">
+          <a:schemeClr val="accent1"/>
+        </a:fillRef>
+        <a:effectRef idx="1">
+          <a:schemeClr val="accent1"/>
+        </a:effectRef>
+        <a:fontRef idx="minor">
+          <a:schemeClr val="tx1"/>
+        </a:fontRef>
+      </a:style>
+    </a:lnDef>
+  </a:objectDefaults>
+  <a:extraClrSchemeLst/>
+  <a:extLst>
+    <a:ext uri="{05A4C25C-085E-4340-85A3-A5531E510DB2}">
+      <thm15:themeFamily xmlns:thm15="http://schemas.microsoft.com/office/thememl/2012/main" name="Office Theme" id="{2E142A2C-CD16-42D6-873A-C26D2A0506FA}" vid="{1BDDFF52-6CD6-40A5-AB3C-68EB2F1E4D0A}"/>
+    </a:ext>
+  </a:extLst>
+</a:theme>
 </file>